--- a/deliverables/showcase/poster_v9_jiaming_wei.pptx
+++ b/deliverables/showcase/poster_v9_jiaming_wei.pptx
@@ -3523,7 +3523,7 @@
                 </a:solidFill>
                 <a:latin typeface="Georgia"/>
               </a:rPr>
-              <a:t>Measuring the ceiling, the predictability and the economics of representation routing in web agents</a:t>
+              <a:t>Testing when richer web-agent representations help — and whether their value can be predicted cheaply</a:t>
             </a:r>
           </a:p>
         </p:txBody>
@@ -4197,7 +4197,7 @@
         <p:spPr>
           <a:xfrm>
             <a:off x="727200" y="14020520"/>
-            <a:ext cx="86400" cy="2429980"/>
+            <a:ext cx="86400" cy="2100034"/>
           </a:xfrm>
           <a:prstGeom prst="rect">
             <a:avLst/>
@@ -4283,7 +4283,7 @@
         <p:spPr>
           <a:xfrm>
             <a:off x="907200" y="14452520"/>
-            <a:ext cx="1440000" cy="576000"/>
+            <a:ext cx="1440000" cy="504000"/>
           </a:xfrm>
           <a:prstGeom prst="rect">
             <a:avLst/>
@@ -4324,8 +4324,8 @@
         </p:nvSpPr>
         <p:spPr>
           <a:xfrm>
-            <a:off x="907200" y="15064520"/>
-            <a:ext cx="1440000" cy="1008000"/>
+            <a:off x="907200" y="15028520"/>
+            <a:ext cx="1440000" cy="648000"/>
           </a:xfrm>
           <a:prstGeom prst="rect">
             <a:avLst/>
@@ -4372,7 +4372,7 @@
                 </a:solidFill>
                 <a:latin typeface="Arial"/>
               </a:rPr>
-              <a:t>8 different pages</a:t>
+              <a:t>8 pages seen</a:t>
             </a:r>
           </a:p>
           <a:p>
@@ -4393,96 +4393,19 @@
               </a:rPr>
               <a:t>$0.09</a:t>
             </a:r>
-            <a:r>
-              <a:rPr sz="1550" b="0" i="0">
-                <a:solidFill>
-                  <a:srgbClr val="14855F"/>
-                </a:solidFill>
-                <a:latin typeface="Arial"/>
-              </a:rPr>
-              <a:t> · solved</a:t>
-            </a:r>
-          </a:p>
-        </p:txBody>
-      </p:sp>
-      <p:pic>
-        <p:nvPicPr>
-          <p:cNvPr id="83" name="Picture 82" descr="lane_read_0.png"/>
-          <p:cNvPicPr>
-            <a:picLocks noChangeAspect="1"/>
-          </p:cNvPicPr>
-          <p:nvPr/>
-        </p:nvPicPr>
-        <p:blipFill>
-          <a:blip r:embed="rId6"/>
-          <a:stretch>
-            <a:fillRect/>
-          </a:stretch>
-        </p:blipFill>
-        <p:spPr>
-          <a:xfrm>
-            <a:off x="2383200" y="14020520"/>
-            <a:ext cx="4484700" cy="1889981"/>
-          </a:xfrm>
-          <a:prstGeom prst="rect">
-            <a:avLst/>
-          </a:prstGeom>
-        </p:spPr>
-      </p:pic>
-      <p:sp>
-        <p:nvSpPr>
-          <p:cNvPr id="84" name="Rectangle 83"/>
-          <p:cNvSpPr/>
-          <p:nvPr/>
-        </p:nvSpPr>
-        <p:spPr>
-          <a:xfrm>
-            <a:off x="2383200" y="14020520"/>
-            <a:ext cx="4484700" cy="1889980"/>
-          </a:xfrm>
-          <a:prstGeom prst="rect">
-            <a:avLst/>
-          </a:prstGeom>
-          <a:noFill/>
-          <a:ln w="8890">
-            <a:solidFill>
-              <a:srgbClr val="C9CFE0"/>
-            </a:solidFill>
-          </a:ln>
-          <a:effectLst/>
-        </p:spPr>
-        <p:style>
-          <a:lnRef idx="1">
-            <a:schemeClr val="accent1"/>
-          </a:lnRef>
-          <a:fillRef idx="3">
-            <a:schemeClr val="accent1"/>
-          </a:fillRef>
-          <a:effectRef idx="2">
-            <a:schemeClr val="accent1"/>
-          </a:effectRef>
-          <a:fontRef idx="minor">
-            <a:schemeClr val="lt1"/>
-          </a:fontRef>
-        </p:style>
-        <p:txBody>
-          <a:bodyPr rtlCol="0" anchor="ctr" wrap="square"/>
-          <a:lstStyle/>
-          <a:p>
-            <a:pPr algn="ctr"/>
-          </a:p>
-        </p:txBody>
-      </p:sp>
-      <p:sp>
-        <p:nvSpPr>
-          <p:cNvPr id="85" name="TextBox 84"/>
+          </a:p>
+        </p:txBody>
+      </p:sp>
+      <p:sp>
+        <p:nvSpPr>
+          <p:cNvPr id="83" name="TextBox 82"/>
           <p:cNvSpPr txBox="1"/>
           <p:nvPr/>
         </p:nvSpPr>
         <p:spPr>
           <a:xfrm>
-            <a:off x="2383200" y="15964500"/>
-            <a:ext cx="4520700" cy="252000"/>
+            <a:off x="907200" y="15712520"/>
+            <a:ext cx="1440000" cy="360000"/>
           </a:xfrm>
           <a:prstGeom prst="rect">
             <a:avLst/>
@@ -4504,14 +4427,82 @@
               </a:spcAft>
             </a:pPr>
             <a:r>
-              <a:rPr sz="1550" b="1" i="0">
+              <a:rPr sz="2000" b="1" i="0">
                 <a:solidFill>
-                  <a:srgbClr val="141E41"/>
+                  <a:srgbClr val="14855F"/>
                 </a:solidFill>
                 <a:latin typeface="Arial"/>
               </a:rPr>
-              <a:t>step 0 · click</a:t>
-            </a:r>
+              <a:t>solved</a:t>
+            </a:r>
+          </a:p>
+        </p:txBody>
+      </p:sp>
+      <p:pic>
+        <p:nvPicPr>
+          <p:cNvPr id="84" name="Picture 83" descr="lane_read_0.png"/>
+          <p:cNvPicPr>
+            <a:picLocks noChangeAspect="1"/>
+          </p:cNvPicPr>
+          <p:nvPr/>
+        </p:nvPicPr>
+        <p:blipFill>
+          <a:blip r:embed="rId6"/>
+          <a:stretch>
+            <a:fillRect/>
+          </a:stretch>
+        </p:blipFill>
+        <p:spPr>
+          <a:xfrm>
+            <a:off x="2383200" y="14020520"/>
+            <a:ext cx="4484700" cy="1560035"/>
+          </a:xfrm>
+          <a:prstGeom prst="rect">
+            <a:avLst/>
+          </a:prstGeom>
+        </p:spPr>
+      </p:pic>
+      <p:sp>
+        <p:nvSpPr>
+          <p:cNvPr id="85" name="Rectangle 84"/>
+          <p:cNvSpPr/>
+          <p:nvPr/>
+        </p:nvSpPr>
+        <p:spPr>
+          <a:xfrm>
+            <a:off x="2383200" y="14020520"/>
+            <a:ext cx="4484700" cy="1560034"/>
+          </a:xfrm>
+          <a:prstGeom prst="rect">
+            <a:avLst/>
+          </a:prstGeom>
+          <a:noFill/>
+          <a:ln w="8890">
+            <a:solidFill>
+              <a:srgbClr val="C9CFE0"/>
+            </a:solidFill>
+          </a:ln>
+          <a:effectLst/>
+        </p:spPr>
+        <p:style>
+          <a:lnRef idx="1">
+            <a:schemeClr val="accent1"/>
+          </a:lnRef>
+          <a:fillRef idx="3">
+            <a:schemeClr val="accent1"/>
+          </a:fillRef>
+          <a:effectRef idx="2">
+            <a:schemeClr val="accent1"/>
+          </a:effectRef>
+          <a:fontRef idx="minor">
+            <a:schemeClr val="lt1"/>
+          </a:fontRef>
+        </p:style>
+        <p:txBody>
+          <a:bodyPr rtlCol="0" anchor="ctr" wrap="square"/>
+          <a:lstStyle/>
+          <a:p>
+            <a:pPr algn="ctr"/>
           </a:p>
         </p:txBody>
       </p:sp>
@@ -4523,7 +4514,7 @@
         </p:nvSpPr>
         <p:spPr>
           <a:xfrm>
-            <a:off x="2383200" y="16198500"/>
+            <a:off x="2383200" y="15634554"/>
             <a:ext cx="4520700" cy="252000"/>
           </a:xfrm>
           <a:prstGeom prst="rect">
@@ -4546,94 +4537,26 @@
               </a:spcAft>
             </a:pPr>
             <a:r>
-              <a:rPr sz="1400" b="0" i="0">
+              <a:rPr sz="1550" b="1" i="0">
                 <a:solidFill>
-                  <a:srgbClr val="5D6787"/>
+                  <a:srgbClr val="141E41"/>
                 </a:solidFill>
                 <a:latin typeface="Arial"/>
               </a:rPr>
-              <a:t>$0.004 spent</a:t>
-            </a:r>
-          </a:p>
-        </p:txBody>
-      </p:sp>
-      <p:pic>
-        <p:nvPicPr>
-          <p:cNvPr id="87" name="Picture 86" descr="lane_read_1.png"/>
-          <p:cNvPicPr>
-            <a:picLocks noChangeAspect="1"/>
-          </p:cNvPicPr>
-          <p:nvPr/>
-        </p:nvPicPr>
-        <p:blipFill>
-          <a:blip r:embed="rId7"/>
-          <a:stretch>
-            <a:fillRect/>
-          </a:stretch>
-        </p:blipFill>
-        <p:spPr>
-          <a:xfrm>
-            <a:off x="7011900" y="14020520"/>
-            <a:ext cx="4484700" cy="1889981"/>
-          </a:xfrm>
-          <a:prstGeom prst="rect">
-            <a:avLst/>
-          </a:prstGeom>
-        </p:spPr>
-      </p:pic>
-      <p:sp>
-        <p:nvSpPr>
-          <p:cNvPr id="88" name="Rectangle 87"/>
-          <p:cNvSpPr/>
-          <p:nvPr/>
-        </p:nvSpPr>
-        <p:spPr>
-          <a:xfrm>
-            <a:off x="7011900" y="14020520"/>
-            <a:ext cx="4484700" cy="1889980"/>
-          </a:xfrm>
-          <a:prstGeom prst="rect">
-            <a:avLst/>
-          </a:prstGeom>
-          <a:noFill/>
-          <a:ln w="8890">
-            <a:solidFill>
-              <a:srgbClr val="C9CFE0"/>
-            </a:solidFill>
-          </a:ln>
-          <a:effectLst/>
-        </p:spPr>
-        <p:style>
-          <a:lnRef idx="1">
-            <a:schemeClr val="accent1"/>
-          </a:lnRef>
-          <a:fillRef idx="3">
-            <a:schemeClr val="accent1"/>
-          </a:fillRef>
-          <a:effectRef idx="2">
-            <a:schemeClr val="accent1"/>
-          </a:effectRef>
-          <a:fontRef idx="minor">
-            <a:schemeClr val="lt1"/>
-          </a:fontRef>
-        </p:style>
-        <p:txBody>
-          <a:bodyPr rtlCol="0" anchor="ctr" wrap="square"/>
-          <a:lstStyle/>
-          <a:p>
-            <a:pPr algn="ctr"/>
-          </a:p>
-        </p:txBody>
-      </p:sp>
-      <p:sp>
-        <p:nvSpPr>
-          <p:cNvPr id="89" name="TextBox 88"/>
+              <a:t>step 0 · click</a:t>
+            </a:r>
+          </a:p>
+        </p:txBody>
+      </p:sp>
+      <p:sp>
+        <p:nvSpPr>
+          <p:cNvPr id="87" name="TextBox 86"/>
           <p:cNvSpPr txBox="1"/>
           <p:nvPr/>
         </p:nvSpPr>
         <p:spPr>
           <a:xfrm>
-            <a:off x="7011900" y="15964500"/>
+            <a:off x="2383200" y="15868554"/>
             <a:ext cx="4520700" cy="252000"/>
           </a:xfrm>
           <a:prstGeom prst="rect">
@@ -4656,14 +4579,82 @@
               </a:spcAft>
             </a:pPr>
             <a:r>
-              <a:rPr sz="1550" b="1" i="0">
+              <a:rPr sz="1400" b="0" i="0">
                 <a:solidFill>
-                  <a:srgbClr val="141E41"/>
+                  <a:srgbClr val="5D6787"/>
                 </a:solidFill>
                 <a:latin typeface="Arial"/>
               </a:rPr>
-              <a:t>step 2 · click</a:t>
-            </a:r>
+              <a:t>$0.004 spent</a:t>
+            </a:r>
+          </a:p>
+        </p:txBody>
+      </p:sp>
+      <p:pic>
+        <p:nvPicPr>
+          <p:cNvPr id="88" name="Picture 87" descr="lane_read_1.png"/>
+          <p:cNvPicPr>
+            <a:picLocks noChangeAspect="1"/>
+          </p:cNvPicPr>
+          <p:nvPr/>
+        </p:nvPicPr>
+        <p:blipFill>
+          <a:blip r:embed="rId7"/>
+          <a:stretch>
+            <a:fillRect/>
+          </a:stretch>
+        </p:blipFill>
+        <p:spPr>
+          <a:xfrm>
+            <a:off x="7011900" y="14020520"/>
+            <a:ext cx="4484700" cy="1560035"/>
+          </a:xfrm>
+          <a:prstGeom prst="rect">
+            <a:avLst/>
+          </a:prstGeom>
+        </p:spPr>
+      </p:pic>
+      <p:sp>
+        <p:nvSpPr>
+          <p:cNvPr id="89" name="Rectangle 88"/>
+          <p:cNvSpPr/>
+          <p:nvPr/>
+        </p:nvSpPr>
+        <p:spPr>
+          <a:xfrm>
+            <a:off x="7011900" y="14020520"/>
+            <a:ext cx="4484700" cy="1560034"/>
+          </a:xfrm>
+          <a:prstGeom prst="rect">
+            <a:avLst/>
+          </a:prstGeom>
+          <a:noFill/>
+          <a:ln w="8890">
+            <a:solidFill>
+              <a:srgbClr val="C9CFE0"/>
+            </a:solidFill>
+          </a:ln>
+          <a:effectLst/>
+        </p:spPr>
+        <p:style>
+          <a:lnRef idx="1">
+            <a:schemeClr val="accent1"/>
+          </a:lnRef>
+          <a:fillRef idx="3">
+            <a:schemeClr val="accent1"/>
+          </a:fillRef>
+          <a:effectRef idx="2">
+            <a:schemeClr val="accent1"/>
+          </a:effectRef>
+          <a:fontRef idx="minor">
+            <a:schemeClr val="lt1"/>
+          </a:fontRef>
+        </p:style>
+        <p:txBody>
+          <a:bodyPr rtlCol="0" anchor="ctr" wrap="square"/>
+          <a:lstStyle/>
+          <a:p>
+            <a:pPr algn="ctr"/>
           </a:p>
         </p:txBody>
       </p:sp>
@@ -4675,7 +4666,7 @@
         </p:nvSpPr>
         <p:spPr>
           <a:xfrm>
-            <a:off x="7011900" y="16198500"/>
+            <a:off x="7011900" y="15634554"/>
             <a:ext cx="4520700" cy="252000"/>
           </a:xfrm>
           <a:prstGeom prst="rect">
@@ -4698,94 +4689,26 @@
               </a:spcAft>
             </a:pPr>
             <a:r>
-              <a:rPr sz="1400" b="0" i="0">
+              <a:rPr sz="1550" b="1" i="0">
                 <a:solidFill>
-                  <a:srgbClr val="5D6787"/>
+                  <a:srgbClr val="141E41"/>
                 </a:solidFill>
                 <a:latin typeface="Arial"/>
               </a:rPr>
-              <a:t>$0.012 spent</a:t>
-            </a:r>
-          </a:p>
-        </p:txBody>
-      </p:sp>
-      <p:pic>
-        <p:nvPicPr>
-          <p:cNvPr id="91" name="Picture 90" descr="lane_read_2.png"/>
-          <p:cNvPicPr>
-            <a:picLocks noChangeAspect="1"/>
-          </p:cNvPicPr>
-          <p:nvPr/>
-        </p:nvPicPr>
-        <p:blipFill>
-          <a:blip r:embed="rId8"/>
-          <a:stretch>
-            <a:fillRect/>
-          </a:stretch>
-        </p:blipFill>
-        <p:spPr>
-          <a:xfrm>
-            <a:off x="11640600" y="14020520"/>
-            <a:ext cx="4484700" cy="1889981"/>
-          </a:xfrm>
-          <a:prstGeom prst="rect">
-            <a:avLst/>
-          </a:prstGeom>
-        </p:spPr>
-      </p:pic>
-      <p:sp>
-        <p:nvSpPr>
-          <p:cNvPr id="92" name="Rectangle 91"/>
-          <p:cNvSpPr/>
-          <p:nvPr/>
-        </p:nvSpPr>
-        <p:spPr>
-          <a:xfrm>
-            <a:off x="11640600" y="14020520"/>
-            <a:ext cx="4484700" cy="1889980"/>
-          </a:xfrm>
-          <a:prstGeom prst="rect">
-            <a:avLst/>
-          </a:prstGeom>
-          <a:noFill/>
-          <a:ln w="8890">
-            <a:solidFill>
-              <a:srgbClr val="C9CFE0"/>
-            </a:solidFill>
-          </a:ln>
-          <a:effectLst/>
-        </p:spPr>
-        <p:style>
-          <a:lnRef idx="1">
-            <a:schemeClr val="accent1"/>
-          </a:lnRef>
-          <a:fillRef idx="3">
-            <a:schemeClr val="accent1"/>
-          </a:fillRef>
-          <a:effectRef idx="2">
-            <a:schemeClr val="accent1"/>
-          </a:effectRef>
-          <a:fontRef idx="minor">
-            <a:schemeClr val="lt1"/>
-          </a:fontRef>
-        </p:style>
-        <p:txBody>
-          <a:bodyPr rtlCol="0" anchor="ctr" wrap="square"/>
-          <a:lstStyle/>
-          <a:p>
-            <a:pPr algn="ctr"/>
-          </a:p>
-        </p:txBody>
-      </p:sp>
-      <p:sp>
-        <p:nvSpPr>
-          <p:cNvPr id="93" name="TextBox 92"/>
+              <a:t>step 2 · click</a:t>
+            </a:r>
+          </a:p>
+        </p:txBody>
+      </p:sp>
+      <p:sp>
+        <p:nvSpPr>
+          <p:cNvPr id="91" name="TextBox 90"/>
           <p:cNvSpPr txBox="1"/>
           <p:nvPr/>
         </p:nvSpPr>
         <p:spPr>
           <a:xfrm>
-            <a:off x="11640600" y="15964500"/>
+            <a:off x="7011900" y="15868554"/>
             <a:ext cx="4520700" cy="252000"/>
           </a:xfrm>
           <a:prstGeom prst="rect">
@@ -4808,14 +4731,82 @@
               </a:spcAft>
             </a:pPr>
             <a:r>
-              <a:rPr sz="1550" b="1" i="0">
+              <a:rPr sz="1400" b="0" i="0">
                 <a:solidFill>
-                  <a:srgbClr val="141E41"/>
+                  <a:srgbClr val="5D6787"/>
                 </a:solidFill>
                 <a:latin typeface="Arial"/>
               </a:rPr>
-              <a:t>step 5 · type</a:t>
-            </a:r>
+              <a:t>$0.012 spent</a:t>
+            </a:r>
+          </a:p>
+        </p:txBody>
+      </p:sp>
+      <p:pic>
+        <p:nvPicPr>
+          <p:cNvPr id="92" name="Picture 91" descr="lane_read_2.png"/>
+          <p:cNvPicPr>
+            <a:picLocks noChangeAspect="1"/>
+          </p:cNvPicPr>
+          <p:nvPr/>
+        </p:nvPicPr>
+        <p:blipFill>
+          <a:blip r:embed="rId8"/>
+          <a:stretch>
+            <a:fillRect/>
+          </a:stretch>
+        </p:blipFill>
+        <p:spPr>
+          <a:xfrm>
+            <a:off x="11640600" y="14020520"/>
+            <a:ext cx="4484700" cy="1560035"/>
+          </a:xfrm>
+          <a:prstGeom prst="rect">
+            <a:avLst/>
+          </a:prstGeom>
+        </p:spPr>
+      </p:pic>
+      <p:sp>
+        <p:nvSpPr>
+          <p:cNvPr id="93" name="Rectangle 92"/>
+          <p:cNvSpPr/>
+          <p:nvPr/>
+        </p:nvSpPr>
+        <p:spPr>
+          <a:xfrm>
+            <a:off x="11640600" y="14020520"/>
+            <a:ext cx="4484700" cy="1560034"/>
+          </a:xfrm>
+          <a:prstGeom prst="rect">
+            <a:avLst/>
+          </a:prstGeom>
+          <a:noFill/>
+          <a:ln w="8890">
+            <a:solidFill>
+              <a:srgbClr val="C9CFE0"/>
+            </a:solidFill>
+          </a:ln>
+          <a:effectLst/>
+        </p:spPr>
+        <p:style>
+          <a:lnRef idx="1">
+            <a:schemeClr val="accent1"/>
+          </a:lnRef>
+          <a:fillRef idx="3">
+            <a:schemeClr val="accent1"/>
+          </a:fillRef>
+          <a:effectRef idx="2">
+            <a:schemeClr val="accent1"/>
+          </a:effectRef>
+          <a:fontRef idx="minor">
+            <a:schemeClr val="lt1"/>
+          </a:fontRef>
+        </p:style>
+        <p:txBody>
+          <a:bodyPr rtlCol="0" anchor="ctr" wrap="square"/>
+          <a:lstStyle/>
+          <a:p>
+            <a:pPr algn="ctr"/>
           </a:p>
         </p:txBody>
       </p:sp>
@@ -4827,7 +4818,7 @@
         </p:nvSpPr>
         <p:spPr>
           <a:xfrm>
-            <a:off x="11640600" y="16198500"/>
+            <a:off x="11640600" y="15634554"/>
             <a:ext cx="4520700" cy="252000"/>
           </a:xfrm>
           <a:prstGeom prst="rect">
@@ -4850,94 +4841,26 @@
               </a:spcAft>
             </a:pPr>
             <a:r>
-              <a:rPr sz="1400" b="0" i="0">
+              <a:rPr sz="1550" b="1" i="0">
                 <a:solidFill>
-                  <a:srgbClr val="5D6787"/>
+                  <a:srgbClr val="141E41"/>
                 </a:solidFill>
                 <a:latin typeface="Arial"/>
               </a:rPr>
-              <a:t>$0.024 spent</a:t>
-            </a:r>
-          </a:p>
-        </p:txBody>
-      </p:sp>
-      <p:pic>
-        <p:nvPicPr>
-          <p:cNvPr id="95" name="Picture 94" descr="lane_read_3.png"/>
-          <p:cNvPicPr>
-            <a:picLocks noChangeAspect="1"/>
-          </p:cNvPicPr>
-          <p:nvPr/>
-        </p:nvPicPr>
-        <p:blipFill>
-          <a:blip r:embed="rId9"/>
-          <a:stretch>
-            <a:fillRect/>
-          </a:stretch>
-        </p:blipFill>
-        <p:spPr>
-          <a:xfrm>
-            <a:off x="16269300" y="14020520"/>
-            <a:ext cx="4484700" cy="1889981"/>
-          </a:xfrm>
-          <a:prstGeom prst="rect">
-            <a:avLst/>
-          </a:prstGeom>
-        </p:spPr>
-      </p:pic>
-      <p:sp>
-        <p:nvSpPr>
-          <p:cNvPr id="96" name="Rectangle 95"/>
-          <p:cNvSpPr/>
-          <p:nvPr/>
-        </p:nvSpPr>
-        <p:spPr>
-          <a:xfrm>
-            <a:off x="16269300" y="14020520"/>
-            <a:ext cx="4484700" cy="1889980"/>
-          </a:xfrm>
-          <a:prstGeom prst="rect">
-            <a:avLst/>
-          </a:prstGeom>
-          <a:noFill/>
-          <a:ln w="8890">
-            <a:solidFill>
-              <a:srgbClr val="C9CFE0"/>
-            </a:solidFill>
-          </a:ln>
-          <a:effectLst/>
-        </p:spPr>
-        <p:style>
-          <a:lnRef idx="1">
-            <a:schemeClr val="accent1"/>
-          </a:lnRef>
-          <a:fillRef idx="3">
-            <a:schemeClr val="accent1"/>
-          </a:fillRef>
-          <a:effectRef idx="2">
-            <a:schemeClr val="accent1"/>
-          </a:effectRef>
-          <a:fontRef idx="minor">
-            <a:schemeClr val="lt1"/>
-          </a:fontRef>
-        </p:style>
-        <p:txBody>
-          <a:bodyPr rtlCol="0" anchor="ctr" wrap="square"/>
-          <a:lstStyle/>
-          <a:p>
-            <a:pPr algn="ctr"/>
-          </a:p>
-        </p:txBody>
-      </p:sp>
-      <p:sp>
-        <p:nvSpPr>
-          <p:cNvPr id="97" name="TextBox 96"/>
+              <a:t>step 5 · type</a:t>
+            </a:r>
+          </a:p>
+        </p:txBody>
+      </p:sp>
+      <p:sp>
+        <p:nvSpPr>
+          <p:cNvPr id="95" name="TextBox 94"/>
           <p:cNvSpPr txBox="1"/>
           <p:nvPr/>
         </p:nvSpPr>
         <p:spPr>
           <a:xfrm>
-            <a:off x="16269300" y="15964500"/>
+            <a:off x="11640600" y="15868554"/>
             <a:ext cx="4520700" cy="252000"/>
           </a:xfrm>
           <a:prstGeom prst="rect">
@@ -4960,14 +4883,82 @@
               </a:spcAft>
             </a:pPr>
             <a:r>
-              <a:rPr sz="1550" b="1" i="0">
+              <a:rPr sz="1400" b="0" i="0">
                 <a:solidFill>
-                  <a:srgbClr val="141E41"/>
+                  <a:srgbClr val="5D6787"/>
                 </a:solidFill>
                 <a:latin typeface="Arial"/>
               </a:rPr>
-              <a:t>step 11 · finish</a:t>
-            </a:r>
+              <a:t>$0.024 spent</a:t>
+            </a:r>
+          </a:p>
+        </p:txBody>
+      </p:sp>
+      <p:pic>
+        <p:nvPicPr>
+          <p:cNvPr id="96" name="Picture 95" descr="lane_read_3.png"/>
+          <p:cNvPicPr>
+            <a:picLocks noChangeAspect="1"/>
+          </p:cNvPicPr>
+          <p:nvPr/>
+        </p:nvPicPr>
+        <p:blipFill>
+          <a:blip r:embed="rId9"/>
+          <a:stretch>
+            <a:fillRect/>
+          </a:stretch>
+        </p:blipFill>
+        <p:spPr>
+          <a:xfrm>
+            <a:off x="16269300" y="14020520"/>
+            <a:ext cx="4484700" cy="1560035"/>
+          </a:xfrm>
+          <a:prstGeom prst="rect">
+            <a:avLst/>
+          </a:prstGeom>
+        </p:spPr>
+      </p:pic>
+      <p:sp>
+        <p:nvSpPr>
+          <p:cNvPr id="97" name="Rectangle 96"/>
+          <p:cNvSpPr/>
+          <p:nvPr/>
+        </p:nvSpPr>
+        <p:spPr>
+          <a:xfrm>
+            <a:off x="16269300" y="14020520"/>
+            <a:ext cx="4484700" cy="1560034"/>
+          </a:xfrm>
+          <a:prstGeom prst="rect">
+            <a:avLst/>
+          </a:prstGeom>
+          <a:noFill/>
+          <a:ln w="8890">
+            <a:solidFill>
+              <a:srgbClr val="C9CFE0"/>
+            </a:solidFill>
+          </a:ln>
+          <a:effectLst/>
+        </p:spPr>
+        <p:style>
+          <a:lnRef idx="1">
+            <a:schemeClr val="accent1"/>
+          </a:lnRef>
+          <a:fillRef idx="3">
+            <a:schemeClr val="accent1"/>
+          </a:fillRef>
+          <a:effectRef idx="2">
+            <a:schemeClr val="accent1"/>
+          </a:effectRef>
+          <a:fontRef idx="minor">
+            <a:schemeClr val="lt1"/>
+          </a:fontRef>
+        </p:style>
+        <p:txBody>
+          <a:bodyPr rtlCol="0" anchor="ctr" wrap="square"/>
+          <a:lstStyle/>
+          <a:p>
+            <a:pPr algn="ctr"/>
           </a:p>
         </p:txBody>
       </p:sp>
@@ -4979,7 +4970,7 @@
         </p:nvSpPr>
         <p:spPr>
           <a:xfrm>
-            <a:off x="16269300" y="16198500"/>
+            <a:off x="16269300" y="15634554"/>
             <a:ext cx="4520700" cy="252000"/>
           </a:xfrm>
           <a:prstGeom prst="rect">
@@ -5002,71 +4993,27 @@
               </a:spcAft>
             </a:pPr>
             <a:r>
-              <a:rPr sz="1400" b="0" i="0">
+              <a:rPr sz="1550" b="1" i="0">
                 <a:solidFill>
-                  <a:srgbClr val="5D6787"/>
+                  <a:srgbClr val="141E41"/>
                 </a:solidFill>
                 <a:latin typeface="Arial"/>
               </a:rPr>
-              <a:t>$0.090 spent</a:t>
-            </a:r>
-          </a:p>
-        </p:txBody>
-      </p:sp>
-      <p:sp>
-        <p:nvSpPr>
-          <p:cNvPr id="99" name="Rectangle 98"/>
-          <p:cNvSpPr/>
-          <p:nvPr/>
-        </p:nvSpPr>
-        <p:spPr>
-          <a:xfrm>
-            <a:off x="727200" y="16558500"/>
-            <a:ext cx="86400" cy="2429980"/>
-          </a:xfrm>
-          <a:prstGeom prst="rect">
-            <a:avLst/>
-          </a:prstGeom>
-          <a:solidFill>
-            <a:srgbClr val="1F5FD6"/>
-          </a:solidFill>
-          <a:ln>
-            <a:noFill/>
-          </a:ln>
-          <a:effectLst/>
-        </p:spPr>
-        <p:style>
-          <a:lnRef idx="1">
-            <a:schemeClr val="accent1"/>
-          </a:lnRef>
-          <a:fillRef idx="3">
-            <a:schemeClr val="accent1"/>
-          </a:fillRef>
-          <a:effectRef idx="2">
-            <a:schemeClr val="accent1"/>
-          </a:effectRef>
-          <a:fontRef idx="minor">
-            <a:schemeClr val="lt1"/>
-          </a:fontRef>
-        </p:style>
-        <p:txBody>
-          <a:bodyPr rtlCol="0" anchor="ctr" wrap="square"/>
-          <a:lstStyle/>
-          <a:p>
-            <a:pPr algn="ctr"/>
-          </a:p>
-        </p:txBody>
-      </p:sp>
-      <p:sp>
-        <p:nvSpPr>
-          <p:cNvPr id="100" name="TextBox 99"/>
+              <a:t>step 11 · finish</a:t>
+            </a:r>
+          </a:p>
+        </p:txBody>
+      </p:sp>
+      <p:sp>
+        <p:nvSpPr>
+          <p:cNvPr id="99" name="TextBox 98"/>
           <p:cNvSpPr txBox="1"/>
           <p:nvPr/>
         </p:nvSpPr>
         <p:spPr>
           <a:xfrm>
-            <a:off x="907200" y="16594500"/>
-            <a:ext cx="1440000" cy="360000"/>
+            <a:off x="16269300" y="15868554"/>
+            <a:ext cx="4520700" cy="252000"/>
           </a:xfrm>
           <a:prstGeom prst="rect">
             <a:avLst/>
@@ -5088,6 +5035,92 @@
               </a:spcAft>
             </a:pPr>
             <a:r>
+              <a:rPr sz="1400" b="0" i="0">
+                <a:solidFill>
+                  <a:srgbClr val="5D6787"/>
+                </a:solidFill>
+                <a:latin typeface="Arial"/>
+              </a:rPr>
+              <a:t>$0.090 spent</a:t>
+            </a:r>
+          </a:p>
+        </p:txBody>
+      </p:sp>
+      <p:sp>
+        <p:nvSpPr>
+          <p:cNvPr id="100" name="Rectangle 99"/>
+          <p:cNvSpPr/>
+          <p:nvPr/>
+        </p:nvSpPr>
+        <p:spPr>
+          <a:xfrm>
+            <a:off x="727200" y="16228554"/>
+            <a:ext cx="86400" cy="2100034"/>
+          </a:xfrm>
+          <a:prstGeom prst="rect">
+            <a:avLst/>
+          </a:prstGeom>
+          <a:solidFill>
+            <a:srgbClr val="1F5FD6"/>
+          </a:solidFill>
+          <a:ln>
+            <a:noFill/>
+          </a:ln>
+          <a:effectLst/>
+        </p:spPr>
+        <p:style>
+          <a:lnRef idx="1">
+            <a:schemeClr val="accent1"/>
+          </a:lnRef>
+          <a:fillRef idx="3">
+            <a:schemeClr val="accent1"/>
+          </a:fillRef>
+          <a:effectRef idx="2">
+            <a:schemeClr val="accent1"/>
+          </a:effectRef>
+          <a:fontRef idx="minor">
+            <a:schemeClr val="lt1"/>
+          </a:fontRef>
+        </p:style>
+        <p:txBody>
+          <a:bodyPr rtlCol="0" anchor="ctr" wrap="square"/>
+          <a:lstStyle/>
+          <a:p>
+            <a:pPr algn="ctr"/>
+          </a:p>
+        </p:txBody>
+      </p:sp>
+      <p:sp>
+        <p:nvSpPr>
+          <p:cNvPr id="101" name="TextBox 100"/>
+          <p:cNvSpPr txBox="1"/>
+          <p:nvPr/>
+        </p:nvSpPr>
+        <p:spPr>
+          <a:xfrm>
+            <a:off x="907200" y="16264554"/>
+            <a:ext cx="1440000" cy="360000"/>
+          </a:xfrm>
+          <a:prstGeom prst="rect">
+            <a:avLst/>
+          </a:prstGeom>
+          <a:noFill/>
+        </p:spPr>
+        <p:txBody>
+          <a:bodyPr wrap="square" lIns="0" rIns="0" tIns="0" bIns="0">
+            <a:spAutoFit/>
+          </a:bodyPr>
+          <a:lstStyle/>
+          <a:p>
+            <a:pPr algn="l">
+              <a:lnSpc>
+                <a:spcPct val="102000"/>
+              </a:lnSpc>
+              <a:spcAft>
+                <a:spcPts val="0"/>
+              </a:spcAft>
+            </a:pPr>
+            <a:r>
               <a:rPr sz="2400" b="1" i="0">
                 <a:solidFill>
                   <a:srgbClr val="1F5FD6"/>
@@ -5101,14 +5134,14 @@
       </p:sp>
       <p:sp>
         <p:nvSpPr>
-          <p:cNvPr id="101" name="TextBox 100"/>
+          <p:cNvPr id="102" name="TextBox 101"/>
           <p:cNvSpPr txBox="1"/>
           <p:nvPr/>
         </p:nvSpPr>
         <p:spPr>
           <a:xfrm>
-            <a:off x="907200" y="16990500"/>
-            <a:ext cx="1440000" cy="576000"/>
+            <a:off x="907200" y="16660554"/>
+            <a:ext cx="1440000" cy="504000"/>
           </a:xfrm>
           <a:prstGeom prst="rect">
             <a:avLst/>
@@ -5143,14 +5176,14 @@
       </p:sp>
       <p:sp>
         <p:nvSpPr>
-          <p:cNvPr id="102" name="TextBox 101"/>
+          <p:cNvPr id="103" name="TextBox 102"/>
           <p:cNvSpPr txBox="1"/>
           <p:nvPr/>
         </p:nvSpPr>
         <p:spPr>
           <a:xfrm>
-            <a:off x="907200" y="17602500"/>
-            <a:ext cx="1440000" cy="1008000"/>
+            <a:off x="907200" y="17236554"/>
+            <a:ext cx="1440000" cy="648000"/>
           </a:xfrm>
           <a:prstGeom prst="rect">
             <a:avLst/>
@@ -5197,7 +5230,7 @@
                 </a:solidFill>
                 <a:latin typeface="Arial"/>
               </a:rPr>
-              <a:t>9 different pages</a:t>
+              <a:t>9 pages seen</a:t>
             </a:r>
           </a:p>
           <a:p>
@@ -5218,96 +5251,19 @@
               </a:rPr>
               <a:t>$0.10</a:t>
             </a:r>
-            <a:r>
-              <a:rPr sz="1550" b="0" i="0">
-                <a:solidFill>
-                  <a:srgbClr val="C2352B"/>
-                </a:solidFill>
-                <a:latin typeface="Arial"/>
-              </a:rPr>
-              <a:t> · gave up</a:t>
-            </a:r>
-          </a:p>
-        </p:txBody>
-      </p:sp>
-      <p:pic>
-        <p:nvPicPr>
-          <p:cNvPr id="103" name="Picture 102" descr="lane_read_0.png"/>
-          <p:cNvPicPr>
-            <a:picLocks noChangeAspect="1"/>
-          </p:cNvPicPr>
-          <p:nvPr/>
-        </p:nvPicPr>
-        <p:blipFill>
-          <a:blip r:embed="rId6"/>
-          <a:stretch>
-            <a:fillRect/>
-          </a:stretch>
-        </p:blipFill>
-        <p:spPr>
-          <a:xfrm>
-            <a:off x="2383200" y="16558500"/>
-            <a:ext cx="4484700" cy="1889981"/>
-          </a:xfrm>
-          <a:prstGeom prst="rect">
-            <a:avLst/>
-          </a:prstGeom>
-        </p:spPr>
-      </p:pic>
-      <p:sp>
-        <p:nvSpPr>
-          <p:cNvPr id="104" name="Rectangle 103"/>
-          <p:cNvSpPr/>
-          <p:nvPr/>
-        </p:nvSpPr>
-        <p:spPr>
-          <a:xfrm>
-            <a:off x="2383200" y="16558500"/>
-            <a:ext cx="4484700" cy="1889980"/>
-          </a:xfrm>
-          <a:prstGeom prst="rect">
-            <a:avLst/>
-          </a:prstGeom>
-          <a:noFill/>
-          <a:ln w="8890">
-            <a:solidFill>
-              <a:srgbClr val="C9CFE0"/>
-            </a:solidFill>
-          </a:ln>
-          <a:effectLst/>
-        </p:spPr>
-        <p:style>
-          <a:lnRef idx="1">
-            <a:schemeClr val="accent1"/>
-          </a:lnRef>
-          <a:fillRef idx="3">
-            <a:schemeClr val="accent1"/>
-          </a:fillRef>
-          <a:effectRef idx="2">
-            <a:schemeClr val="accent1"/>
-          </a:effectRef>
-          <a:fontRef idx="minor">
-            <a:schemeClr val="lt1"/>
-          </a:fontRef>
-        </p:style>
-        <p:txBody>
-          <a:bodyPr rtlCol="0" anchor="ctr" wrap="square"/>
-          <a:lstStyle/>
-          <a:p>
-            <a:pPr algn="ctr"/>
-          </a:p>
-        </p:txBody>
-      </p:sp>
-      <p:sp>
-        <p:nvSpPr>
-          <p:cNvPr id="105" name="TextBox 104"/>
+          </a:p>
+        </p:txBody>
+      </p:sp>
+      <p:sp>
+        <p:nvSpPr>
+          <p:cNvPr id="104" name="TextBox 103"/>
           <p:cNvSpPr txBox="1"/>
           <p:nvPr/>
         </p:nvSpPr>
         <p:spPr>
           <a:xfrm>
-            <a:off x="2383200" y="18502480"/>
-            <a:ext cx="4520700" cy="252000"/>
+            <a:off x="907200" y="17920554"/>
+            <a:ext cx="1440000" cy="360000"/>
           </a:xfrm>
           <a:prstGeom prst="rect">
             <a:avLst/>
@@ -5329,26 +5285,94 @@
               </a:spcAft>
             </a:pPr>
             <a:r>
-              <a:rPr sz="1550" b="1" i="0">
+              <a:rPr sz="2000" b="1" i="0">
                 <a:solidFill>
-                  <a:srgbClr val="141E41"/>
+                  <a:srgbClr val="C2352B"/>
                 </a:solidFill>
                 <a:latin typeface="Arial"/>
               </a:rPr>
-              <a:t>step 0 · click</a:t>
-            </a:r>
-          </a:p>
-        </p:txBody>
-      </p:sp>
-      <p:sp>
-        <p:nvSpPr>
-          <p:cNvPr id="106" name="TextBox 105"/>
+              <a:t>gave up</a:t>
+            </a:r>
+          </a:p>
+        </p:txBody>
+      </p:sp>
+      <p:pic>
+        <p:nvPicPr>
+          <p:cNvPr id="105" name="Picture 104" descr="lane_look_0.png"/>
+          <p:cNvPicPr>
+            <a:picLocks noChangeAspect="1"/>
+          </p:cNvPicPr>
+          <p:nvPr/>
+        </p:nvPicPr>
+        <p:blipFill>
+          <a:blip r:embed="rId10"/>
+          <a:stretch>
+            <a:fillRect/>
+          </a:stretch>
+        </p:blipFill>
+        <p:spPr>
+          <a:xfrm>
+            <a:off x="2383200" y="16228554"/>
+            <a:ext cx="4484700" cy="1560035"/>
+          </a:xfrm>
+          <a:prstGeom prst="rect">
+            <a:avLst/>
+          </a:prstGeom>
+        </p:spPr>
+      </p:pic>
+      <p:sp>
+        <p:nvSpPr>
+          <p:cNvPr id="106" name="Rectangle 105"/>
+          <p:cNvSpPr/>
+          <p:nvPr/>
+        </p:nvSpPr>
+        <p:spPr>
+          <a:xfrm>
+            <a:off x="2383200" y="16228554"/>
+            <a:ext cx="4484700" cy="1560034"/>
+          </a:xfrm>
+          <a:prstGeom prst="rect">
+            <a:avLst/>
+          </a:prstGeom>
+          <a:noFill/>
+          <a:ln w="8890">
+            <a:solidFill>
+              <a:srgbClr val="C9CFE0"/>
+            </a:solidFill>
+          </a:ln>
+          <a:effectLst/>
+        </p:spPr>
+        <p:style>
+          <a:lnRef idx="1">
+            <a:schemeClr val="accent1"/>
+          </a:lnRef>
+          <a:fillRef idx="3">
+            <a:schemeClr val="accent1"/>
+          </a:fillRef>
+          <a:effectRef idx="2">
+            <a:schemeClr val="accent1"/>
+          </a:effectRef>
+          <a:fontRef idx="minor">
+            <a:schemeClr val="lt1"/>
+          </a:fontRef>
+        </p:style>
+        <p:txBody>
+          <a:bodyPr rtlCol="0" anchor="ctr" wrap="square"/>
+          <a:lstStyle/>
+          <a:p>
+            <a:pPr algn="ctr"/>
+          </a:p>
+        </p:txBody>
+      </p:sp>
+      <p:sp>
+        <p:nvSpPr>
+          <p:cNvPr id="107" name="TextBox 106"/>
           <p:cNvSpPr txBox="1"/>
           <p:nvPr/>
         </p:nvSpPr>
         <p:spPr>
           <a:xfrm>
-            <a:off x="2383200" y="18736480"/>
+            <a:off x="2383200" y="17842588"/>
             <a:ext cx="4520700" cy="252000"/>
           </a:xfrm>
           <a:prstGeom prst="rect">
@@ -5371,94 +5395,26 @@
               </a:spcAft>
             </a:pPr>
             <a:r>
-              <a:rPr sz="1400" b="0" i="0">
+              <a:rPr sz="1550" b="1" i="0">
                 <a:solidFill>
-                  <a:srgbClr val="5D6787"/>
+                  <a:srgbClr val="141E41"/>
                 </a:solidFill>
                 <a:latin typeface="Arial"/>
               </a:rPr>
-              <a:t>$0.004 spent</a:t>
-            </a:r>
-          </a:p>
-        </p:txBody>
-      </p:sp>
-      <p:pic>
-        <p:nvPicPr>
-          <p:cNvPr id="107" name="Picture 106" descr="lane_look_1.png"/>
-          <p:cNvPicPr>
-            <a:picLocks noChangeAspect="1"/>
-          </p:cNvPicPr>
-          <p:nvPr/>
-        </p:nvPicPr>
-        <p:blipFill>
-          <a:blip r:embed="rId10"/>
-          <a:stretch>
-            <a:fillRect/>
-          </a:stretch>
-        </p:blipFill>
-        <p:spPr>
-          <a:xfrm>
-            <a:off x="7011900" y="16558500"/>
-            <a:ext cx="4484700" cy="1889981"/>
-          </a:xfrm>
-          <a:prstGeom prst="rect">
-            <a:avLst/>
-          </a:prstGeom>
-        </p:spPr>
-      </p:pic>
-      <p:sp>
-        <p:nvSpPr>
-          <p:cNvPr id="108" name="Rectangle 107"/>
-          <p:cNvSpPr/>
-          <p:nvPr/>
-        </p:nvSpPr>
-        <p:spPr>
-          <a:xfrm>
-            <a:off x="7011900" y="16558500"/>
-            <a:ext cx="4484700" cy="1889980"/>
-          </a:xfrm>
-          <a:prstGeom prst="rect">
-            <a:avLst/>
-          </a:prstGeom>
-          <a:noFill/>
-          <a:ln w="8890">
-            <a:solidFill>
-              <a:srgbClr val="C9CFE0"/>
-            </a:solidFill>
-          </a:ln>
-          <a:effectLst/>
-        </p:spPr>
-        <p:style>
-          <a:lnRef idx="1">
-            <a:schemeClr val="accent1"/>
-          </a:lnRef>
-          <a:fillRef idx="3">
-            <a:schemeClr val="accent1"/>
-          </a:fillRef>
-          <a:effectRef idx="2">
-            <a:schemeClr val="accent1"/>
-          </a:effectRef>
-          <a:fontRef idx="minor">
-            <a:schemeClr val="lt1"/>
-          </a:fontRef>
-        </p:style>
-        <p:txBody>
-          <a:bodyPr rtlCol="0" anchor="ctr" wrap="square"/>
-          <a:lstStyle/>
-          <a:p>
-            <a:pPr algn="ctr"/>
-          </a:p>
-        </p:txBody>
-      </p:sp>
-      <p:sp>
-        <p:nvSpPr>
-          <p:cNvPr id="109" name="TextBox 108"/>
+              <a:t>step 1 · scroll</a:t>
+            </a:r>
+          </a:p>
+        </p:txBody>
+      </p:sp>
+      <p:sp>
+        <p:nvSpPr>
+          <p:cNvPr id="108" name="TextBox 107"/>
           <p:cNvSpPr txBox="1"/>
           <p:nvPr/>
         </p:nvSpPr>
         <p:spPr>
           <a:xfrm>
-            <a:off x="7011900" y="18502480"/>
+            <a:off x="2383200" y="18076588"/>
             <a:ext cx="4520700" cy="252000"/>
           </a:xfrm>
           <a:prstGeom prst="rect">
@@ -5481,26 +5437,94 @@
               </a:spcAft>
             </a:pPr>
             <a:r>
-              <a:rPr sz="1550" b="1" i="0">
+              <a:rPr sz="1400" b="0" i="0">
                 <a:solidFill>
-                  <a:srgbClr val="141E41"/>
+                  <a:srgbClr val="5D6787"/>
                 </a:solidFill>
                 <a:latin typeface="Arial"/>
               </a:rPr>
-              <a:t>step 3 · click</a:t>
-            </a:r>
-          </a:p>
-        </p:txBody>
-      </p:sp>
-      <p:sp>
-        <p:nvSpPr>
-          <p:cNvPr id="110" name="TextBox 109"/>
+              <a:t>$0.007 spent</a:t>
+            </a:r>
+          </a:p>
+        </p:txBody>
+      </p:sp>
+      <p:pic>
+        <p:nvPicPr>
+          <p:cNvPr id="109" name="Picture 108" descr="lane_look_1.png"/>
+          <p:cNvPicPr>
+            <a:picLocks noChangeAspect="1"/>
+          </p:cNvPicPr>
+          <p:nvPr/>
+        </p:nvPicPr>
+        <p:blipFill>
+          <a:blip r:embed="rId11"/>
+          <a:stretch>
+            <a:fillRect/>
+          </a:stretch>
+        </p:blipFill>
+        <p:spPr>
+          <a:xfrm>
+            <a:off x="7011900" y="16228554"/>
+            <a:ext cx="4484700" cy="1560035"/>
+          </a:xfrm>
+          <a:prstGeom prst="rect">
+            <a:avLst/>
+          </a:prstGeom>
+        </p:spPr>
+      </p:pic>
+      <p:sp>
+        <p:nvSpPr>
+          <p:cNvPr id="110" name="Rectangle 109"/>
+          <p:cNvSpPr/>
+          <p:nvPr/>
+        </p:nvSpPr>
+        <p:spPr>
+          <a:xfrm>
+            <a:off x="7011900" y="16228554"/>
+            <a:ext cx="4484700" cy="1560034"/>
+          </a:xfrm>
+          <a:prstGeom prst="rect">
+            <a:avLst/>
+          </a:prstGeom>
+          <a:noFill/>
+          <a:ln w="8890">
+            <a:solidFill>
+              <a:srgbClr val="C9CFE0"/>
+            </a:solidFill>
+          </a:ln>
+          <a:effectLst/>
+        </p:spPr>
+        <p:style>
+          <a:lnRef idx="1">
+            <a:schemeClr val="accent1"/>
+          </a:lnRef>
+          <a:fillRef idx="3">
+            <a:schemeClr val="accent1"/>
+          </a:fillRef>
+          <a:effectRef idx="2">
+            <a:schemeClr val="accent1"/>
+          </a:effectRef>
+          <a:fontRef idx="minor">
+            <a:schemeClr val="lt1"/>
+          </a:fontRef>
+        </p:style>
+        <p:txBody>
+          <a:bodyPr rtlCol="0" anchor="ctr" wrap="square"/>
+          <a:lstStyle/>
+          <a:p>
+            <a:pPr algn="ctr"/>
+          </a:p>
+        </p:txBody>
+      </p:sp>
+      <p:sp>
+        <p:nvSpPr>
+          <p:cNvPr id="111" name="TextBox 110"/>
           <p:cNvSpPr txBox="1"/>
           <p:nvPr/>
         </p:nvSpPr>
         <p:spPr>
           <a:xfrm>
-            <a:off x="7011900" y="18736480"/>
+            <a:off x="7011900" y="17842588"/>
             <a:ext cx="4520700" cy="252000"/>
           </a:xfrm>
           <a:prstGeom prst="rect">
@@ -5523,94 +5547,26 @@
               </a:spcAft>
             </a:pPr>
             <a:r>
-              <a:rPr sz="1400" b="0" i="0">
+              <a:rPr sz="1550" b="1" i="0">
                 <a:solidFill>
-                  <a:srgbClr val="5D6787"/>
+                  <a:srgbClr val="141E41"/>
                 </a:solidFill>
                 <a:latin typeface="Arial"/>
               </a:rPr>
-              <a:t>$0.015 spent</a:t>
-            </a:r>
-          </a:p>
-        </p:txBody>
-      </p:sp>
-      <p:pic>
-        <p:nvPicPr>
-          <p:cNvPr id="111" name="Picture 110" descr="lane_look_2.png"/>
-          <p:cNvPicPr>
-            <a:picLocks noChangeAspect="1"/>
-          </p:cNvPicPr>
-          <p:nvPr/>
-        </p:nvPicPr>
-        <p:blipFill>
-          <a:blip r:embed="rId11"/>
-          <a:stretch>
-            <a:fillRect/>
-          </a:stretch>
-        </p:blipFill>
-        <p:spPr>
-          <a:xfrm>
-            <a:off x="11640600" y="16558500"/>
-            <a:ext cx="4484700" cy="1889981"/>
-          </a:xfrm>
-          <a:prstGeom prst="rect">
-            <a:avLst/>
-          </a:prstGeom>
-        </p:spPr>
-      </p:pic>
-      <p:sp>
-        <p:nvSpPr>
-          <p:cNvPr id="112" name="Rectangle 111"/>
-          <p:cNvSpPr/>
-          <p:nvPr/>
-        </p:nvSpPr>
-        <p:spPr>
-          <a:xfrm>
-            <a:off x="11640600" y="16558500"/>
-            <a:ext cx="4484700" cy="1889980"/>
-          </a:xfrm>
-          <a:prstGeom prst="rect">
-            <a:avLst/>
-          </a:prstGeom>
-          <a:noFill/>
-          <a:ln w="8890">
-            <a:solidFill>
-              <a:srgbClr val="C9CFE0"/>
-            </a:solidFill>
-          </a:ln>
-          <a:effectLst/>
-        </p:spPr>
-        <p:style>
-          <a:lnRef idx="1">
-            <a:schemeClr val="accent1"/>
-          </a:lnRef>
-          <a:fillRef idx="3">
-            <a:schemeClr val="accent1"/>
-          </a:fillRef>
-          <a:effectRef idx="2">
-            <a:schemeClr val="accent1"/>
-          </a:effectRef>
-          <a:fontRef idx="minor">
-            <a:schemeClr val="lt1"/>
-          </a:fontRef>
-        </p:style>
-        <p:txBody>
-          <a:bodyPr rtlCol="0" anchor="ctr" wrap="square"/>
-          <a:lstStyle/>
-          <a:p>
-            <a:pPr algn="ctr"/>
-          </a:p>
-        </p:txBody>
-      </p:sp>
-      <p:sp>
-        <p:nvSpPr>
-          <p:cNvPr id="113" name="TextBox 112"/>
+              <a:t>step 3 · click</a:t>
+            </a:r>
+          </a:p>
+        </p:txBody>
+      </p:sp>
+      <p:sp>
+        <p:nvSpPr>
+          <p:cNvPr id="112" name="TextBox 111"/>
           <p:cNvSpPr txBox="1"/>
           <p:nvPr/>
         </p:nvSpPr>
         <p:spPr>
           <a:xfrm>
-            <a:off x="11640600" y="18502480"/>
+            <a:off x="7011900" y="18076588"/>
             <a:ext cx="4520700" cy="252000"/>
           </a:xfrm>
           <a:prstGeom prst="rect">
@@ -5633,26 +5589,94 @@
               </a:spcAft>
             </a:pPr>
             <a:r>
-              <a:rPr sz="1550" b="1" i="0">
+              <a:rPr sz="1400" b="0" i="0">
                 <a:solidFill>
-                  <a:srgbClr val="141E41"/>
+                  <a:srgbClr val="5D6787"/>
                 </a:solidFill>
                 <a:latin typeface="Arial"/>
               </a:rPr>
-              <a:t>step 9 · scroll</a:t>
-            </a:r>
-          </a:p>
-        </p:txBody>
-      </p:sp>
-      <p:sp>
-        <p:nvSpPr>
-          <p:cNvPr id="114" name="TextBox 113"/>
+              <a:t>$0.015 spent</a:t>
+            </a:r>
+          </a:p>
+        </p:txBody>
+      </p:sp>
+      <p:pic>
+        <p:nvPicPr>
+          <p:cNvPr id="113" name="Picture 112" descr="lane_look_0.png"/>
+          <p:cNvPicPr>
+            <a:picLocks noChangeAspect="1"/>
+          </p:cNvPicPr>
+          <p:nvPr/>
+        </p:nvPicPr>
+        <p:blipFill>
+          <a:blip r:embed="rId10"/>
+          <a:stretch>
+            <a:fillRect/>
+          </a:stretch>
+        </p:blipFill>
+        <p:spPr>
+          <a:xfrm>
+            <a:off x="11640600" y="16228554"/>
+            <a:ext cx="4484700" cy="1560035"/>
+          </a:xfrm>
+          <a:prstGeom prst="rect">
+            <a:avLst/>
+          </a:prstGeom>
+        </p:spPr>
+      </p:pic>
+      <p:sp>
+        <p:nvSpPr>
+          <p:cNvPr id="114" name="Rectangle 113"/>
+          <p:cNvSpPr/>
+          <p:nvPr/>
+        </p:nvSpPr>
+        <p:spPr>
+          <a:xfrm>
+            <a:off x="11640600" y="16228554"/>
+            <a:ext cx="4484700" cy="1560034"/>
+          </a:xfrm>
+          <a:prstGeom prst="rect">
+            <a:avLst/>
+          </a:prstGeom>
+          <a:noFill/>
+          <a:ln w="8890">
+            <a:solidFill>
+              <a:srgbClr val="C9CFE0"/>
+            </a:solidFill>
+          </a:ln>
+          <a:effectLst/>
+        </p:spPr>
+        <p:style>
+          <a:lnRef idx="1">
+            <a:schemeClr val="accent1"/>
+          </a:lnRef>
+          <a:fillRef idx="3">
+            <a:schemeClr val="accent1"/>
+          </a:fillRef>
+          <a:effectRef idx="2">
+            <a:schemeClr val="accent1"/>
+          </a:effectRef>
+          <a:fontRef idx="minor">
+            <a:schemeClr val="lt1"/>
+          </a:fontRef>
+        </p:style>
+        <p:txBody>
+          <a:bodyPr rtlCol="0" anchor="ctr" wrap="square"/>
+          <a:lstStyle/>
+          <a:p>
+            <a:pPr algn="ctr"/>
+          </a:p>
+        </p:txBody>
+      </p:sp>
+      <p:sp>
+        <p:nvSpPr>
+          <p:cNvPr id="115" name="TextBox 114"/>
           <p:cNvSpPr txBox="1"/>
           <p:nvPr/>
         </p:nvSpPr>
         <p:spPr>
           <a:xfrm>
-            <a:off x="11640600" y="18736480"/>
+            <a:off x="11640600" y="17842588"/>
             <a:ext cx="4520700" cy="252000"/>
           </a:xfrm>
           <a:prstGeom prst="rect">
@@ -5675,94 +5699,26 @@
               </a:spcAft>
             </a:pPr>
             <a:r>
-              <a:rPr sz="1400" b="0" i="0">
+              <a:rPr sz="1550" b="1" i="0">
                 <a:solidFill>
-                  <a:srgbClr val="5D6787"/>
+                  <a:srgbClr val="141E41"/>
                 </a:solidFill>
                 <a:latin typeface="Arial"/>
               </a:rPr>
-              <a:t>$0.039 spent</a:t>
-            </a:r>
-          </a:p>
-        </p:txBody>
-      </p:sp>
-      <p:pic>
-        <p:nvPicPr>
-          <p:cNvPr id="115" name="Picture 114" descr="lane_look_1.png"/>
-          <p:cNvPicPr>
-            <a:picLocks noChangeAspect="1"/>
-          </p:cNvPicPr>
-          <p:nvPr/>
-        </p:nvPicPr>
-        <p:blipFill>
-          <a:blip r:embed="rId10"/>
-          <a:stretch>
-            <a:fillRect/>
-          </a:stretch>
-        </p:blipFill>
-        <p:spPr>
-          <a:xfrm>
-            <a:off x="16269300" y="16558500"/>
-            <a:ext cx="4484700" cy="1889981"/>
-          </a:xfrm>
-          <a:prstGeom prst="rect">
-            <a:avLst/>
-          </a:prstGeom>
-        </p:spPr>
-      </p:pic>
-      <p:sp>
-        <p:nvSpPr>
-          <p:cNvPr id="116" name="Rectangle 115"/>
-          <p:cNvSpPr/>
-          <p:nvPr/>
-        </p:nvSpPr>
-        <p:spPr>
-          <a:xfrm>
-            <a:off x="16269300" y="16558500"/>
-            <a:ext cx="4484700" cy="1889980"/>
-          </a:xfrm>
-          <a:prstGeom prst="rect">
-            <a:avLst/>
-          </a:prstGeom>
-          <a:noFill/>
-          <a:ln w="8890">
-            <a:solidFill>
-              <a:srgbClr val="C9CFE0"/>
-            </a:solidFill>
-          </a:ln>
-          <a:effectLst/>
-        </p:spPr>
-        <p:style>
-          <a:lnRef idx="1">
-            <a:schemeClr val="accent1"/>
-          </a:lnRef>
-          <a:fillRef idx="3">
-            <a:schemeClr val="accent1"/>
-          </a:fillRef>
-          <a:effectRef idx="2">
-            <a:schemeClr val="accent1"/>
-          </a:effectRef>
-          <a:fontRef idx="minor">
-            <a:schemeClr val="lt1"/>
-          </a:fontRef>
-        </p:style>
-        <p:txBody>
-          <a:bodyPr rtlCol="0" anchor="ctr" wrap="square"/>
-          <a:lstStyle/>
-          <a:p>
-            <a:pPr algn="ctr"/>
-          </a:p>
-        </p:txBody>
-      </p:sp>
-      <p:sp>
-        <p:nvSpPr>
-          <p:cNvPr id="117" name="TextBox 116"/>
+              <a:t>step 18 · scroll</a:t>
+            </a:r>
+          </a:p>
+        </p:txBody>
+      </p:sp>
+      <p:sp>
+        <p:nvSpPr>
+          <p:cNvPr id="116" name="TextBox 115"/>
           <p:cNvSpPr txBox="1"/>
           <p:nvPr/>
         </p:nvSpPr>
         <p:spPr>
           <a:xfrm>
-            <a:off x="16269300" y="18502480"/>
+            <a:off x="11640600" y="18076588"/>
             <a:ext cx="4520700" cy="252000"/>
           </a:xfrm>
           <a:prstGeom prst="rect">
@@ -5785,26 +5741,103 @@
               </a:spcAft>
             </a:pPr>
             <a:r>
-              <a:rPr sz="1550" b="1" i="0">
+              <a:rPr sz="1400" b="0" i="0">
                 <a:solidFill>
-                  <a:srgbClr val="141E41"/>
+                  <a:srgbClr val="C2352B"/>
                 </a:solidFill>
                 <a:latin typeface="Arial"/>
               </a:rPr>
-              <a:t>step 20 · scroll</a:t>
-            </a:r>
-          </a:p>
-        </p:txBody>
-      </p:sp>
-      <p:sp>
-        <p:nvSpPr>
-          <p:cNvPr id="118" name="TextBox 117"/>
+              <a:t>$0.075 · </a:t>
+            </a:r>
+            <a:r>
+              <a:rPr sz="1400" b="1" i="0">
+                <a:solidFill>
+                  <a:srgbClr val="C2352B"/>
+                </a:solidFill>
+                <a:latin typeface="Arial"/>
+              </a:rPr>
+              <a:t>step 1's page again</a:t>
+            </a:r>
+          </a:p>
+        </p:txBody>
+      </p:sp>
+      <p:pic>
+        <p:nvPicPr>
+          <p:cNvPr id="117" name="Picture 116" descr="lane_look_1.png"/>
+          <p:cNvPicPr>
+            <a:picLocks noChangeAspect="1"/>
+          </p:cNvPicPr>
+          <p:nvPr/>
+        </p:nvPicPr>
+        <p:blipFill>
+          <a:blip r:embed="rId11"/>
+          <a:stretch>
+            <a:fillRect/>
+          </a:stretch>
+        </p:blipFill>
+        <p:spPr>
+          <a:xfrm>
+            <a:off x="16269300" y="16228554"/>
+            <a:ext cx="4484700" cy="1560035"/>
+          </a:xfrm>
+          <a:prstGeom prst="rect">
+            <a:avLst/>
+          </a:prstGeom>
+        </p:spPr>
+      </p:pic>
+      <p:sp>
+        <p:nvSpPr>
+          <p:cNvPr id="118" name="Rectangle 117"/>
+          <p:cNvSpPr/>
+          <p:nvPr/>
+        </p:nvSpPr>
+        <p:spPr>
+          <a:xfrm>
+            <a:off x="16269300" y="16228554"/>
+            <a:ext cx="4484700" cy="1560034"/>
+          </a:xfrm>
+          <a:prstGeom prst="rect">
+            <a:avLst/>
+          </a:prstGeom>
+          <a:noFill/>
+          <a:ln w="8890">
+            <a:solidFill>
+              <a:srgbClr val="C9CFE0"/>
+            </a:solidFill>
+          </a:ln>
+          <a:effectLst/>
+        </p:spPr>
+        <p:style>
+          <a:lnRef idx="1">
+            <a:schemeClr val="accent1"/>
+          </a:lnRef>
+          <a:fillRef idx="3">
+            <a:schemeClr val="accent1"/>
+          </a:fillRef>
+          <a:effectRef idx="2">
+            <a:schemeClr val="accent1"/>
+          </a:effectRef>
+          <a:fontRef idx="minor">
+            <a:schemeClr val="lt1"/>
+          </a:fontRef>
+        </p:style>
+        <p:txBody>
+          <a:bodyPr rtlCol="0" anchor="ctr" wrap="square"/>
+          <a:lstStyle/>
+          <a:p>
+            <a:pPr algn="ctr"/>
+          </a:p>
+        </p:txBody>
+      </p:sp>
+      <p:sp>
+        <p:nvSpPr>
+          <p:cNvPr id="119" name="TextBox 118"/>
           <p:cNvSpPr txBox="1"/>
           <p:nvPr/>
         </p:nvSpPr>
         <p:spPr>
           <a:xfrm>
-            <a:off x="16269300" y="18736480"/>
+            <a:off x="16269300" y="17842588"/>
             <a:ext cx="4520700" cy="252000"/>
           </a:xfrm>
           <a:prstGeom prst="rect">
@@ -5827,26 +5860,77 @@
               </a:spcAft>
             </a:pPr>
             <a:r>
-              <a:rPr sz="1400" b="0" i="0">
+              <a:rPr sz="1550" b="1" i="0">
                 <a:solidFill>
-                  <a:srgbClr val="5D6787"/>
+                  <a:srgbClr val="141E41"/>
                 </a:solidFill>
                 <a:latin typeface="Arial"/>
               </a:rPr>
-              <a:t>$0.083 spent</a:t>
-            </a:r>
-          </a:p>
-        </p:txBody>
-      </p:sp>
-      <p:sp>
-        <p:nvSpPr>
-          <p:cNvPr id="119" name="TextBox 118"/>
+              <a:t>step 20 · scroll</a:t>
+            </a:r>
+          </a:p>
+        </p:txBody>
+      </p:sp>
+      <p:sp>
+        <p:nvSpPr>
+          <p:cNvPr id="120" name="TextBox 119"/>
           <p:cNvSpPr txBox="1"/>
           <p:nvPr/>
         </p:nvSpPr>
         <p:spPr>
           <a:xfrm>
-            <a:off x="727200" y="19024480"/>
+            <a:off x="16269300" y="18076588"/>
+            <a:ext cx="4520700" cy="252000"/>
+          </a:xfrm>
+          <a:prstGeom prst="rect">
+            <a:avLst/>
+          </a:prstGeom>
+          <a:noFill/>
+        </p:spPr>
+        <p:txBody>
+          <a:bodyPr wrap="square" lIns="0" rIns="0" tIns="0" bIns="0">
+            <a:spAutoFit/>
+          </a:bodyPr>
+          <a:lstStyle/>
+          <a:p>
+            <a:pPr algn="l">
+              <a:lnSpc>
+                <a:spcPct val="102000"/>
+              </a:lnSpc>
+              <a:spcAft>
+                <a:spcPts val="0"/>
+              </a:spcAft>
+            </a:pPr>
+            <a:r>
+              <a:rPr sz="1400" b="0" i="0">
+                <a:solidFill>
+                  <a:srgbClr val="C2352B"/>
+                </a:solidFill>
+                <a:latin typeface="Arial"/>
+              </a:rPr>
+              <a:t>$0.083 · </a:t>
+            </a:r>
+            <a:r>
+              <a:rPr sz="1400" b="1" i="0">
+                <a:solidFill>
+                  <a:srgbClr val="C2352B"/>
+                </a:solidFill>
+                <a:latin typeface="Arial"/>
+              </a:rPr>
+              <a:t>step 3's page again</a:t>
+            </a:r>
+          </a:p>
+        </p:txBody>
+      </p:sp>
+      <p:sp>
+        <p:nvSpPr>
+          <p:cNvPr id="121" name="TextBox 120"/>
+          <p:cNvSpPr txBox="1"/>
+          <p:nvPr/>
+        </p:nvSpPr>
+        <p:spPr>
+          <a:xfrm>
+            <a:off x="727200" y="18364588"/>
             <a:ext cx="20062800" cy="255117"/>
           </a:xfrm>
           <a:prstGeom prst="rect">
@@ -5875,7 +5959,7 @@
                 </a:solidFill>
                 <a:latin typeface="Arial"/>
               </a:rPr>
-              <a:t>LOOK's last three frames are the same page</a:t>
+              <a:t>LOOK goes round in a circle</a:t>
             </a:r>
             <a:r>
               <a:rPr sz="1550" b="0" i="0">
@@ -5884,7 +5968,7 @@
                 </a:solidFill>
                 <a:latin typeface="Arial"/>
               </a:rPr>
-              <a:t>, pixel for pixel, seventeen steps apart — it saw only 9 distinct pages in 26 steps. One recorded run per view; both outcomes repeat on an independent rerun.</a:t>
+              <a:t> — its final frames return to pages it has already seen. One recorded run per view; both outcomes repeat on an independent rerun.</a:t>
             </a:r>
           </a:p>
         </p:txBody>
@@ -5897,7 +5981,7 @@
         </p:nvSpPr>
         <p:spPr>
           <a:xfrm>
-            <a:off x="727200" y="19495597"/>
+            <a:off x="727200" y="18835705"/>
             <a:ext cx="177988" cy="177988"/>
           </a:xfrm>
           <a:prstGeom prst="rect">
@@ -5942,7 +6026,7 @@
         </p:nvSpPr>
         <p:spPr>
           <a:xfrm>
-            <a:off x="1032323" y="19452397"/>
+            <a:off x="1032323" y="18792505"/>
             <a:ext cx="6144827" cy="238912"/>
           </a:xfrm>
           <a:prstGeom prst="rect">
@@ -5968,7 +6052,7 @@
                 </a:solidFill>
                 <a:latin typeface="Consolas"/>
               </a:rPr>
-              <a:t>DIFFERENT VIEWS, DIFFERENT TASKS</a:t>
+              <a:t>1 · SIX VIEWS, EIGHT SETTINGS</a:t>
             </a:r>
             <a:endParaRPr sz="1412" b="1" spc="180" dirty="0">
               <a:solidFill>
@@ -5987,7 +6071,7 @@
         </p:nvSpPr>
         <p:spPr>
           <a:xfrm>
-            <a:off x="727200" y="19813433"/>
+            <a:off x="727200" y="19153541"/>
             <a:ext cx="1169636" cy="35597"/>
           </a:xfrm>
           <a:prstGeom prst="rect">
@@ -6032,7 +6116,7 @@
         </p:nvSpPr>
         <p:spPr>
           <a:xfrm>
-            <a:off x="1896836" y="19823604"/>
+            <a:off x="1896836" y="19163712"/>
             <a:ext cx="5281564" cy="15256"/>
           </a:xfrm>
           <a:prstGeom prst="rect">
@@ -6071,14 +6155,14 @@
       </p:sp>
       <p:sp>
         <p:nvSpPr>
-          <p:cNvPr id="120" name="Rectangle 119"/>
+          <p:cNvPr id="122" name="Rectangle 121"/>
           <p:cNvSpPr/>
           <p:nvPr/>
         </p:nvSpPr>
         <p:spPr>
           <a:xfrm>
-            <a:off x="727200" y="20035597"/>
-            <a:ext cx="6451200" cy="2794678"/>
+            <a:off x="2017440" y="19375705"/>
+            <a:ext cx="3870720" cy="3155111"/>
           </a:xfrm>
           <a:prstGeom prst="rect">
             <a:avLst/>
@@ -6117,14 +6201,14 @@
       </p:sp>
       <p:sp>
         <p:nvSpPr>
-          <p:cNvPr id="121" name="Rectangle 120"/>
+          <p:cNvPr id="123" name="Rectangle 122"/>
           <p:cNvSpPr/>
           <p:nvPr/>
         </p:nvSpPr>
         <p:spPr>
           <a:xfrm>
-            <a:off x="727200" y="20035597"/>
-            <a:ext cx="6451200" cy="50400"/>
+            <a:off x="2017440" y="19375705"/>
+            <a:ext cx="3870720" cy="50400"/>
           </a:xfrm>
           <a:prstGeom prst="rect">
             <a:avLst/>
@@ -6161,7 +6245,7 @@
       </p:sp>
       <p:pic>
         <p:nvPicPr>
-          <p:cNvPr id="122" name="Picture 121" descr="venn_b0.png"/>
+          <p:cNvPr id="124" name="Picture 123" descr="fig_f5_design_matrix.png"/>
           <p:cNvPicPr>
             <a:picLocks noChangeAspect="1"/>
           </p:cNvPicPr>
@@ -6175,56 +6259,14 @@
         </p:blipFill>
         <p:spPr>
           <a:xfrm>
-            <a:off x="835200" y="20193997"/>
-            <a:ext cx="6235200" cy="2528279"/>
+            <a:off x="2089440" y="19498105"/>
+            <a:ext cx="3726720" cy="2960712"/>
           </a:xfrm>
           <a:prstGeom prst="rect">
             <a:avLst/>
           </a:prstGeom>
         </p:spPr>
       </p:pic>
-      <p:sp>
-        <p:nvSpPr>
-          <p:cNvPr id="123" name="TextBox 122"/>
-          <p:cNvSpPr txBox="1"/>
-          <p:nvPr/>
-        </p:nvSpPr>
-        <p:spPr>
-          <a:xfrm>
-            <a:off x="727200" y="22902275"/>
-            <a:ext cx="6451200" cy="510235"/>
-          </a:xfrm>
-          <a:prstGeom prst="rect">
-            <a:avLst/>
-          </a:prstGeom>
-          <a:noFill/>
-        </p:spPr>
-        <p:txBody>
-          <a:bodyPr wrap="square" lIns="0" rIns="0" tIns="0" bIns="0">
-            <a:spAutoFit/>
-          </a:bodyPr>
-          <a:lstStyle/>
-          <a:p>
-            <a:pPr algn="l">
-              <a:lnSpc>
-                <a:spcPct val="108000"/>
-              </a:lnSpc>
-              <a:spcAft>
-                <a:spcPts val="0"/>
-              </a:spcAft>
-            </a:pPr>
-            <a:r>
-              <a:rPr sz="1550" b="0" i="0">
-                <a:solidFill>
-                  <a:srgbClr val="5D6787"/>
-                </a:solidFill>
-                <a:latin typeface="Arial"/>
-              </a:rPr>
-              <a:t>Tasks solved by each text-only view. The sets overlap; they do not coincide.</a:t>
-            </a:r>
-          </a:p>
-        </p:txBody>
-      </p:sp>
       <p:sp>
         <p:nvSpPr>
           <p:cNvPr id="14" name="Rectangle 13"/>
@@ -6233,7 +6275,7 @@
         </p:nvSpPr>
         <p:spPr>
           <a:xfrm>
-            <a:off x="727200" y="23592510"/>
+            <a:off x="7534800" y="18835705"/>
             <a:ext cx="177988" cy="177988"/>
           </a:xfrm>
           <a:prstGeom prst="rect">
@@ -6278,7 +6320,7 @@
         </p:nvSpPr>
         <p:spPr>
           <a:xfrm>
-            <a:off x="1032323" y="23549310"/>
+            <a:off x="7839923" y="18792505"/>
             <a:ext cx="6144827" cy="238912"/>
           </a:xfrm>
           <a:prstGeom prst="rect">
@@ -6304,7 +6346,7 @@
                 </a:solidFill>
                 <a:latin typeface="Consolas"/>
               </a:rPr>
-              <a:t>THEY ALSO BEHAVE DIFFERENTLY</a:t>
+              <a:t>2 · THEY SOLVE DIFFERENT TASKS</a:t>
             </a:r>
             <a:endParaRPr sz="1412" b="1" spc="180" dirty="0">
               <a:solidFill>
@@ -6323,7 +6365,7 @@
         </p:nvSpPr>
         <p:spPr>
           <a:xfrm>
-            <a:off x="727200" y="23910346"/>
+            <a:off x="7534800" y="19153541"/>
             <a:ext cx="1169636" cy="35597"/>
           </a:xfrm>
           <a:prstGeom prst="rect">
@@ -6368,7 +6410,7 @@
         </p:nvSpPr>
         <p:spPr>
           <a:xfrm>
-            <a:off x="1896836" y="23920517"/>
+            <a:off x="8704436" y="19163712"/>
             <a:ext cx="5281564" cy="15256"/>
           </a:xfrm>
           <a:prstGeom prst="rect">
@@ -6407,936 +6449,14 @@
       </p:sp>
       <p:sp>
         <p:nvSpPr>
-          <p:cNvPr id="124" name="TextBox 123"/>
-          <p:cNvSpPr txBox="1"/>
-          <p:nvPr/>
-        </p:nvSpPr>
-        <p:spPr>
-          <a:xfrm>
-            <a:off x="727200" y="24132510"/>
-            <a:ext cx="6451200" cy="1008126"/>
-          </a:xfrm>
-          <a:prstGeom prst="rect">
-            <a:avLst/>
-          </a:prstGeom>
-          <a:noFill/>
-        </p:spPr>
-        <p:txBody>
-          <a:bodyPr wrap="square" lIns="0" rIns="0" tIns="0" bIns="0">
-            <a:spAutoFit/>
-          </a:bodyPr>
-          <a:lstStyle/>
-          <a:p>
-            <a:pPr algn="l">
-              <a:lnSpc>
-                <a:spcPct val="105000"/>
-              </a:lnSpc>
-              <a:spcAft>
-                <a:spcPts val="453"/>
-              </a:spcAft>
-            </a:pPr>
-            <a:r>
-              <a:rPr sz="2100" b="0" i="0">
-                <a:solidFill>
-                  <a:srgbClr val="12162E"/>
-                </a:solidFill>
-                <a:latin typeface="Arial"/>
-              </a:rPr>
-              <a:t>Across </a:t>
-            </a:r>
-            <a:r>
-              <a:rPr sz="2100" b="1" i="0">
-                <a:solidFill>
-                  <a:srgbClr val="12162E"/>
-                </a:solidFill>
-                <a:latin typeface="Arial"/>
-              </a:rPr>
-              <a:t>26 behavioural measures</a:t>
-            </a:r>
-            <a:r>
-              <a:rPr sz="2100" b="0" i="0">
-                <a:solidFill>
-                  <a:srgbClr val="12162E"/>
-                </a:solidFill>
-                <a:latin typeface="Arial"/>
-              </a:rPr>
-              <a:t>, how often a view is the extreme one in at least 7 of the 8 settings:</a:t>
-            </a:r>
-          </a:p>
-        </p:txBody>
-      </p:sp>
-      <p:sp>
-        <p:nvSpPr>
-          <p:cNvPr id="125" name="TextBox 124"/>
-          <p:cNvSpPr txBox="1"/>
-          <p:nvPr/>
-        </p:nvSpPr>
-        <p:spPr>
-          <a:xfrm>
-            <a:off x="727200" y="25284636"/>
-            <a:ext cx="6451200" cy="252000"/>
-          </a:xfrm>
-          <a:prstGeom prst="rect">
-            <a:avLst/>
-          </a:prstGeom>
-          <a:noFill/>
-        </p:spPr>
-        <p:txBody>
-          <a:bodyPr wrap="square" lIns="0" rIns="0" tIns="0" bIns="0">
-            <a:spAutoFit/>
-          </a:bodyPr>
-          <a:lstStyle/>
-          <a:p>
-            <a:pPr algn="l">
-              <a:lnSpc>
-                <a:spcPct val="102000"/>
-              </a:lnSpc>
-              <a:spcAft>
-                <a:spcPts val="0"/>
-              </a:spcAft>
-            </a:pPr>
-            <a:r>
-              <a:rPr sz="1400" b="0" i="0">
-                <a:solidFill>
-                  <a:srgbClr val="5D6787"/>
-                </a:solidFill>
-                <a:latin typeface="Consolas"/>
-              </a:rPr>
-              <a:t>view</a:t>
-            </a:r>
-          </a:p>
-        </p:txBody>
-      </p:sp>
-      <p:sp>
-        <p:nvSpPr>
-          <p:cNvPr id="126" name="TextBox 125"/>
-          <p:cNvSpPr txBox="1"/>
-          <p:nvPr/>
-        </p:nvSpPr>
-        <p:spPr>
-          <a:xfrm>
-            <a:off x="4984992" y="25284636"/>
-            <a:ext cx="2193408" cy="252000"/>
-          </a:xfrm>
-          <a:prstGeom prst="rect">
-            <a:avLst/>
-          </a:prstGeom>
-          <a:noFill/>
-        </p:spPr>
-        <p:txBody>
-          <a:bodyPr wrap="square" lIns="0" rIns="0" tIns="0" bIns="0">
-            <a:spAutoFit/>
-          </a:bodyPr>
-          <a:lstStyle/>
-          <a:p>
-            <a:pPr algn="r">
-              <a:lnSpc>
-                <a:spcPct val="102000"/>
-              </a:lnSpc>
-              <a:spcAft>
-                <a:spcPts val="0"/>
-              </a:spcAft>
-            </a:pPr>
-            <a:r>
-              <a:rPr sz="1400" b="0" i="0">
-                <a:solidFill>
-                  <a:srgbClr val="5D6787"/>
-                </a:solidFill>
-                <a:latin typeface="Consolas"/>
-              </a:rPr>
-              <a:t>measures</a:t>
-            </a:r>
-          </a:p>
-        </p:txBody>
-      </p:sp>
-      <p:sp>
-        <p:nvSpPr>
-          <p:cNvPr id="127" name="Rectangle 126"/>
+          <p:cNvPr id="125" name="Rectangle 124"/>
           <p:cNvSpPr/>
           <p:nvPr/>
         </p:nvSpPr>
         <p:spPr>
           <a:xfrm>
-            <a:off x="727200" y="25518636"/>
-            <a:ext cx="6451200" cy="14400"/>
-          </a:xfrm>
-          <a:prstGeom prst="rect">
-            <a:avLst/>
-          </a:prstGeom>
-          <a:solidFill>
-            <a:srgbClr val="DDE3F2"/>
-          </a:solidFill>
-          <a:ln>
-            <a:noFill/>
-          </a:ln>
-          <a:effectLst/>
-        </p:spPr>
-        <p:style>
-          <a:lnRef idx="1">
-            <a:schemeClr val="accent1"/>
-          </a:lnRef>
-          <a:fillRef idx="3">
-            <a:schemeClr val="accent1"/>
-          </a:fillRef>
-          <a:effectRef idx="2">
-            <a:schemeClr val="accent1"/>
-          </a:effectRef>
-          <a:fontRef idx="minor">
-            <a:schemeClr val="lt1"/>
-          </a:fontRef>
-        </p:style>
-        <p:txBody>
-          <a:bodyPr rtlCol="0" anchor="ctr" wrap="square"/>
-          <a:lstStyle/>
-          <a:p>
-            <a:pPr algn="ctr"/>
-          </a:p>
-        </p:txBody>
-      </p:sp>
-      <p:sp>
-        <p:nvSpPr>
-          <p:cNvPr id="128" name="TextBox 127"/>
-          <p:cNvSpPr txBox="1"/>
-          <p:nvPr/>
-        </p:nvSpPr>
-        <p:spPr>
-          <a:xfrm>
-            <a:off x="727200" y="25572636"/>
-            <a:ext cx="4257792" cy="288000"/>
-          </a:xfrm>
-          <a:prstGeom prst="rect">
-            <a:avLst/>
-          </a:prstGeom>
-          <a:noFill/>
-        </p:spPr>
-        <p:txBody>
-          <a:bodyPr wrap="square" lIns="0" rIns="0" tIns="0" bIns="0">
-            <a:spAutoFit/>
-          </a:bodyPr>
-          <a:lstStyle/>
-          <a:p>
-            <a:pPr algn="l">
-              <a:lnSpc>
-                <a:spcPct val="102000"/>
-              </a:lnSpc>
-              <a:spcAft>
-                <a:spcPts val="0"/>
-              </a:spcAft>
-            </a:pPr>
-            <a:r>
-              <a:rPr sz="1900" b="0" i="0">
-                <a:solidFill>
-                  <a:srgbClr val="12162E"/>
-                </a:solidFill>
-                <a:latin typeface="Arial"/>
-              </a:rPr>
-              <a:t>Vision — screenshot only</a:t>
-            </a:r>
-          </a:p>
-        </p:txBody>
-      </p:sp>
-      <p:sp>
-        <p:nvSpPr>
-          <p:cNvPr id="129" name="TextBox 128"/>
-          <p:cNvSpPr txBox="1"/>
-          <p:nvPr/>
-        </p:nvSpPr>
-        <p:spPr>
-          <a:xfrm>
-            <a:off x="4984992" y="25572636"/>
-            <a:ext cx="2193408" cy="288000"/>
-          </a:xfrm>
-          <a:prstGeom prst="rect">
-            <a:avLst/>
-          </a:prstGeom>
-          <a:noFill/>
-        </p:spPr>
-        <p:txBody>
-          <a:bodyPr wrap="square" lIns="0" rIns="0" tIns="0" bIns="0">
-            <a:spAutoFit/>
-          </a:bodyPr>
-          <a:lstStyle/>
-          <a:p>
-            <a:pPr algn="r">
-              <a:lnSpc>
-                <a:spcPct val="102000"/>
-              </a:lnSpc>
-              <a:spcAft>
-                <a:spcPts val="0"/>
-              </a:spcAft>
-            </a:pPr>
-            <a:r>
-              <a:rPr sz="1900" b="1" i="0">
-                <a:solidFill>
-                  <a:srgbClr val="141E41"/>
-                </a:solidFill>
-                <a:latin typeface="Arial"/>
-              </a:rPr>
-              <a:t>9</a:t>
-            </a:r>
-          </a:p>
-        </p:txBody>
-      </p:sp>
-      <p:sp>
-        <p:nvSpPr>
-          <p:cNvPr id="130" name="Rectangle 129"/>
-          <p:cNvSpPr/>
-          <p:nvPr/>
-        </p:nvSpPr>
-        <p:spPr>
-          <a:xfrm>
-            <a:off x="727200" y="25860636"/>
-            <a:ext cx="6451200" cy="9000"/>
-          </a:xfrm>
-          <a:prstGeom prst="rect">
-            <a:avLst/>
-          </a:prstGeom>
-          <a:solidFill>
-            <a:srgbClr val="DDE3F2"/>
-          </a:solidFill>
-          <a:ln>
-            <a:noFill/>
-          </a:ln>
-          <a:effectLst/>
-        </p:spPr>
-        <p:style>
-          <a:lnRef idx="1">
-            <a:schemeClr val="accent1"/>
-          </a:lnRef>
-          <a:fillRef idx="3">
-            <a:schemeClr val="accent1"/>
-          </a:fillRef>
-          <a:effectRef idx="2">
-            <a:schemeClr val="accent1"/>
-          </a:effectRef>
-          <a:fontRef idx="minor">
-            <a:schemeClr val="lt1"/>
-          </a:fontRef>
-        </p:style>
-        <p:txBody>
-          <a:bodyPr rtlCol="0" anchor="ctr" wrap="square"/>
-          <a:lstStyle/>
-          <a:p>
-            <a:pPr algn="ctr"/>
-          </a:p>
-        </p:txBody>
-      </p:sp>
-      <p:sp>
-        <p:nvSpPr>
-          <p:cNvPr id="131" name="TextBox 130"/>
-          <p:cNvSpPr txBox="1"/>
-          <p:nvPr/>
-        </p:nvSpPr>
-        <p:spPr>
-          <a:xfrm>
-            <a:off x="727200" y="25918236"/>
-            <a:ext cx="4257792" cy="288000"/>
-          </a:xfrm>
-          <a:prstGeom prst="rect">
-            <a:avLst/>
-          </a:prstGeom>
-          <a:noFill/>
-        </p:spPr>
-        <p:txBody>
-          <a:bodyPr wrap="square" lIns="0" rIns="0" tIns="0" bIns="0">
-            <a:spAutoFit/>
-          </a:bodyPr>
-          <a:lstStyle/>
-          <a:p>
-            <a:pPr algn="l">
-              <a:lnSpc>
-                <a:spcPct val="102000"/>
-              </a:lnSpc>
-              <a:spcAft>
-                <a:spcPts val="0"/>
-              </a:spcAft>
-            </a:pPr>
-            <a:r>
-              <a:rPr sz="1900" b="0" i="0">
-                <a:solidFill>
-                  <a:srgbClr val="12162E"/>
-                </a:solidFill>
-                <a:latin typeface="Arial"/>
-              </a:rPr>
-              <a:t>SoM — screenshot + text</a:t>
-            </a:r>
-          </a:p>
-        </p:txBody>
-      </p:sp>
-      <p:sp>
-        <p:nvSpPr>
-          <p:cNvPr id="132" name="TextBox 131"/>
-          <p:cNvSpPr txBox="1"/>
-          <p:nvPr/>
-        </p:nvSpPr>
-        <p:spPr>
-          <a:xfrm>
-            <a:off x="4984992" y="25918236"/>
-            <a:ext cx="2193408" cy="288000"/>
-          </a:xfrm>
-          <a:prstGeom prst="rect">
-            <a:avLst/>
-          </a:prstGeom>
-          <a:noFill/>
-        </p:spPr>
-        <p:txBody>
-          <a:bodyPr wrap="square" lIns="0" rIns="0" tIns="0" bIns="0">
-            <a:spAutoFit/>
-          </a:bodyPr>
-          <a:lstStyle/>
-          <a:p>
-            <a:pPr algn="r">
-              <a:lnSpc>
-                <a:spcPct val="102000"/>
-              </a:lnSpc>
-              <a:spcAft>
-                <a:spcPts val="0"/>
-              </a:spcAft>
-            </a:pPr>
-            <a:r>
-              <a:rPr sz="1900" b="1" i="0">
-                <a:solidFill>
-                  <a:srgbClr val="141E41"/>
-                </a:solidFill>
-                <a:latin typeface="Arial"/>
-              </a:rPr>
-              <a:t>5</a:t>
-            </a:r>
-          </a:p>
-        </p:txBody>
-      </p:sp>
-      <p:sp>
-        <p:nvSpPr>
-          <p:cNvPr id="133" name="Rectangle 132"/>
-          <p:cNvSpPr/>
-          <p:nvPr/>
-        </p:nvSpPr>
-        <p:spPr>
-          <a:xfrm>
-            <a:off x="727200" y="26206236"/>
-            <a:ext cx="6451200" cy="9000"/>
-          </a:xfrm>
-          <a:prstGeom prst="rect">
-            <a:avLst/>
-          </a:prstGeom>
-          <a:solidFill>
-            <a:srgbClr val="DDE3F2"/>
-          </a:solidFill>
-          <a:ln>
-            <a:noFill/>
-          </a:ln>
-          <a:effectLst/>
-        </p:spPr>
-        <p:style>
-          <a:lnRef idx="1">
-            <a:schemeClr val="accent1"/>
-          </a:lnRef>
-          <a:fillRef idx="3">
-            <a:schemeClr val="accent1"/>
-          </a:fillRef>
-          <a:effectRef idx="2">
-            <a:schemeClr val="accent1"/>
-          </a:effectRef>
-          <a:fontRef idx="minor">
-            <a:schemeClr val="lt1"/>
-          </a:fontRef>
-        </p:style>
-        <p:txBody>
-          <a:bodyPr rtlCol="0" anchor="ctr" wrap="square"/>
-          <a:lstStyle/>
-          <a:p>
-            <a:pPr algn="ctr"/>
-          </a:p>
-        </p:txBody>
-      </p:sp>
-      <p:sp>
-        <p:nvSpPr>
-          <p:cNvPr id="134" name="TextBox 133"/>
-          <p:cNvSpPr txBox="1"/>
-          <p:nvPr/>
-        </p:nvSpPr>
-        <p:spPr>
-          <a:xfrm>
-            <a:off x="727200" y="26263836"/>
-            <a:ext cx="4257792" cy="288000"/>
-          </a:xfrm>
-          <a:prstGeom prst="rect">
-            <a:avLst/>
-          </a:prstGeom>
-          <a:noFill/>
-        </p:spPr>
-        <p:txBody>
-          <a:bodyPr wrap="square" lIns="0" rIns="0" tIns="0" bIns="0">
-            <a:spAutoFit/>
-          </a:bodyPr>
-          <a:lstStyle/>
-          <a:p>
-            <a:pPr algn="l">
-              <a:lnSpc>
-                <a:spcPct val="102000"/>
-              </a:lnSpc>
-              <a:spcAft>
-                <a:spcPts val="0"/>
-              </a:spcAft>
-            </a:pPr>
-            <a:r>
-              <a:rPr sz="1900" b="0" i="0">
-                <a:solidFill>
-                  <a:srgbClr val="12162E"/>
-                </a:solidFill>
-                <a:latin typeface="Arial"/>
-              </a:rPr>
-              <a:t>DOM — page text only</a:t>
-            </a:r>
-          </a:p>
-        </p:txBody>
-      </p:sp>
-      <p:sp>
-        <p:nvSpPr>
-          <p:cNvPr id="135" name="TextBox 134"/>
-          <p:cNvSpPr txBox="1"/>
-          <p:nvPr/>
-        </p:nvSpPr>
-        <p:spPr>
-          <a:xfrm>
-            <a:off x="4984992" y="26263836"/>
-            <a:ext cx="2193408" cy="288000"/>
-          </a:xfrm>
-          <a:prstGeom prst="rect">
-            <a:avLst/>
-          </a:prstGeom>
-          <a:noFill/>
-        </p:spPr>
-        <p:txBody>
-          <a:bodyPr wrap="square" lIns="0" rIns="0" tIns="0" bIns="0">
-            <a:spAutoFit/>
-          </a:bodyPr>
-          <a:lstStyle/>
-          <a:p>
-            <a:pPr algn="r">
-              <a:lnSpc>
-                <a:spcPct val="102000"/>
-              </a:lnSpc>
-              <a:spcAft>
-                <a:spcPts val="0"/>
-              </a:spcAft>
-            </a:pPr>
-            <a:r>
-              <a:rPr sz="1900" b="1" i="0">
-                <a:solidFill>
-                  <a:srgbClr val="141E41"/>
-                </a:solidFill>
-                <a:latin typeface="Arial"/>
-              </a:rPr>
-              <a:t>0</a:t>
-            </a:r>
-          </a:p>
-        </p:txBody>
-      </p:sp>
-      <p:sp>
-        <p:nvSpPr>
-          <p:cNvPr id="136" name="Rectangle 135"/>
-          <p:cNvSpPr/>
-          <p:nvPr/>
-        </p:nvSpPr>
-        <p:spPr>
-          <a:xfrm>
-            <a:off x="727200" y="26551836"/>
-            <a:ext cx="6451200" cy="9000"/>
-          </a:xfrm>
-          <a:prstGeom prst="rect">
-            <a:avLst/>
-          </a:prstGeom>
-          <a:solidFill>
-            <a:srgbClr val="DDE3F2"/>
-          </a:solidFill>
-          <a:ln>
-            <a:noFill/>
-          </a:ln>
-          <a:effectLst/>
-        </p:spPr>
-        <p:style>
-          <a:lnRef idx="1">
-            <a:schemeClr val="accent1"/>
-          </a:lnRef>
-          <a:fillRef idx="3">
-            <a:schemeClr val="accent1"/>
-          </a:fillRef>
-          <a:effectRef idx="2">
-            <a:schemeClr val="accent1"/>
-          </a:effectRef>
-          <a:fontRef idx="minor">
-            <a:schemeClr val="lt1"/>
-          </a:fontRef>
-        </p:style>
-        <p:txBody>
-          <a:bodyPr rtlCol="0" anchor="ctr" wrap="square"/>
-          <a:lstStyle/>
-          <a:p>
-            <a:pPr algn="ctr"/>
-          </a:p>
-        </p:txBody>
-      </p:sp>
-      <p:sp>
-        <p:nvSpPr>
-          <p:cNvPr id="137" name="TextBox 136"/>
-          <p:cNvSpPr txBox="1"/>
-          <p:nvPr/>
-        </p:nvSpPr>
-        <p:spPr>
-          <a:xfrm>
-            <a:off x="727200" y="26609436"/>
-            <a:ext cx="4257792" cy="288000"/>
-          </a:xfrm>
-          <a:prstGeom prst="rect">
-            <a:avLst/>
-          </a:prstGeom>
-          <a:noFill/>
-        </p:spPr>
-        <p:txBody>
-          <a:bodyPr wrap="square" lIns="0" rIns="0" tIns="0" bIns="0">
-            <a:spAutoFit/>
-          </a:bodyPr>
-          <a:lstStyle/>
-          <a:p>
-            <a:pPr algn="l">
-              <a:lnSpc>
-                <a:spcPct val="102000"/>
-              </a:lnSpc>
-              <a:spcAft>
-                <a:spcPts val="0"/>
-              </a:spcAft>
-            </a:pPr>
-            <a:r>
-              <a:rPr sz="1900" b="0" i="0">
-                <a:solidFill>
-                  <a:srgbClr val="12162E"/>
-                </a:solidFill>
-                <a:latin typeface="Arial"/>
-              </a:rPr>
-              <a:t>the 3 other text-only views</a:t>
-            </a:r>
-          </a:p>
-        </p:txBody>
-      </p:sp>
-      <p:sp>
-        <p:nvSpPr>
-          <p:cNvPr id="138" name="TextBox 137"/>
-          <p:cNvSpPr txBox="1"/>
-          <p:nvPr/>
-        </p:nvSpPr>
-        <p:spPr>
-          <a:xfrm>
-            <a:off x="4984992" y="26609436"/>
-            <a:ext cx="2193408" cy="288000"/>
-          </a:xfrm>
-          <a:prstGeom prst="rect">
-            <a:avLst/>
-          </a:prstGeom>
-          <a:noFill/>
-        </p:spPr>
-        <p:txBody>
-          <a:bodyPr wrap="square" lIns="0" rIns="0" tIns="0" bIns="0">
-            <a:spAutoFit/>
-          </a:bodyPr>
-          <a:lstStyle/>
-          <a:p>
-            <a:pPr algn="r">
-              <a:lnSpc>
-                <a:spcPct val="102000"/>
-              </a:lnSpc>
-              <a:spcAft>
-                <a:spcPts val="0"/>
-              </a:spcAft>
-            </a:pPr>
-            <a:r>
-              <a:rPr sz="1900" b="1" i="0">
-                <a:solidFill>
-                  <a:srgbClr val="141E41"/>
-                </a:solidFill>
-                <a:latin typeface="Arial"/>
-              </a:rPr>
-              <a:t>0</a:t>
-            </a:r>
-          </a:p>
-        </p:txBody>
-      </p:sp>
-      <p:sp>
-        <p:nvSpPr>
-          <p:cNvPr id="139" name="Rectangle 138"/>
-          <p:cNvSpPr/>
-          <p:nvPr/>
-        </p:nvSpPr>
-        <p:spPr>
-          <a:xfrm>
-            <a:off x="727200" y="26897436"/>
-            <a:ext cx="6451200" cy="9000"/>
-          </a:xfrm>
-          <a:prstGeom prst="rect">
-            <a:avLst/>
-          </a:prstGeom>
-          <a:solidFill>
-            <a:srgbClr val="DDE3F2"/>
-          </a:solidFill>
-          <a:ln>
-            <a:noFill/>
-          </a:ln>
-          <a:effectLst/>
-        </p:spPr>
-        <p:style>
-          <a:lnRef idx="1">
-            <a:schemeClr val="accent1"/>
-          </a:lnRef>
-          <a:fillRef idx="3">
-            <a:schemeClr val="accent1"/>
-          </a:fillRef>
-          <a:effectRef idx="2">
-            <a:schemeClr val="accent1"/>
-          </a:effectRef>
-          <a:fontRef idx="minor">
-            <a:schemeClr val="lt1"/>
-          </a:fontRef>
-        </p:style>
-        <p:txBody>
-          <a:bodyPr rtlCol="0" anchor="ctr" wrap="square"/>
-          <a:lstStyle/>
-          <a:p>
-            <a:pPr algn="ctr"/>
-          </a:p>
-        </p:txBody>
-      </p:sp>
-      <p:sp>
-        <p:nvSpPr>
-          <p:cNvPr id="140" name="TextBox 139"/>
-          <p:cNvSpPr txBox="1"/>
-          <p:nvPr/>
-        </p:nvSpPr>
-        <p:spPr>
-          <a:xfrm>
-            <a:off x="727200" y="27027036"/>
-            <a:ext cx="6451200" cy="839419"/>
-          </a:xfrm>
-          <a:prstGeom prst="rect">
-            <a:avLst/>
-          </a:prstGeom>
-          <a:noFill/>
-        </p:spPr>
-        <p:txBody>
-          <a:bodyPr wrap="square" lIns="0" rIns="0" tIns="0" bIns="0">
-            <a:spAutoFit/>
-          </a:bodyPr>
-          <a:lstStyle/>
-          <a:p>
-            <a:pPr algn="l">
-              <a:lnSpc>
-                <a:spcPct val="108000"/>
-              </a:lnSpc>
-              <a:spcAft>
-                <a:spcPts val="0"/>
-              </a:spcAft>
-            </a:pPr>
-            <a:r>
-              <a:rPr sz="1700" b="0" i="0">
-                <a:solidFill>
-                  <a:srgbClr val="5D6787"/>
-                </a:solidFill>
-                <a:latin typeface="Arial"/>
-              </a:rPr>
-              <a:t>The extremes sit with the two views that see the page. How the agent moves is set by whether it gets a picture, not by which text it gets.</a:t>
-            </a:r>
-          </a:p>
-        </p:txBody>
-      </p:sp>
-      <p:sp>
-        <p:nvSpPr>
-          <p:cNvPr id="14" name="Rectangle 13"/>
-          <p:cNvSpPr/>
-          <p:nvPr/>
-        </p:nvSpPr>
-        <p:spPr>
-          <a:xfrm>
-            <a:off x="7534800" y="19495597"/>
-            <a:ext cx="177988" cy="177988"/>
-          </a:xfrm>
-          <a:prstGeom prst="rect">
-            <a:avLst/>
-          </a:prstGeom>
-          <a:solidFill>
-            <a:srgbClr val="AB5FCE"/>
-          </a:solidFill>
-          <a:ln>
-            <a:noFill/>
-          </a:ln>
-          <a:effectLst/>
-        </p:spPr>
-        <p:style>
-          <a:lnRef idx="1">
-            <a:schemeClr val="accent1"/>
-          </a:lnRef>
-          <a:fillRef idx="3">
-            <a:schemeClr val="accent1"/>
-          </a:fillRef>
-          <a:effectRef idx="2">
-            <a:schemeClr val="accent1"/>
-          </a:effectRef>
-          <a:fontRef idx="minor">
-            <a:schemeClr val="lt1"/>
-          </a:fontRef>
-        </p:style>
-        <p:txBody>
-          <a:bodyPr rtlCol="0" anchor="ctr"/>
-          <a:lstStyle/>
-          <a:p>
-            <a:pPr algn="ctr"/>
-            <a:endParaRPr/>
-          </a:p>
-        </p:txBody>
-      </p:sp>
-      <p:sp>
-        <p:nvSpPr>
-          <p:cNvPr id="15" name="TextBox 14"/>
-          <p:cNvSpPr txBox="1"/>
-          <p:nvPr/>
-        </p:nvSpPr>
-        <p:spPr>
-          <a:xfrm>
-            <a:off x="7839923" y="19452397"/>
-            <a:ext cx="6144827" cy="238912"/>
-          </a:xfrm>
-          <a:prstGeom prst="rect">
-            <a:avLst/>
-          </a:prstGeom>
-          <a:noFill/>
-        </p:spPr>
-        <p:txBody>
-          <a:bodyPr wrap="square" lIns="0" tIns="0" rIns="0" bIns="0" anchor="t">
-            <a:spAutoFit/>
-          </a:bodyPr>
-          <a:lstStyle/>
-          <a:p>
-            <a:pPr algn="l">
-              <a:lnSpc>
-                <a:spcPct val="118000"/>
-              </a:lnSpc>
-            </a:pPr>
-            <a:r>
-              <a:rPr sz="1750" b="1" i="0">
-                <a:solidFill>
-                  <a:srgbClr val="141E41"/>
-                </a:solidFill>
-                <a:latin typeface="Consolas"/>
-              </a:rPr>
-              <a:t>SIX VIEWS, EIGHT SETTINGS</a:t>
-            </a:r>
-            <a:endParaRPr sz="1412" b="1" spc="180" dirty="0">
-              <a:solidFill>
-                <a:srgbClr val="141E41"/>
-              </a:solidFill>
-              <a:latin typeface="Consolas"/>
-            </a:endParaRPr>
-          </a:p>
-        </p:txBody>
-      </p:sp>
-      <p:sp>
-        <p:nvSpPr>
-          <p:cNvPr id="16" name="Rectangle 15"/>
-          <p:cNvSpPr/>
-          <p:nvPr/>
-        </p:nvSpPr>
-        <p:spPr>
-          <a:xfrm>
-            <a:off x="7534800" y="19813433"/>
-            <a:ext cx="1169636" cy="35597"/>
-          </a:xfrm>
-          <a:prstGeom prst="rect">
-            <a:avLst/>
-          </a:prstGeom>
-          <a:solidFill>
-            <a:srgbClr val="141E41"/>
-          </a:solidFill>
-          <a:ln>
-            <a:noFill/>
-          </a:ln>
-          <a:effectLst/>
-        </p:spPr>
-        <p:style>
-          <a:lnRef idx="1">
-            <a:schemeClr val="accent1"/>
-          </a:lnRef>
-          <a:fillRef idx="3">
-            <a:schemeClr val="accent1"/>
-          </a:fillRef>
-          <a:effectRef idx="2">
-            <a:schemeClr val="accent1"/>
-          </a:effectRef>
-          <a:fontRef idx="minor">
-            <a:schemeClr val="lt1"/>
-          </a:fontRef>
-        </p:style>
-        <p:txBody>
-          <a:bodyPr rtlCol="0" anchor="ctr"/>
-          <a:lstStyle/>
-          <a:p>
-            <a:pPr algn="ctr"/>
-            <a:endParaRPr/>
-          </a:p>
-        </p:txBody>
-      </p:sp>
-      <p:sp>
-        <p:nvSpPr>
-          <p:cNvPr id="17" name="Rectangle 16"/>
-          <p:cNvSpPr/>
-          <p:nvPr/>
-        </p:nvSpPr>
-        <p:spPr>
-          <a:xfrm>
-            <a:off x="8704436" y="19823604"/>
-            <a:ext cx="5281564" cy="15256"/>
-          </a:xfrm>
-          <a:prstGeom prst="rect">
-            <a:avLst/>
-          </a:prstGeom>
-          <a:solidFill>
-            <a:srgbClr val="DDE3F2"/>
-          </a:solidFill>
-          <a:ln>
-            <a:noFill/>
-          </a:ln>
-          <a:effectLst/>
-        </p:spPr>
-        <p:style>
-          <a:lnRef idx="1">
-            <a:schemeClr val="accent1"/>
-          </a:lnRef>
-          <a:fillRef idx="3">
-            <a:schemeClr val="accent1"/>
-          </a:fillRef>
-          <a:effectRef idx="2">
-            <a:schemeClr val="accent1"/>
-          </a:effectRef>
-          <a:fontRef idx="minor">
-            <a:schemeClr val="lt1"/>
-          </a:fontRef>
-        </p:style>
-        <p:txBody>
-          <a:bodyPr rtlCol="0" anchor="ctr"/>
-          <a:lstStyle/>
-          <a:p>
-            <a:pPr algn="ctr"/>
-            <a:endParaRPr/>
-          </a:p>
-        </p:txBody>
-      </p:sp>
-      <p:sp>
-        <p:nvSpPr>
-          <p:cNvPr id="141" name="Rectangle 140"/>
-          <p:cNvSpPr/>
-          <p:nvPr/>
-        </p:nvSpPr>
-        <p:spPr>
-          <a:xfrm>
-            <a:off x="8373456" y="20035597"/>
-            <a:ext cx="4773888" cy="3887437"/>
+            <a:off x="7534800" y="19375705"/>
+            <a:ext cx="6451200" cy="2751873"/>
           </a:xfrm>
           <a:prstGeom prst="rect">
             <a:avLst/>
@@ -7375,14 +6495,14 @@
       </p:sp>
       <p:sp>
         <p:nvSpPr>
-          <p:cNvPr id="142" name="Rectangle 141"/>
+          <p:cNvPr id="126" name="Rectangle 125"/>
           <p:cNvSpPr/>
           <p:nvPr/>
         </p:nvSpPr>
         <p:spPr>
           <a:xfrm>
-            <a:off x="8373456" y="20035597"/>
-            <a:ext cx="4773888" cy="50400"/>
+            <a:off x="7534800" y="19375705"/>
+            <a:ext cx="6451200" cy="50400"/>
           </a:xfrm>
           <a:prstGeom prst="rect">
             <a:avLst/>
@@ -7419,7 +6539,7 @@
       </p:sp>
       <p:pic>
         <p:nvPicPr>
-          <p:cNvPr id="143" name="Picture 142" descr="fig_f5_design_matrix.png"/>
+          <p:cNvPr id="127" name="Picture 126" descr="venn_b0.png"/>
           <p:cNvPicPr>
             <a:picLocks noChangeAspect="1"/>
           </p:cNvPicPr>
@@ -7433,8 +6553,8 @@
         </p:blipFill>
         <p:spPr>
           <a:xfrm>
-            <a:off x="8481456" y="20193997"/>
-            <a:ext cx="4557888" cy="3621037"/>
+            <a:off x="7606800" y="19498105"/>
+            <a:ext cx="6307200" cy="2557474"/>
           </a:xfrm>
           <a:prstGeom prst="rect">
             <a:avLst/>
@@ -7443,14 +6563,14 @@
       </p:pic>
       <p:sp>
         <p:nvSpPr>
-          <p:cNvPr id="144" name="TextBox 143"/>
+          <p:cNvPr id="128" name="TextBox 127"/>
           <p:cNvSpPr txBox="1"/>
           <p:nvPr/>
         </p:nvSpPr>
         <p:spPr>
           <a:xfrm>
-            <a:off x="7534800" y="23995034"/>
-            <a:ext cx="6451200" cy="510235"/>
+            <a:off x="7534800" y="22199578"/>
+            <a:ext cx="6451200" cy="279806"/>
           </a:xfrm>
           <a:prstGeom prst="rect">
             <a:avLst/>
@@ -7472,13 +6592,13 @@
               </a:spcAft>
             </a:pPr>
             <a:r>
-              <a:rPr sz="1550" b="0" i="0">
+              <a:rPr sz="1700" b="1" i="0">
                 <a:solidFill>
-                  <a:srgbClr val="5D6787"/>
+                  <a:srgbClr val="12162E"/>
                 </a:solidFill>
                 <a:latin typeface="Arial"/>
               </a:rPr>
-              <a:t>Success rate (%). Colour is what reaches the model: text, text + image, image.</a:t>
+              <a:t>The sets overlap — but do not coincide.</a:t>
             </a:r>
           </a:p>
         </p:txBody>
@@ -7491,7 +6611,7 @@
         </p:nvSpPr>
         <p:spPr>
           <a:xfrm>
-            <a:off x="7534800" y="24685269"/>
+            <a:off x="14338800" y="18835705"/>
             <a:ext cx="177988" cy="177988"/>
           </a:xfrm>
           <a:prstGeom prst="rect">
@@ -7536,7 +6656,7 @@
         </p:nvSpPr>
         <p:spPr>
           <a:xfrm>
-            <a:off x="7839923" y="24642069"/>
+            <a:off x="14643923" y="18792505"/>
             <a:ext cx="6144827" cy="238912"/>
           </a:xfrm>
           <a:prstGeom prst="rect">
@@ -7562,7 +6682,7 @@
                 </a:solidFill>
                 <a:latin typeface="Consolas"/>
               </a:rPr>
-              <a:t>AND THEY FAIL DIFFERENTLY</a:t>
+              <a:t>3 · THEY BEHAVE DIFFERENTLY</a:t>
             </a:r>
             <a:endParaRPr sz="1412" b="1" spc="180" dirty="0">
               <a:solidFill>
@@ -7581,7 +6701,7 @@
         </p:nvSpPr>
         <p:spPr>
           <a:xfrm>
-            <a:off x="7534800" y="25003105"/>
+            <a:off x="14338800" y="19153541"/>
             <a:ext cx="1169636" cy="35597"/>
           </a:xfrm>
           <a:prstGeom prst="rect">
@@ -7626,7 +6746,7 @@
         </p:nvSpPr>
         <p:spPr>
           <a:xfrm>
-            <a:off x="8704436" y="25013276"/>
+            <a:off x="15508436" y="19163712"/>
             <a:ext cx="5281564" cy="15256"/>
           </a:xfrm>
           <a:prstGeom prst="rect">
@@ -7665,883 +6785,14 @@
       </p:sp>
       <p:sp>
         <p:nvSpPr>
-          <p:cNvPr id="145" name="TextBox 144"/>
-          <p:cNvSpPr txBox="1"/>
-          <p:nvPr/>
-        </p:nvSpPr>
-        <p:spPr>
-          <a:xfrm>
-            <a:off x="7534800" y="25225269"/>
-            <a:ext cx="6451200" cy="608076"/>
-          </a:xfrm>
-          <a:prstGeom prst="rect">
-            <a:avLst/>
-          </a:prstGeom>
-          <a:noFill/>
-        </p:spPr>
-        <p:txBody>
-          <a:bodyPr wrap="square" lIns="0" rIns="0" tIns="0" bIns="0">
-            <a:spAutoFit/>
-          </a:bodyPr>
-          <a:lstStyle/>
-          <a:p>
-            <a:pPr algn="l">
-              <a:lnSpc>
-                <a:spcPct val="105000"/>
-              </a:lnSpc>
-              <a:spcAft>
-                <a:spcPts val="453"/>
-              </a:spcAft>
-            </a:pPr>
-            <a:r>
-              <a:rPr sz="1900" b="0" i="0">
-                <a:solidFill>
-                  <a:srgbClr val="12162E"/>
-                </a:solidFill>
-                <a:latin typeface="Arial"/>
-              </a:rPr>
-              <a:t>On tasks only one side solved, how did the loser fail? </a:t>
-            </a:r>
-            <a:r>
-              <a:rPr sz="1900" b="1" i="0">
-                <a:solidFill>
-                  <a:srgbClr val="12162E"/>
-                </a:solidFill>
-                <a:latin typeface="Arial"/>
-              </a:rPr>
-              <a:t>× = versus its own everyday failure rate.</a:t>
-            </a:r>
-          </a:p>
-        </p:txBody>
-      </p:sp>
-      <p:sp>
-        <p:nvSpPr>
-          <p:cNvPr id="146" name="TextBox 145"/>
-          <p:cNvSpPr txBox="1"/>
-          <p:nvPr/>
-        </p:nvSpPr>
-        <p:spPr>
-          <a:xfrm>
-            <a:off x="7534800" y="25923345"/>
-            <a:ext cx="6451200" cy="288000"/>
-          </a:xfrm>
-          <a:prstGeom prst="rect">
-            <a:avLst/>
-          </a:prstGeom>
-          <a:noFill/>
-        </p:spPr>
-        <p:txBody>
-          <a:bodyPr wrap="square" lIns="0" rIns="0" tIns="0" bIns="0">
-            <a:spAutoFit/>
-          </a:bodyPr>
-          <a:lstStyle/>
-          <a:p>
-            <a:pPr algn="l">
-              <a:lnSpc>
-                <a:spcPct val="102000"/>
-              </a:lnSpc>
-              <a:spcAft>
-                <a:spcPts val="0"/>
-              </a:spcAft>
-            </a:pPr>
-            <a:r>
-              <a:rPr sz="1600" b="1" i="0">
-                <a:solidFill>
-                  <a:srgbClr val="141E41"/>
-                </a:solidFill>
-                <a:latin typeface="Arial"/>
-              </a:rPr>
-              <a:t>When the picture won, the text-only agent</a:t>
-            </a:r>
-          </a:p>
-        </p:txBody>
-      </p:sp>
-      <p:sp>
-        <p:nvSpPr>
-          <p:cNvPr id="147" name="TextBox 146"/>
-          <p:cNvSpPr txBox="1"/>
-          <p:nvPr/>
-        </p:nvSpPr>
-        <p:spPr>
-          <a:xfrm>
-            <a:off x="7534800" y="26168145"/>
-            <a:ext cx="5031936" cy="288000"/>
-          </a:xfrm>
-          <a:prstGeom prst="rect">
-            <a:avLst/>
-          </a:prstGeom>
-          <a:noFill/>
-        </p:spPr>
-        <p:txBody>
-          <a:bodyPr wrap="square" lIns="0" rIns="0" tIns="0" bIns="0">
-            <a:spAutoFit/>
-          </a:bodyPr>
-          <a:lstStyle/>
-          <a:p>
-            <a:pPr algn="l">
-              <a:lnSpc>
-                <a:spcPct val="102000"/>
-              </a:lnSpc>
-              <a:spcAft>
-                <a:spcPts val="0"/>
-              </a:spcAft>
-            </a:pPr>
-            <a:r>
-              <a:rPr sz="1500" b="0" i="0">
-                <a:solidFill>
-                  <a:srgbClr val="12162E"/>
-                </a:solidFill>
-                <a:latin typeface="Arial"/>
-              </a:rPr>
-              <a:t>gave up once it could not find it</a:t>
-            </a:r>
-          </a:p>
-        </p:txBody>
-      </p:sp>
-      <p:sp>
-        <p:nvSpPr>
-          <p:cNvPr id="148" name="TextBox 147"/>
-          <p:cNvSpPr txBox="1"/>
-          <p:nvPr/>
-        </p:nvSpPr>
-        <p:spPr>
-          <a:xfrm>
-            <a:off x="12566736" y="26168145"/>
-            <a:ext cx="1419264" cy="288000"/>
-          </a:xfrm>
-          <a:prstGeom prst="rect">
-            <a:avLst/>
-          </a:prstGeom>
-          <a:noFill/>
-        </p:spPr>
-        <p:txBody>
-          <a:bodyPr wrap="square" lIns="0" rIns="0" tIns="0" bIns="0">
-            <a:spAutoFit/>
-          </a:bodyPr>
-          <a:lstStyle/>
-          <a:p>
-            <a:pPr algn="r">
-              <a:lnSpc>
-                <a:spcPct val="102000"/>
-              </a:lnSpc>
-              <a:spcAft>
-                <a:spcPts val="0"/>
-              </a:spcAft>
-            </a:pPr>
-            <a:r>
-              <a:rPr sz="1500" b="1" i="0">
-                <a:solidFill>
-                  <a:srgbClr val="141E41"/>
-                </a:solidFill>
-                <a:latin typeface="Arial"/>
-              </a:rPr>
-              <a:t>2.3×</a:t>
-            </a:r>
-          </a:p>
-        </p:txBody>
-      </p:sp>
-      <p:sp>
-        <p:nvSpPr>
-          <p:cNvPr id="149" name="Rectangle 148"/>
+          <p:cNvPr id="129" name="Rectangle 128"/>
           <p:cNvSpPr/>
           <p:nvPr/>
         </p:nvSpPr>
         <p:spPr>
           <a:xfrm>
-            <a:off x="7534800" y="26355345"/>
-            <a:ext cx="6451200" cy="9000"/>
-          </a:xfrm>
-          <a:prstGeom prst="rect">
-            <a:avLst/>
-          </a:prstGeom>
-          <a:solidFill>
-            <a:srgbClr val="DDE3F2"/>
-          </a:solidFill>
-          <a:ln>
-            <a:noFill/>
-          </a:ln>
-          <a:effectLst/>
-        </p:spPr>
-        <p:style>
-          <a:lnRef idx="1">
-            <a:schemeClr val="accent1"/>
-          </a:lnRef>
-          <a:fillRef idx="3">
-            <a:schemeClr val="accent1"/>
-          </a:fillRef>
-          <a:effectRef idx="2">
-            <a:schemeClr val="accent1"/>
-          </a:effectRef>
-          <a:fontRef idx="minor">
-            <a:schemeClr val="lt1"/>
-          </a:fontRef>
-        </p:style>
-        <p:txBody>
-          <a:bodyPr rtlCol="0" anchor="ctr" wrap="square"/>
-          <a:lstStyle/>
-          <a:p>
-            <a:pPr algn="ctr"/>
-          </a:p>
-        </p:txBody>
-      </p:sp>
-      <p:sp>
-        <p:nvSpPr>
-          <p:cNvPr id="150" name="TextBox 149"/>
-          <p:cNvSpPr txBox="1"/>
-          <p:nvPr/>
-        </p:nvSpPr>
-        <p:spPr>
-          <a:xfrm>
-            <a:off x="7534800" y="26412945"/>
-            <a:ext cx="5031936" cy="288000"/>
-          </a:xfrm>
-          <a:prstGeom prst="rect">
-            <a:avLst/>
-          </a:prstGeom>
-          <a:noFill/>
-        </p:spPr>
-        <p:txBody>
-          <a:bodyPr wrap="square" lIns="0" rIns="0" tIns="0" bIns="0">
-            <a:spAutoFit/>
-          </a:bodyPr>
-          <a:lstStyle/>
-          <a:p>
-            <a:pPr algn="l">
-              <a:lnSpc>
-                <a:spcPct val="102000"/>
-              </a:lnSpc>
-              <a:spcAft>
-                <a:spcPts val="0"/>
-              </a:spcAft>
-            </a:pPr>
-            <a:r>
-              <a:rPr sz="1500" b="0" i="0">
-                <a:solidFill>
-                  <a:srgbClr val="12162E"/>
-                </a:solidFill>
-                <a:latin typeface="Arial"/>
-              </a:rPr>
-              <a:t>could not see what the task asked about</a:t>
-            </a:r>
-          </a:p>
-        </p:txBody>
-      </p:sp>
-      <p:sp>
-        <p:nvSpPr>
-          <p:cNvPr id="151" name="TextBox 150"/>
-          <p:cNvSpPr txBox="1"/>
-          <p:nvPr/>
-        </p:nvSpPr>
-        <p:spPr>
-          <a:xfrm>
-            <a:off x="12566736" y="26412945"/>
-            <a:ext cx="1419264" cy="288000"/>
-          </a:xfrm>
-          <a:prstGeom prst="rect">
-            <a:avLst/>
-          </a:prstGeom>
-          <a:noFill/>
-        </p:spPr>
-        <p:txBody>
-          <a:bodyPr wrap="square" lIns="0" rIns="0" tIns="0" bIns="0">
-            <a:spAutoFit/>
-          </a:bodyPr>
-          <a:lstStyle/>
-          <a:p>
-            <a:pPr algn="r">
-              <a:lnSpc>
-                <a:spcPct val="102000"/>
-              </a:lnSpc>
-              <a:spcAft>
-                <a:spcPts val="0"/>
-              </a:spcAft>
-            </a:pPr>
-            <a:r>
-              <a:rPr sz="1500" b="1" i="0">
-                <a:solidFill>
-                  <a:srgbClr val="141E41"/>
-                </a:solidFill>
-                <a:latin typeface="Arial"/>
-              </a:rPr>
-              <a:t>2.2×</a:t>
-            </a:r>
-          </a:p>
-        </p:txBody>
-      </p:sp>
-      <p:sp>
-        <p:nvSpPr>
-          <p:cNvPr id="152" name="Rectangle 151"/>
-          <p:cNvSpPr/>
-          <p:nvPr/>
-        </p:nvSpPr>
-        <p:spPr>
-          <a:xfrm>
-            <a:off x="7534800" y="26600145"/>
-            <a:ext cx="6451200" cy="9000"/>
-          </a:xfrm>
-          <a:prstGeom prst="rect">
-            <a:avLst/>
-          </a:prstGeom>
-          <a:solidFill>
-            <a:srgbClr val="DDE3F2"/>
-          </a:solidFill>
-          <a:ln>
-            <a:noFill/>
-          </a:ln>
-          <a:effectLst/>
-        </p:spPr>
-        <p:style>
-          <a:lnRef idx="1">
-            <a:schemeClr val="accent1"/>
-          </a:lnRef>
-          <a:fillRef idx="3">
-            <a:schemeClr val="accent1"/>
-          </a:fillRef>
-          <a:effectRef idx="2">
-            <a:schemeClr val="accent1"/>
-          </a:effectRef>
-          <a:fontRef idx="minor">
-            <a:schemeClr val="lt1"/>
-          </a:fontRef>
-        </p:style>
-        <p:txBody>
-          <a:bodyPr rtlCol="0" anchor="ctr" wrap="square"/>
-          <a:lstStyle/>
-          <a:p>
-            <a:pPr algn="ctr"/>
-          </a:p>
-        </p:txBody>
-      </p:sp>
-      <p:sp>
-        <p:nvSpPr>
-          <p:cNvPr id="153" name="TextBox 152"/>
-          <p:cNvSpPr txBox="1"/>
-          <p:nvPr/>
-        </p:nvSpPr>
-        <p:spPr>
-          <a:xfrm>
-            <a:off x="7534800" y="26711745"/>
-            <a:ext cx="6451200" cy="288000"/>
-          </a:xfrm>
-          <a:prstGeom prst="rect">
-            <a:avLst/>
-          </a:prstGeom>
-          <a:noFill/>
-        </p:spPr>
-        <p:txBody>
-          <a:bodyPr wrap="square" lIns="0" rIns="0" tIns="0" bIns="0">
-            <a:spAutoFit/>
-          </a:bodyPr>
-          <a:lstStyle/>
-          <a:p>
-            <a:pPr algn="l">
-              <a:lnSpc>
-                <a:spcPct val="102000"/>
-              </a:lnSpc>
-              <a:spcAft>
-                <a:spcPts val="0"/>
-              </a:spcAft>
-            </a:pPr>
-            <a:r>
-              <a:rPr sz="1600" b="1" i="0">
-                <a:solidFill>
-                  <a:srgbClr val="141E41"/>
-                </a:solidFill>
-                <a:latin typeface="Arial"/>
-              </a:rPr>
-              <a:t>When the text won, the picture-only agent</a:t>
-            </a:r>
-          </a:p>
-        </p:txBody>
-      </p:sp>
-      <p:sp>
-        <p:nvSpPr>
-          <p:cNvPr id="154" name="TextBox 153"/>
-          <p:cNvSpPr txBox="1"/>
-          <p:nvPr/>
-        </p:nvSpPr>
-        <p:spPr>
-          <a:xfrm>
-            <a:off x="7534800" y="26956545"/>
-            <a:ext cx="5031936" cy="288000"/>
-          </a:xfrm>
-          <a:prstGeom prst="rect">
-            <a:avLst/>
-          </a:prstGeom>
-          <a:noFill/>
-        </p:spPr>
-        <p:txBody>
-          <a:bodyPr wrap="square" lIns="0" rIns="0" tIns="0" bIns="0">
-            <a:spAutoFit/>
-          </a:bodyPr>
-          <a:lstStyle/>
-          <a:p>
-            <a:pPr algn="l">
-              <a:lnSpc>
-                <a:spcPct val="102000"/>
-              </a:lnSpc>
-              <a:spcAft>
-                <a:spcPts val="0"/>
-              </a:spcAft>
-            </a:pPr>
-            <a:r>
-              <a:rPr sz="1500" b="0" i="0">
-                <a:solidFill>
-                  <a:srgbClr val="12162E"/>
-                </a:solidFill>
-                <a:latin typeface="Arial"/>
-              </a:rPr>
-              <a:t>never turned the page</a:t>
-            </a:r>
-          </a:p>
-        </p:txBody>
-      </p:sp>
-      <p:sp>
-        <p:nvSpPr>
-          <p:cNvPr id="155" name="TextBox 154"/>
-          <p:cNvSpPr txBox="1"/>
-          <p:nvPr/>
-        </p:nvSpPr>
-        <p:spPr>
-          <a:xfrm>
-            <a:off x="12566736" y="26956545"/>
-            <a:ext cx="1419264" cy="288000"/>
-          </a:xfrm>
-          <a:prstGeom prst="rect">
-            <a:avLst/>
-          </a:prstGeom>
-          <a:noFill/>
-        </p:spPr>
-        <p:txBody>
-          <a:bodyPr wrap="square" lIns="0" rIns="0" tIns="0" bIns="0">
-            <a:spAutoFit/>
-          </a:bodyPr>
-          <a:lstStyle/>
-          <a:p>
-            <a:pPr algn="r">
-              <a:lnSpc>
-                <a:spcPct val="102000"/>
-              </a:lnSpc>
-              <a:spcAft>
-                <a:spcPts val="0"/>
-              </a:spcAft>
-            </a:pPr>
-            <a:r>
-              <a:rPr sz="1500" b="1" i="0">
-                <a:solidFill>
-                  <a:srgbClr val="141E41"/>
-                </a:solidFill>
-                <a:latin typeface="Arial"/>
-              </a:rPr>
-              <a:t>0.9×</a:t>
-            </a:r>
-          </a:p>
-        </p:txBody>
-      </p:sp>
-      <p:sp>
-        <p:nvSpPr>
-          <p:cNvPr id="156" name="Rectangle 155"/>
-          <p:cNvSpPr/>
-          <p:nvPr/>
-        </p:nvSpPr>
-        <p:spPr>
-          <a:xfrm>
-            <a:off x="7534800" y="27143745"/>
-            <a:ext cx="6451200" cy="9000"/>
-          </a:xfrm>
-          <a:prstGeom prst="rect">
-            <a:avLst/>
-          </a:prstGeom>
-          <a:solidFill>
-            <a:srgbClr val="DDE3F2"/>
-          </a:solidFill>
-          <a:ln>
-            <a:noFill/>
-          </a:ln>
-          <a:effectLst/>
-        </p:spPr>
-        <p:style>
-          <a:lnRef idx="1">
-            <a:schemeClr val="accent1"/>
-          </a:lnRef>
-          <a:fillRef idx="3">
-            <a:schemeClr val="accent1"/>
-          </a:fillRef>
-          <a:effectRef idx="2">
-            <a:schemeClr val="accent1"/>
-          </a:effectRef>
-          <a:fontRef idx="minor">
-            <a:schemeClr val="lt1"/>
-          </a:fontRef>
-        </p:style>
-        <p:txBody>
-          <a:bodyPr rtlCol="0" anchor="ctr" wrap="square"/>
-          <a:lstStyle/>
-          <a:p>
-            <a:pPr algn="ctr"/>
-          </a:p>
-        </p:txBody>
-      </p:sp>
-      <p:sp>
-        <p:nvSpPr>
-          <p:cNvPr id="157" name="TextBox 156"/>
-          <p:cNvSpPr txBox="1"/>
-          <p:nvPr/>
-        </p:nvSpPr>
-        <p:spPr>
-          <a:xfrm>
-            <a:off x="7534800" y="27201345"/>
-            <a:ext cx="5031936" cy="288000"/>
-          </a:xfrm>
-          <a:prstGeom prst="rect">
-            <a:avLst/>
-          </a:prstGeom>
-          <a:noFill/>
-        </p:spPr>
-        <p:txBody>
-          <a:bodyPr wrap="square" lIns="0" rIns="0" tIns="0" bIns="0">
-            <a:spAutoFit/>
-          </a:bodyPr>
-          <a:lstStyle/>
-          <a:p>
-            <a:pPr algn="l">
-              <a:lnSpc>
-                <a:spcPct val="102000"/>
-              </a:lnSpc>
-              <a:spcAft>
-                <a:spcPts val="0"/>
-              </a:spcAft>
-            </a:pPr>
-            <a:r>
-              <a:rPr sz="1500" b="0" i="0">
-                <a:solidFill>
-                  <a:srgbClr val="12162E"/>
-                </a:solidFill>
-                <a:latin typeface="Arial"/>
-              </a:rPr>
-              <a:t>ran out of budget, unfinished</a:t>
-            </a:r>
-          </a:p>
-        </p:txBody>
-      </p:sp>
-      <p:sp>
-        <p:nvSpPr>
-          <p:cNvPr id="158" name="TextBox 157"/>
-          <p:cNvSpPr txBox="1"/>
-          <p:nvPr/>
-        </p:nvSpPr>
-        <p:spPr>
-          <a:xfrm>
-            <a:off x="12566736" y="27201345"/>
-            <a:ext cx="1419264" cy="288000"/>
-          </a:xfrm>
-          <a:prstGeom prst="rect">
-            <a:avLst/>
-          </a:prstGeom>
-          <a:noFill/>
-        </p:spPr>
-        <p:txBody>
-          <a:bodyPr wrap="square" lIns="0" rIns="0" tIns="0" bIns="0">
-            <a:spAutoFit/>
-          </a:bodyPr>
-          <a:lstStyle/>
-          <a:p>
-            <a:pPr algn="r">
-              <a:lnSpc>
-                <a:spcPct val="102000"/>
-              </a:lnSpc>
-              <a:spcAft>
-                <a:spcPts val="0"/>
-              </a:spcAft>
-            </a:pPr>
-            <a:r>
-              <a:rPr sz="1500" b="1" i="0">
-                <a:solidFill>
-                  <a:srgbClr val="141E41"/>
-                </a:solidFill>
-                <a:latin typeface="Arial"/>
-              </a:rPr>
-              <a:t>0.9×</a:t>
-            </a:r>
-          </a:p>
-        </p:txBody>
-      </p:sp>
-      <p:sp>
-        <p:nvSpPr>
-          <p:cNvPr id="159" name="Rectangle 158"/>
-          <p:cNvSpPr/>
-          <p:nvPr/>
-        </p:nvSpPr>
-        <p:spPr>
-          <a:xfrm>
-            <a:off x="7534800" y="27388545"/>
-            <a:ext cx="6451200" cy="9000"/>
-          </a:xfrm>
-          <a:prstGeom prst="rect">
-            <a:avLst/>
-          </a:prstGeom>
-          <a:solidFill>
-            <a:srgbClr val="DDE3F2"/>
-          </a:solidFill>
-          <a:ln>
-            <a:noFill/>
-          </a:ln>
-          <a:effectLst/>
-        </p:spPr>
-        <p:style>
-          <a:lnRef idx="1">
-            <a:schemeClr val="accent1"/>
-          </a:lnRef>
-          <a:fillRef idx="3">
-            <a:schemeClr val="accent1"/>
-          </a:fillRef>
-          <a:effectRef idx="2">
-            <a:schemeClr val="accent1"/>
-          </a:effectRef>
-          <a:fontRef idx="minor">
-            <a:schemeClr val="lt1"/>
-          </a:fontRef>
-        </p:style>
-        <p:txBody>
-          <a:bodyPr rtlCol="0" anchor="ctr" wrap="square"/>
-          <a:lstStyle/>
-          <a:p>
-            <a:pPr algn="ctr"/>
-          </a:p>
-        </p:txBody>
-      </p:sp>
-      <p:sp>
-        <p:nvSpPr>
-          <p:cNvPr id="160" name="TextBox 159"/>
-          <p:cNvSpPr txBox="1"/>
-          <p:nvPr/>
-        </p:nvSpPr>
-        <p:spPr>
-          <a:xfrm>
-            <a:off x="7534800" y="27518145"/>
-            <a:ext cx="6451200" cy="510235"/>
-          </a:xfrm>
-          <a:prstGeom prst="rect">
-            <a:avLst/>
-          </a:prstGeom>
-          <a:noFill/>
-        </p:spPr>
-        <p:txBody>
-          <a:bodyPr wrap="square" lIns="0" rIns="0" tIns="0" bIns="0">
-            <a:spAutoFit/>
-          </a:bodyPr>
-          <a:lstStyle/>
-          <a:p>
-            <a:pPr algn="l">
-              <a:lnSpc>
-                <a:spcPct val="108000"/>
-              </a:lnSpc>
-              <a:spcAft>
-                <a:spcPts val="0"/>
-              </a:spcAft>
-            </a:pPr>
-            <a:r>
-              <a:rPr sz="1550" b="1" i="0">
-                <a:solidFill>
-                  <a:srgbClr val="12162E"/>
-                </a:solidFill>
-                <a:latin typeface="Arial"/>
-              </a:rPr>
-              <a:t>One side dies of something you can name. The other simply never arrives.</a:t>
-            </a:r>
-          </a:p>
-        </p:txBody>
-      </p:sp>
-      <p:sp>
-        <p:nvSpPr>
-          <p:cNvPr id="14" name="Rectangle 13"/>
-          <p:cNvSpPr/>
-          <p:nvPr/>
-        </p:nvSpPr>
-        <p:spPr>
-          <a:xfrm>
-            <a:off x="14338800" y="19495597"/>
-            <a:ext cx="177988" cy="177988"/>
-          </a:xfrm>
-          <a:prstGeom prst="rect">
-            <a:avLst/>
-          </a:prstGeom>
-          <a:solidFill>
-            <a:srgbClr val="AB5FCE"/>
-          </a:solidFill>
-          <a:ln>
-            <a:noFill/>
-          </a:ln>
-          <a:effectLst/>
-        </p:spPr>
-        <p:style>
-          <a:lnRef idx="1">
-            <a:schemeClr val="accent1"/>
-          </a:lnRef>
-          <a:fillRef idx="3">
-            <a:schemeClr val="accent1"/>
-          </a:fillRef>
-          <a:effectRef idx="2">
-            <a:schemeClr val="accent1"/>
-          </a:effectRef>
-          <a:fontRef idx="minor">
-            <a:schemeClr val="lt1"/>
-          </a:fontRef>
-        </p:style>
-        <p:txBody>
-          <a:bodyPr rtlCol="0" anchor="ctr"/>
-          <a:lstStyle/>
-          <a:p>
-            <a:pPr algn="ctr"/>
-            <a:endParaRPr/>
-          </a:p>
-        </p:txBody>
-      </p:sp>
-      <p:sp>
-        <p:nvSpPr>
-          <p:cNvPr id="15" name="TextBox 14"/>
-          <p:cNvSpPr txBox="1"/>
-          <p:nvPr/>
-        </p:nvSpPr>
-        <p:spPr>
-          <a:xfrm>
-            <a:off x="14643923" y="19452397"/>
-            <a:ext cx="6144827" cy="238912"/>
-          </a:xfrm>
-          <a:prstGeom prst="rect">
-            <a:avLst/>
-          </a:prstGeom>
-          <a:noFill/>
-        </p:spPr>
-        <p:txBody>
-          <a:bodyPr wrap="square" lIns="0" tIns="0" rIns="0" bIns="0" anchor="t">
-            <a:spAutoFit/>
-          </a:bodyPr>
-          <a:lstStyle/>
-          <a:p>
-            <a:pPr algn="l">
-              <a:lnSpc>
-                <a:spcPct val="118000"/>
-              </a:lnSpc>
-            </a:pPr>
-            <a:r>
-              <a:rPr sz="1750" b="1" i="0">
-                <a:solidFill>
-                  <a:srgbClr val="141E41"/>
-                </a:solidFill>
-                <a:latin typeface="Consolas"/>
-              </a:rPr>
-              <a:t>CHOOSING WELL IS HARDER THAN IT LOOKS</a:t>
-            </a:r>
-            <a:endParaRPr sz="1412" b="1" spc="180" dirty="0">
-              <a:solidFill>
-                <a:srgbClr val="141E41"/>
-              </a:solidFill>
-              <a:latin typeface="Consolas"/>
-            </a:endParaRPr>
-          </a:p>
-        </p:txBody>
-      </p:sp>
-      <p:sp>
-        <p:nvSpPr>
-          <p:cNvPr id="16" name="Rectangle 15"/>
-          <p:cNvSpPr/>
-          <p:nvPr/>
-        </p:nvSpPr>
-        <p:spPr>
-          <a:xfrm>
-            <a:off x="14338800" y="19813433"/>
-            <a:ext cx="1169636" cy="35597"/>
-          </a:xfrm>
-          <a:prstGeom prst="rect">
-            <a:avLst/>
-          </a:prstGeom>
-          <a:solidFill>
-            <a:srgbClr val="141E41"/>
-          </a:solidFill>
-          <a:ln>
-            <a:noFill/>
-          </a:ln>
-          <a:effectLst/>
-        </p:spPr>
-        <p:style>
-          <a:lnRef idx="1">
-            <a:schemeClr val="accent1"/>
-          </a:lnRef>
-          <a:fillRef idx="3">
-            <a:schemeClr val="accent1"/>
-          </a:fillRef>
-          <a:effectRef idx="2">
-            <a:schemeClr val="accent1"/>
-          </a:effectRef>
-          <a:fontRef idx="minor">
-            <a:schemeClr val="lt1"/>
-          </a:fontRef>
-        </p:style>
-        <p:txBody>
-          <a:bodyPr rtlCol="0" anchor="ctr"/>
-          <a:lstStyle/>
-          <a:p>
-            <a:pPr algn="ctr"/>
-            <a:endParaRPr/>
-          </a:p>
-        </p:txBody>
-      </p:sp>
-      <p:sp>
-        <p:nvSpPr>
-          <p:cNvPr id="17" name="Rectangle 16"/>
-          <p:cNvSpPr/>
-          <p:nvPr/>
-        </p:nvSpPr>
-        <p:spPr>
-          <a:xfrm>
-            <a:off x="15508436" y="19823604"/>
-            <a:ext cx="5281564" cy="15256"/>
-          </a:xfrm>
-          <a:prstGeom prst="rect">
-            <a:avLst/>
-          </a:prstGeom>
-          <a:solidFill>
-            <a:srgbClr val="DDE3F2"/>
-          </a:solidFill>
-          <a:ln>
-            <a:noFill/>
-          </a:ln>
-          <a:effectLst/>
-        </p:spPr>
-        <p:style>
-          <a:lnRef idx="1">
-            <a:schemeClr val="accent1"/>
-          </a:lnRef>
-          <a:fillRef idx="3">
-            <a:schemeClr val="accent1"/>
-          </a:fillRef>
-          <a:effectRef idx="2">
-            <a:schemeClr val="accent1"/>
-          </a:effectRef>
-          <a:fontRef idx="minor">
-            <a:schemeClr val="lt1"/>
-          </a:fontRef>
-        </p:style>
-        <p:txBody>
-          <a:bodyPr rtlCol="0" anchor="ctr"/>
-          <a:lstStyle/>
-          <a:p>
-            <a:pPr algn="ctr"/>
-            <a:endParaRPr/>
-          </a:p>
-        </p:txBody>
-      </p:sp>
-      <p:sp>
-        <p:nvSpPr>
-          <p:cNvPr id="161" name="Rectangle 160"/>
-          <p:cNvSpPr/>
-          <p:nvPr/>
-        </p:nvSpPr>
-        <p:spPr>
-          <a:xfrm>
-            <a:off x="14467824" y="20035597"/>
-            <a:ext cx="6193152" cy="4586924"/>
+            <a:off x="14338800" y="19375705"/>
+            <a:ext cx="6451200" cy="2581780"/>
           </a:xfrm>
           <a:prstGeom prst="rect">
             <a:avLst/>
@@ -8580,14 +6831,14 @@
       </p:sp>
       <p:sp>
         <p:nvSpPr>
-          <p:cNvPr id="162" name="Rectangle 161"/>
+          <p:cNvPr id="130" name="Rectangle 129"/>
           <p:cNvSpPr/>
           <p:nvPr/>
         </p:nvSpPr>
         <p:spPr>
           <a:xfrm>
-            <a:off x="14467824" y="20035597"/>
-            <a:ext cx="6193152" cy="50400"/>
+            <a:off x="14338800" y="19375705"/>
+            <a:ext cx="6451200" cy="50400"/>
           </a:xfrm>
           <a:prstGeom prst="rect">
             <a:avLst/>
@@ -8624,7 +6875,7 @@
       </p:sp>
       <p:pic>
         <p:nvPicPr>
-          <p:cNvPr id="163" name="Picture 162" descr="fig_f13_dominance_plane.png"/>
+          <p:cNvPr id="131" name="Picture 130" descr="behaviour.png"/>
           <p:cNvPicPr>
             <a:picLocks noChangeAspect="1"/>
           </p:cNvPicPr>
@@ -8638,8 +6889,8 @@
         </p:blipFill>
         <p:spPr>
           <a:xfrm>
-            <a:off x="14575824" y="20193997"/>
-            <a:ext cx="5977152" cy="4320525"/>
+            <a:off x="14410800" y="19498105"/>
+            <a:ext cx="6307200" cy="2387379"/>
           </a:xfrm>
           <a:prstGeom prst="rect">
             <a:avLst/>
@@ -8648,14 +6899,14 @@
       </p:pic>
       <p:sp>
         <p:nvSpPr>
-          <p:cNvPr id="164" name="TextBox 163"/>
+          <p:cNvPr id="132" name="TextBox 131"/>
           <p:cNvSpPr txBox="1"/>
           <p:nvPr/>
         </p:nvSpPr>
         <p:spPr>
           <a:xfrm>
-            <a:off x="14338800" y="24694521"/>
-            <a:ext cx="6451200" cy="510235"/>
+            <a:off x="14338800" y="22029485"/>
+            <a:ext cx="6451200" cy="279806"/>
           </a:xfrm>
           <a:prstGeom prst="rect">
             <a:avLst/>
@@ -8677,91 +6928,13 @@
               </a:spcAft>
             </a:pPr>
             <a:r>
-              <a:rPr sz="1550" b="0" i="0">
-                <a:solidFill>
-                  <a:srgbClr val="5D6787"/>
-                </a:solidFill>
-                <a:latin typeface="Arial"/>
-              </a:rPr>
-              <a:t>Each policy against always using the cheapest view. A win lands in the shaded region — none does.</a:t>
-            </a:r>
-          </a:p>
-        </p:txBody>
-      </p:sp>
-      <p:sp>
-        <p:nvSpPr>
-          <p:cNvPr id="165" name="TextBox 164"/>
-          <p:cNvSpPr txBox="1"/>
-          <p:nvPr/>
-        </p:nvSpPr>
-        <p:spPr>
-          <a:xfrm>
-            <a:off x="14338800" y="25384756"/>
-            <a:ext cx="6451200" cy="608076"/>
-          </a:xfrm>
-          <a:prstGeom prst="rect">
-            <a:avLst/>
-          </a:prstGeom>
-          <a:noFill/>
-        </p:spPr>
-        <p:txBody>
-          <a:bodyPr wrap="square" lIns="0" rIns="0" tIns="0" bIns="0">
-            <a:spAutoFit/>
-          </a:bodyPr>
-          <a:lstStyle/>
-          <a:p>
-            <a:pPr algn="l">
-              <a:lnSpc>
-                <a:spcPct val="105000"/>
-              </a:lnSpc>
-              <a:spcAft>
-                <a:spcPts val="453"/>
-              </a:spcAft>
-            </a:pPr>
-            <a:r>
-              <a:rPr sz="1900" b="0" i="0">
+              <a:rPr sz="1700" b="1" i="0">
                 <a:solidFill>
                   <a:srgbClr val="12162E"/>
                 </a:solidFill>
                 <a:latin typeface="Arial"/>
               </a:rPr>
-              <a:t>And the target is small: running </a:t>
-            </a:r>
-            <a:r>
-              <a:rPr sz="1900" b="1" i="0">
-                <a:solidFill>
-                  <a:srgbClr val="12162E"/>
-                </a:solidFill>
-                <a:latin typeface="Arial"/>
-              </a:rPr>
-              <a:t>one unchanged view twice</a:t>
-            </a:r>
-            <a:r>
-              <a:rPr sz="1900" b="0" i="0">
-                <a:solidFill>
-                  <a:srgbClr val="12162E"/>
-                </a:solidFill>
-                <a:latin typeface="Arial"/>
-              </a:rPr>
-              <a:t> already flips </a:t>
-            </a:r>
-            <a:r>
-              <a:rPr sz="1900" b="1" i="0">
-                <a:solidFill>
-                  <a:srgbClr val="12162E"/>
-                </a:solidFill>
-                <a:latin typeface="Arial"/>
-              </a:rPr>
-              <a:t>10–14%</a:t>
-            </a:r>
-            <a:r>
-              <a:rPr sz="1900" b="0" i="0">
-                <a:solidFill>
-                  <a:srgbClr val="12162E"/>
-                </a:solidFill>
-                <a:latin typeface="Arial"/>
-              </a:rPr>
-              <a:t> of tasks.</a:t>
+              <a:t>Vision scrolls ~4× more.</a:t>
             </a:r>
           </a:p>
         </p:txBody>
@@ -8774,7 +6947,7 @@
         </p:nvSpPr>
         <p:spPr>
           <a:xfrm>
-            <a:off x="14338800" y="26208832"/>
+            <a:off x="727200" y="22875384"/>
             <a:ext cx="177988" cy="177988"/>
           </a:xfrm>
           <a:prstGeom prst="rect">
@@ -8819,7 +6992,7 @@
         </p:nvSpPr>
         <p:spPr>
           <a:xfrm>
-            <a:off x="14643923" y="26165632"/>
+            <a:off x="1032323" y="22832184"/>
             <a:ext cx="6144827" cy="238912"/>
           </a:xfrm>
           <a:prstGeom prst="rect">
@@ -8845,7 +7018,7 @@
                 </a:solidFill>
                 <a:latin typeface="Consolas"/>
               </a:rPr>
-              <a:t>SO WHAT</a:t>
+              <a:t>4 · AND THEY FAIL DIFFERENTLY</a:t>
             </a:r>
             <a:endParaRPr sz="1412" b="1" spc="180" dirty="0">
               <a:solidFill>
@@ -8864,7 +7037,7 @@
         </p:nvSpPr>
         <p:spPr>
           <a:xfrm>
-            <a:off x="14338800" y="26526668"/>
+            <a:off x="727200" y="23193220"/>
             <a:ext cx="1169636" cy="35597"/>
           </a:xfrm>
           <a:prstGeom prst="rect">
@@ -8909,7 +7082,7 @@
         </p:nvSpPr>
         <p:spPr>
           <a:xfrm>
-            <a:off x="15508436" y="26536839"/>
+            <a:off x="1896836" y="23203391"/>
             <a:ext cx="5281564" cy="15256"/>
           </a:xfrm>
           <a:prstGeom prst="rect">
@@ -8948,14 +7121,128 @@
       </p:sp>
       <p:sp>
         <p:nvSpPr>
-          <p:cNvPr id="166" name="TextBox 165"/>
+          <p:cNvPr id="133" name="Rectangle 132"/>
+          <p:cNvSpPr/>
+          <p:nvPr/>
+        </p:nvSpPr>
+        <p:spPr>
+          <a:xfrm>
+            <a:off x="727200" y="23415384"/>
+            <a:ext cx="6451200" cy="3146936"/>
+          </a:xfrm>
+          <a:prstGeom prst="rect">
+            <a:avLst/>
+          </a:prstGeom>
+          <a:solidFill>
+            <a:srgbClr val="F7F9FD"/>
+          </a:solidFill>
+          <a:ln w="8890">
+            <a:solidFill>
+              <a:srgbClr val="DDE3F2"/>
+            </a:solidFill>
+          </a:ln>
+          <a:effectLst/>
+        </p:spPr>
+        <p:style>
+          <a:lnRef idx="1">
+            <a:schemeClr val="accent1"/>
+          </a:lnRef>
+          <a:fillRef idx="3">
+            <a:schemeClr val="accent1"/>
+          </a:fillRef>
+          <a:effectRef idx="2">
+            <a:schemeClr val="accent1"/>
+          </a:effectRef>
+          <a:fontRef idx="minor">
+            <a:schemeClr val="lt1"/>
+          </a:fontRef>
+        </p:style>
+        <p:txBody>
+          <a:bodyPr rtlCol="0" anchor="ctr" wrap="square"/>
+          <a:lstStyle/>
+          <a:p>
+            <a:pPr algn="ctr"/>
+          </a:p>
+        </p:txBody>
+      </p:sp>
+      <p:sp>
+        <p:nvSpPr>
+          <p:cNvPr id="134" name="Rectangle 133"/>
+          <p:cNvSpPr/>
+          <p:nvPr/>
+        </p:nvSpPr>
+        <p:spPr>
+          <a:xfrm>
+            <a:off x="727200" y="23415384"/>
+            <a:ext cx="6451200" cy="50400"/>
+          </a:xfrm>
+          <a:prstGeom prst="rect">
+            <a:avLst/>
+          </a:prstGeom>
+          <a:solidFill>
+            <a:srgbClr val="5049F9"/>
+          </a:solidFill>
+          <a:ln>
+            <a:noFill/>
+          </a:ln>
+          <a:effectLst/>
+        </p:spPr>
+        <p:style>
+          <a:lnRef idx="1">
+            <a:schemeClr val="accent1"/>
+          </a:lnRef>
+          <a:fillRef idx="3">
+            <a:schemeClr val="accent1"/>
+          </a:fillRef>
+          <a:effectRef idx="2">
+            <a:schemeClr val="accent1"/>
+          </a:effectRef>
+          <a:fontRef idx="minor">
+            <a:schemeClr val="lt1"/>
+          </a:fontRef>
+        </p:style>
+        <p:txBody>
+          <a:bodyPr rtlCol="0" anchor="ctr" wrap="square"/>
+          <a:lstStyle/>
+          <a:p>
+            <a:pPr algn="ctr"/>
+          </a:p>
+        </p:txBody>
+      </p:sp>
+      <p:pic>
+        <p:nvPicPr>
+          <p:cNvPr id="135" name="Picture 134" descr="failure.png"/>
+          <p:cNvPicPr>
+            <a:picLocks noChangeAspect="1"/>
+          </p:cNvPicPr>
+          <p:nvPr/>
+        </p:nvPicPr>
+        <p:blipFill>
+          <a:blip r:embed="rId15"/>
+          <a:stretch>
+            <a:fillRect/>
+          </a:stretch>
+        </p:blipFill>
+        <p:spPr>
+          <a:xfrm>
+            <a:off x="799200" y="23537784"/>
+            <a:ext cx="6307200" cy="2952536"/>
+          </a:xfrm>
+          <a:prstGeom prst="rect">
+            <a:avLst/>
+          </a:prstGeom>
+        </p:spPr>
+      </p:pic>
+      <p:sp>
+        <p:nvSpPr>
+          <p:cNvPr id="136" name="TextBox 135"/>
           <p:cNvSpPr txBox="1"/>
           <p:nvPr/>
         </p:nvSpPr>
         <p:spPr>
           <a:xfrm>
-            <a:off x="14338800" y="26748832"/>
-            <a:ext cx="6451200" cy="1273752"/>
+            <a:off x="727200" y="26634320"/>
+            <a:ext cx="6451200" cy="559612"/>
           </a:xfrm>
           <a:prstGeom prst="rect">
             <a:avLst/>
@@ -8970,53 +7257,706 @@
           <a:p>
             <a:pPr algn="l">
               <a:lnSpc>
-                <a:spcPct val="105000"/>
+                <a:spcPct val="108000"/>
               </a:lnSpc>
               <a:spcAft>
-                <a:spcPts val="453"/>
+                <a:spcPts val="0"/>
               </a:spcAft>
             </a:pPr>
             <a:r>
-              <a:rPr sz="1900" b="0" i="0">
+              <a:rPr sz="1700" b="1" i="0">
                 <a:solidFill>
                   <a:srgbClr val="12162E"/>
                 </a:solidFill>
                 <a:latin typeface="Arial"/>
               </a:rPr>
-              <a:t>The views are worth choosing between — they solve different tasks, move differently and fail differently.</a:t>
-            </a:r>
-          </a:p>
+              <a:t>One side dies of something you can name; the other never arrives.</a:t>
+            </a:r>
+          </a:p>
+        </p:txBody>
+      </p:sp>
+      <p:sp>
+        <p:nvSpPr>
+          <p:cNvPr id="14" name="Rectangle 13"/>
+          <p:cNvSpPr/>
+          <p:nvPr/>
+        </p:nvSpPr>
+        <p:spPr>
+          <a:xfrm>
+            <a:off x="7534800" y="22875384"/>
+            <a:ext cx="177988" cy="177988"/>
+          </a:xfrm>
+          <a:prstGeom prst="rect">
+            <a:avLst/>
+          </a:prstGeom>
+          <a:solidFill>
+            <a:srgbClr val="AB5FCE"/>
+          </a:solidFill>
+          <a:ln>
+            <a:noFill/>
+          </a:ln>
+          <a:effectLst/>
+        </p:spPr>
+        <p:style>
+          <a:lnRef idx="1">
+            <a:schemeClr val="accent1"/>
+          </a:lnRef>
+          <a:fillRef idx="3">
+            <a:schemeClr val="accent1"/>
+          </a:fillRef>
+          <a:effectRef idx="2">
+            <a:schemeClr val="accent1"/>
+          </a:effectRef>
+          <a:fontRef idx="minor">
+            <a:schemeClr val="lt1"/>
+          </a:fontRef>
+        </p:style>
+        <p:txBody>
+          <a:bodyPr rtlCol="0" anchor="ctr"/>
+          <a:lstStyle/>
+          <a:p>
+            <a:pPr algn="ctr"/>
+            <a:endParaRPr/>
+          </a:p>
+        </p:txBody>
+      </p:sp>
+      <p:sp>
+        <p:nvSpPr>
+          <p:cNvPr id="15" name="TextBox 14"/>
+          <p:cNvSpPr txBox="1"/>
+          <p:nvPr/>
+        </p:nvSpPr>
+        <p:spPr>
+          <a:xfrm>
+            <a:off x="7839923" y="22832184"/>
+            <a:ext cx="6144827" cy="238912"/>
+          </a:xfrm>
+          <a:prstGeom prst="rect">
+            <a:avLst/>
+          </a:prstGeom>
+          <a:noFill/>
+        </p:spPr>
+        <p:txBody>
+          <a:bodyPr wrap="square" lIns="0" tIns="0" rIns="0" bIns="0" anchor="t">
+            <a:spAutoFit/>
+          </a:bodyPr>
+          <a:lstStyle/>
           <a:p>
             <a:pPr algn="l">
               <a:lnSpc>
-                <a:spcPct val="105000"/>
+                <a:spcPct val="118000"/>
+              </a:lnSpc>
+            </a:pPr>
+            <a:r>
+              <a:rPr sz="1750" b="1" i="0">
+                <a:solidFill>
+                  <a:srgbClr val="141E41"/>
+                </a:solidFill>
+                <a:latin typeface="Consolas"/>
+              </a:rPr>
+              <a:t>5 · SO CHOOSE PER TASK? NOT SO FAST.</a:t>
+            </a:r>
+            <a:endParaRPr sz="1412" b="1" spc="180" dirty="0">
+              <a:solidFill>
+                <a:srgbClr val="141E41"/>
+              </a:solidFill>
+              <a:latin typeface="Consolas"/>
+            </a:endParaRPr>
+          </a:p>
+        </p:txBody>
+      </p:sp>
+      <p:sp>
+        <p:nvSpPr>
+          <p:cNvPr id="16" name="Rectangle 15"/>
+          <p:cNvSpPr/>
+          <p:nvPr/>
+        </p:nvSpPr>
+        <p:spPr>
+          <a:xfrm>
+            <a:off x="7534800" y="23193220"/>
+            <a:ext cx="1169636" cy="35597"/>
+          </a:xfrm>
+          <a:prstGeom prst="rect">
+            <a:avLst/>
+          </a:prstGeom>
+          <a:solidFill>
+            <a:srgbClr val="141E41"/>
+          </a:solidFill>
+          <a:ln>
+            <a:noFill/>
+          </a:ln>
+          <a:effectLst/>
+        </p:spPr>
+        <p:style>
+          <a:lnRef idx="1">
+            <a:schemeClr val="accent1"/>
+          </a:lnRef>
+          <a:fillRef idx="3">
+            <a:schemeClr val="accent1"/>
+          </a:fillRef>
+          <a:effectRef idx="2">
+            <a:schemeClr val="accent1"/>
+          </a:effectRef>
+          <a:fontRef idx="minor">
+            <a:schemeClr val="lt1"/>
+          </a:fontRef>
+        </p:style>
+        <p:txBody>
+          <a:bodyPr rtlCol="0" anchor="ctr"/>
+          <a:lstStyle/>
+          <a:p>
+            <a:pPr algn="ctr"/>
+            <a:endParaRPr/>
+          </a:p>
+        </p:txBody>
+      </p:sp>
+      <p:sp>
+        <p:nvSpPr>
+          <p:cNvPr id="17" name="Rectangle 16"/>
+          <p:cNvSpPr/>
+          <p:nvPr/>
+        </p:nvSpPr>
+        <p:spPr>
+          <a:xfrm>
+            <a:off x="8704436" y="23203391"/>
+            <a:ext cx="5281564" cy="15256"/>
+          </a:xfrm>
+          <a:prstGeom prst="rect">
+            <a:avLst/>
+          </a:prstGeom>
+          <a:solidFill>
+            <a:srgbClr val="DDE3F2"/>
+          </a:solidFill>
+          <a:ln>
+            <a:noFill/>
+          </a:ln>
+          <a:effectLst/>
+        </p:spPr>
+        <p:style>
+          <a:lnRef idx="1">
+            <a:schemeClr val="accent1"/>
+          </a:lnRef>
+          <a:fillRef idx="3">
+            <a:schemeClr val="accent1"/>
+          </a:fillRef>
+          <a:effectRef idx="2">
+            <a:schemeClr val="accent1"/>
+          </a:effectRef>
+          <a:fontRef idx="minor">
+            <a:schemeClr val="lt1"/>
+          </a:fontRef>
+        </p:style>
+        <p:txBody>
+          <a:bodyPr rtlCol="0" anchor="ctr"/>
+          <a:lstStyle/>
+          <a:p>
+            <a:pPr algn="ctr"/>
+            <a:endParaRPr/>
+          </a:p>
+        </p:txBody>
+      </p:sp>
+      <p:sp>
+        <p:nvSpPr>
+          <p:cNvPr id="137" name="Rectangle 136"/>
+          <p:cNvSpPr/>
+          <p:nvPr/>
+        </p:nvSpPr>
+        <p:spPr>
+          <a:xfrm>
+            <a:off x="7986384" y="23415384"/>
+            <a:ext cx="5548032" cy="4100650"/>
+          </a:xfrm>
+          <a:prstGeom prst="rect">
+            <a:avLst/>
+          </a:prstGeom>
+          <a:solidFill>
+            <a:srgbClr val="F7F9FD"/>
+          </a:solidFill>
+          <a:ln w="8890">
+            <a:solidFill>
+              <a:srgbClr val="DDE3F2"/>
+            </a:solidFill>
+          </a:ln>
+          <a:effectLst/>
+        </p:spPr>
+        <p:style>
+          <a:lnRef idx="1">
+            <a:schemeClr val="accent1"/>
+          </a:lnRef>
+          <a:fillRef idx="3">
+            <a:schemeClr val="accent1"/>
+          </a:fillRef>
+          <a:effectRef idx="2">
+            <a:schemeClr val="accent1"/>
+          </a:effectRef>
+          <a:fontRef idx="minor">
+            <a:schemeClr val="lt1"/>
+          </a:fontRef>
+        </p:style>
+        <p:txBody>
+          <a:bodyPr rtlCol="0" anchor="ctr" wrap="square"/>
+          <a:lstStyle/>
+          <a:p>
+            <a:pPr algn="ctr"/>
+          </a:p>
+        </p:txBody>
+      </p:sp>
+      <p:sp>
+        <p:nvSpPr>
+          <p:cNvPr id="138" name="Rectangle 137"/>
+          <p:cNvSpPr/>
+          <p:nvPr/>
+        </p:nvSpPr>
+        <p:spPr>
+          <a:xfrm>
+            <a:off x="7986384" y="23415384"/>
+            <a:ext cx="5548032" cy="50400"/>
+          </a:xfrm>
+          <a:prstGeom prst="rect">
+            <a:avLst/>
+          </a:prstGeom>
+          <a:solidFill>
+            <a:srgbClr val="5049F9"/>
+          </a:solidFill>
+          <a:ln>
+            <a:noFill/>
+          </a:ln>
+          <a:effectLst/>
+        </p:spPr>
+        <p:style>
+          <a:lnRef idx="1">
+            <a:schemeClr val="accent1"/>
+          </a:lnRef>
+          <a:fillRef idx="3">
+            <a:schemeClr val="accent1"/>
+          </a:fillRef>
+          <a:effectRef idx="2">
+            <a:schemeClr val="accent1"/>
+          </a:effectRef>
+          <a:fontRef idx="minor">
+            <a:schemeClr val="lt1"/>
+          </a:fontRef>
+        </p:style>
+        <p:txBody>
+          <a:bodyPr rtlCol="0" anchor="ctr" wrap="square"/>
+          <a:lstStyle/>
+          <a:p>
+            <a:pPr algn="ctr"/>
+          </a:p>
+        </p:txBody>
+      </p:sp>
+      <p:pic>
+        <p:nvPicPr>
+          <p:cNvPr id="139" name="Picture 138" descr="fig_f13_dominance_plane.png"/>
+          <p:cNvPicPr>
+            <a:picLocks noChangeAspect="1"/>
+          </p:cNvPicPr>
+          <p:nvPr/>
+        </p:nvPicPr>
+        <p:blipFill>
+          <a:blip r:embed="rId16"/>
+          <a:stretch>
+            <a:fillRect/>
+          </a:stretch>
+        </p:blipFill>
+        <p:spPr>
+          <a:xfrm>
+            <a:off x="8058384" y="23537784"/>
+            <a:ext cx="5404032" cy="3906250"/>
+          </a:xfrm>
+          <a:prstGeom prst="rect">
+            <a:avLst/>
+          </a:prstGeom>
+        </p:spPr>
+      </p:pic>
+      <p:sp>
+        <p:nvSpPr>
+          <p:cNvPr id="140" name="TextBox 139"/>
+          <p:cNvSpPr txBox="1"/>
+          <p:nvPr/>
+        </p:nvSpPr>
+        <p:spPr>
+          <a:xfrm>
+            <a:off x="7534800" y="27588034"/>
+            <a:ext cx="6451200" cy="279806"/>
+          </a:xfrm>
+          <a:prstGeom prst="rect">
+            <a:avLst/>
+          </a:prstGeom>
+          <a:noFill/>
+        </p:spPr>
+        <p:txBody>
+          <a:bodyPr wrap="square" lIns="0" rIns="0" tIns="0" bIns="0">
+            <a:spAutoFit/>
+          </a:bodyPr>
+          <a:lstStyle/>
+          <a:p>
+            <a:pPr algn="l">
+              <a:lnSpc>
+                <a:spcPct val="108000"/>
               </a:lnSpc>
               <a:spcAft>
-                <a:spcPts val="453"/>
+                <a:spcPts val="0"/>
               </a:spcAft>
             </a:pPr>
             <a:r>
-              <a:rPr sz="1900" b="1" i="0">
+              <a:rPr sz="1700" b="1" i="0">
                 <a:solidFill>
                   <a:srgbClr val="12162E"/>
                 </a:solidFill>
                 <a:latin typeface="Arial"/>
               </a:rPr>
-              <a:t>Choosing well, in advance, is the part that does not work yet.</a:t>
-            </a:r>
+              <a:t>A win lands in the shaded region. None does.</a:t>
+            </a:r>
+          </a:p>
+        </p:txBody>
+      </p:sp>
+      <p:sp>
+        <p:nvSpPr>
+          <p:cNvPr id="14" name="Rectangle 13"/>
+          <p:cNvSpPr/>
+          <p:nvPr/>
+        </p:nvSpPr>
+        <p:spPr>
+          <a:xfrm>
+            <a:off x="14338800" y="22875384"/>
+            <a:ext cx="177988" cy="177988"/>
+          </a:xfrm>
+          <a:prstGeom prst="rect">
+            <a:avLst/>
+          </a:prstGeom>
+          <a:solidFill>
+            <a:srgbClr val="AB5FCE"/>
+          </a:solidFill>
+          <a:ln>
+            <a:noFill/>
+          </a:ln>
+          <a:effectLst/>
+        </p:spPr>
+        <p:style>
+          <a:lnRef idx="1">
+            <a:schemeClr val="accent1"/>
+          </a:lnRef>
+          <a:fillRef idx="3">
+            <a:schemeClr val="accent1"/>
+          </a:fillRef>
+          <a:effectRef idx="2">
+            <a:schemeClr val="accent1"/>
+          </a:effectRef>
+          <a:fontRef idx="minor">
+            <a:schemeClr val="lt1"/>
+          </a:fontRef>
+        </p:style>
+        <p:txBody>
+          <a:bodyPr rtlCol="0" anchor="ctr"/>
+          <a:lstStyle/>
+          <a:p>
+            <a:pPr algn="ctr"/>
+            <a:endParaRPr/>
+          </a:p>
+        </p:txBody>
+      </p:sp>
+      <p:sp>
+        <p:nvSpPr>
+          <p:cNvPr id="15" name="TextBox 14"/>
+          <p:cNvSpPr txBox="1"/>
+          <p:nvPr/>
+        </p:nvSpPr>
+        <p:spPr>
+          <a:xfrm>
+            <a:off x="14643923" y="22832184"/>
+            <a:ext cx="6144827" cy="238912"/>
+          </a:xfrm>
+          <a:prstGeom prst="rect">
+            <a:avLst/>
+          </a:prstGeom>
+          <a:noFill/>
+        </p:spPr>
+        <p:txBody>
+          <a:bodyPr wrap="square" lIns="0" tIns="0" rIns="0" bIns="0" anchor="t">
+            <a:spAutoFit/>
+          </a:bodyPr>
+          <a:lstStyle/>
+          <a:p>
+            <a:pPr algn="l">
+              <a:lnSpc>
+                <a:spcPct val="118000"/>
+              </a:lnSpc>
+            </a:pPr>
+            <a:r>
+              <a:rPr sz="1750" b="1" i="0">
+                <a:solidFill>
+                  <a:srgbClr val="141E41"/>
+                </a:solidFill>
+                <a:latin typeface="Consolas"/>
+              </a:rPr>
+              <a:t>6 · AND THIS IS WHY</a:t>
+            </a:r>
+            <a:endParaRPr sz="1412" b="1" spc="180" dirty="0">
+              <a:solidFill>
+                <a:srgbClr val="141E41"/>
+              </a:solidFill>
+              <a:latin typeface="Consolas"/>
+            </a:endParaRPr>
+          </a:p>
+        </p:txBody>
+      </p:sp>
+      <p:sp>
+        <p:nvSpPr>
+          <p:cNvPr id="16" name="Rectangle 15"/>
+          <p:cNvSpPr/>
+          <p:nvPr/>
+        </p:nvSpPr>
+        <p:spPr>
+          <a:xfrm>
+            <a:off x="14338800" y="23193220"/>
+            <a:ext cx="1169636" cy="35597"/>
+          </a:xfrm>
+          <a:prstGeom prst="rect">
+            <a:avLst/>
+          </a:prstGeom>
+          <a:solidFill>
+            <a:srgbClr val="141E41"/>
+          </a:solidFill>
+          <a:ln>
+            <a:noFill/>
+          </a:ln>
+          <a:effectLst/>
+        </p:spPr>
+        <p:style>
+          <a:lnRef idx="1">
+            <a:schemeClr val="accent1"/>
+          </a:lnRef>
+          <a:fillRef idx="3">
+            <a:schemeClr val="accent1"/>
+          </a:fillRef>
+          <a:effectRef idx="2">
+            <a:schemeClr val="accent1"/>
+          </a:effectRef>
+          <a:fontRef idx="minor">
+            <a:schemeClr val="lt1"/>
+          </a:fontRef>
+        </p:style>
+        <p:txBody>
+          <a:bodyPr rtlCol="0" anchor="ctr"/>
+          <a:lstStyle/>
+          <a:p>
+            <a:pPr algn="ctr"/>
+            <a:endParaRPr/>
+          </a:p>
+        </p:txBody>
+      </p:sp>
+      <p:sp>
+        <p:nvSpPr>
+          <p:cNvPr id="17" name="Rectangle 16"/>
+          <p:cNvSpPr/>
+          <p:nvPr/>
+        </p:nvSpPr>
+        <p:spPr>
+          <a:xfrm>
+            <a:off x="15508436" y="23203391"/>
+            <a:ext cx="5281564" cy="15256"/>
+          </a:xfrm>
+          <a:prstGeom prst="rect">
+            <a:avLst/>
+          </a:prstGeom>
+          <a:solidFill>
+            <a:srgbClr val="DDE3F2"/>
+          </a:solidFill>
+          <a:ln>
+            <a:noFill/>
+          </a:ln>
+          <a:effectLst/>
+        </p:spPr>
+        <p:style>
+          <a:lnRef idx="1">
+            <a:schemeClr val="accent1"/>
+          </a:lnRef>
+          <a:fillRef idx="3">
+            <a:schemeClr val="accent1"/>
+          </a:fillRef>
+          <a:effectRef idx="2">
+            <a:schemeClr val="accent1"/>
+          </a:effectRef>
+          <a:fontRef idx="minor">
+            <a:schemeClr val="lt1"/>
+          </a:fontRef>
+        </p:style>
+        <p:txBody>
+          <a:bodyPr rtlCol="0" anchor="ctr"/>
+          <a:lstStyle/>
+          <a:p>
+            <a:pPr algn="ctr"/>
+            <a:endParaRPr/>
+          </a:p>
+        </p:txBody>
+      </p:sp>
+      <p:sp>
+        <p:nvSpPr>
+          <p:cNvPr id="141" name="Rectangle 140"/>
+          <p:cNvSpPr/>
+          <p:nvPr/>
+        </p:nvSpPr>
+        <p:spPr>
+          <a:xfrm>
+            <a:off x="14338800" y="23415384"/>
+            <a:ext cx="6451200" cy="3684894"/>
+          </a:xfrm>
+          <a:prstGeom prst="rect">
+            <a:avLst/>
+          </a:prstGeom>
+          <a:solidFill>
+            <a:srgbClr val="F7F9FD"/>
+          </a:solidFill>
+          <a:ln w="8890">
+            <a:solidFill>
+              <a:srgbClr val="DDE3F2"/>
+            </a:solidFill>
+          </a:ln>
+          <a:effectLst/>
+        </p:spPr>
+        <p:style>
+          <a:lnRef idx="1">
+            <a:schemeClr val="accent1"/>
+          </a:lnRef>
+          <a:fillRef idx="3">
+            <a:schemeClr val="accent1"/>
+          </a:fillRef>
+          <a:effectRef idx="2">
+            <a:schemeClr val="accent1"/>
+          </a:effectRef>
+          <a:fontRef idx="minor">
+            <a:schemeClr val="lt1"/>
+          </a:fontRef>
+        </p:style>
+        <p:txBody>
+          <a:bodyPr rtlCol="0" anchor="ctr" wrap="square"/>
+          <a:lstStyle/>
+          <a:p>
+            <a:pPr algn="ctr"/>
+          </a:p>
+        </p:txBody>
+      </p:sp>
+      <p:sp>
+        <p:nvSpPr>
+          <p:cNvPr id="142" name="Rectangle 141"/>
+          <p:cNvSpPr/>
+          <p:nvPr/>
+        </p:nvSpPr>
+        <p:spPr>
+          <a:xfrm>
+            <a:off x="14338800" y="23415384"/>
+            <a:ext cx="6451200" cy="50400"/>
+          </a:xfrm>
+          <a:prstGeom prst="rect">
+            <a:avLst/>
+          </a:prstGeom>
+          <a:solidFill>
+            <a:srgbClr val="5049F9"/>
+          </a:solidFill>
+          <a:ln>
+            <a:noFill/>
+          </a:ln>
+          <a:effectLst/>
+        </p:spPr>
+        <p:style>
+          <a:lnRef idx="1">
+            <a:schemeClr val="accent1"/>
+          </a:lnRef>
+          <a:fillRef idx="3">
+            <a:schemeClr val="accent1"/>
+          </a:fillRef>
+          <a:effectRef idx="2">
+            <a:schemeClr val="accent1"/>
+          </a:effectRef>
+          <a:fontRef idx="minor">
+            <a:schemeClr val="lt1"/>
+          </a:fontRef>
+        </p:style>
+        <p:txBody>
+          <a:bodyPr rtlCol="0" anchor="ctr" wrap="square"/>
+          <a:lstStyle/>
+          <a:p>
+            <a:pPr algn="ctr"/>
           </a:p>
         </p:txBody>
       </p:sp>
       <p:pic>
         <p:nvPicPr>
-          <p:cNvPr id="167" name="Picture 166" descr="qr_repo.png"/>
+          <p:cNvPr id="143" name="Picture 142" descr="poster_label_supply.png"/>
           <p:cNvPicPr>
             <a:picLocks noChangeAspect="1"/>
           </p:cNvPicPr>
           <p:nvPr/>
         </p:nvPicPr>
         <p:blipFill>
-          <a:blip r:embed="rId15"/>
+          <a:blip r:embed="rId17"/>
+          <a:stretch>
+            <a:fillRect/>
+          </a:stretch>
+        </p:blipFill>
+        <p:spPr>
+          <a:xfrm>
+            <a:off x="14410800" y="23537784"/>
+            <a:ext cx="6307200" cy="3490494"/>
+          </a:xfrm>
+          <a:prstGeom prst="rect">
+            <a:avLst/>
+          </a:prstGeom>
+        </p:spPr>
+      </p:pic>
+      <p:sp>
+        <p:nvSpPr>
+          <p:cNvPr id="144" name="TextBox 143"/>
+          <p:cNvSpPr txBox="1"/>
+          <p:nvPr/>
+        </p:nvSpPr>
+        <p:spPr>
+          <a:xfrm>
+            <a:off x="14338800" y="27172278"/>
+            <a:ext cx="6451200" cy="279806"/>
+          </a:xfrm>
+          <a:prstGeom prst="rect">
+            <a:avLst/>
+          </a:prstGeom>
+          <a:noFill/>
+        </p:spPr>
+        <p:txBody>
+          <a:bodyPr wrap="square" lIns="0" rIns="0" tIns="0" bIns="0">
+            <a:spAutoFit/>
+          </a:bodyPr>
+          <a:lstStyle/>
+          <a:p>
+            <a:pPr algn="l">
+              <a:lnSpc>
+                <a:spcPct val="108000"/>
+              </a:lnSpc>
+              <a:spcAft>
+                <a:spcPts val="0"/>
+              </a:spcAft>
+            </a:pPr>
+            <a:r>
+              <a:rPr sz="1700" b="1" i="0">
+                <a:solidFill>
+                  <a:srgbClr val="12162E"/>
+                </a:solidFill>
+                <a:latin typeface="Arial"/>
+              </a:rPr>
+              <a:t>More routing upside, less usable training signal.</a:t>
+            </a:r>
+          </a:p>
+        </p:txBody>
+      </p:sp>
+      <p:pic>
+        <p:nvPicPr>
+          <p:cNvPr id="145" name="Picture 144" descr="qr_repo.png"/>
+          <p:cNvPicPr>
+            <a:picLocks noChangeAspect="1"/>
+          </p:cNvPicPr>
+          <p:nvPr/>
+        </p:nvPicPr>
+        <p:blipFill>
+          <a:blip r:embed="rId18"/>
           <a:stretch>
             <a:fillRect/>
           </a:stretch>

--- a/deliverables/showcase/poster_v9_jiaming_wei.pptx
+++ b/deliverables/showcase/poster_v9_jiaming_wei.pptx
@@ -4197,7 +4197,7 @@
         <p:spPr>
           <a:xfrm>
             <a:off x="727200" y="14020520"/>
-            <a:ext cx="86400" cy="2100034"/>
+            <a:ext cx="86400" cy="2503275"/>
           </a:xfrm>
           <a:prstGeom prst="rect">
             <a:avLst/>
@@ -4455,7 +4455,7 @@
         <p:spPr>
           <a:xfrm>
             <a:off x="2383200" y="14020520"/>
-            <a:ext cx="4484700" cy="1560035"/>
+            <a:ext cx="6027600" cy="1963275"/>
           </a:xfrm>
           <a:prstGeom prst="rect">
             <a:avLst/>
@@ -4471,7 +4471,7 @@
         <p:spPr>
           <a:xfrm>
             <a:off x="2383200" y="14020520"/>
-            <a:ext cx="4484700" cy="1560034"/>
+            <a:ext cx="6027600" cy="1963275"/>
           </a:xfrm>
           <a:prstGeom prst="rect">
             <a:avLst/>
@@ -4514,8 +4514,8 @@
         </p:nvSpPr>
         <p:spPr>
           <a:xfrm>
-            <a:off x="2383200" y="15634554"/>
-            <a:ext cx="4520700" cy="252000"/>
+            <a:off x="2383200" y="16037795"/>
+            <a:ext cx="6063600" cy="252000"/>
           </a:xfrm>
           <a:prstGeom prst="rect">
             <a:avLst/>
@@ -4543,7 +4543,7 @@
                 </a:solidFill>
                 <a:latin typeface="Arial"/>
               </a:rPr>
-              <a:t>step 0 · click</a:t>
+              <a:t>step 2 · click</a:t>
             </a:r>
           </a:p>
         </p:txBody>
@@ -4556,8 +4556,8 @@
         </p:nvSpPr>
         <p:spPr>
           <a:xfrm>
-            <a:off x="2383200" y="15868554"/>
-            <a:ext cx="4520700" cy="252000"/>
+            <a:off x="2383200" y="16271795"/>
+            <a:ext cx="6063600" cy="252000"/>
           </a:xfrm>
           <a:prstGeom prst="rect">
             <a:avLst/>
@@ -4585,7 +4585,7 @@
                 </a:solidFill>
                 <a:latin typeface="Arial"/>
               </a:rPr>
-              <a:t>$0.004 spent</a:t>
+              <a:t>$0.012 spent</a:t>
             </a:r>
           </a:p>
         </p:txBody>
@@ -4606,8 +4606,8 @@
         </p:blipFill>
         <p:spPr>
           <a:xfrm>
-            <a:off x="7011900" y="14020520"/>
-            <a:ext cx="4484700" cy="1560035"/>
+            <a:off x="8554800" y="14020520"/>
+            <a:ext cx="6027600" cy="1963275"/>
           </a:xfrm>
           <a:prstGeom prst="rect">
             <a:avLst/>
@@ -4622,8 +4622,8 @@
         </p:nvSpPr>
         <p:spPr>
           <a:xfrm>
-            <a:off x="7011900" y="14020520"/>
-            <a:ext cx="4484700" cy="1560034"/>
+            <a:off x="8554800" y="14020520"/>
+            <a:ext cx="6027600" cy="1963275"/>
           </a:xfrm>
           <a:prstGeom prst="rect">
             <a:avLst/>
@@ -4666,8 +4666,8 @@
         </p:nvSpPr>
         <p:spPr>
           <a:xfrm>
-            <a:off x="7011900" y="15634554"/>
-            <a:ext cx="4520700" cy="252000"/>
+            <a:off x="8554800" y="16037795"/>
+            <a:ext cx="6063600" cy="252000"/>
           </a:xfrm>
           <a:prstGeom prst="rect">
             <a:avLst/>
@@ -4695,7 +4695,7 @@
                 </a:solidFill>
                 <a:latin typeface="Arial"/>
               </a:rPr>
-              <a:t>step 2 · click</a:t>
+              <a:t>step 5 · type</a:t>
             </a:r>
           </a:p>
         </p:txBody>
@@ -4708,8 +4708,8 @@
         </p:nvSpPr>
         <p:spPr>
           <a:xfrm>
-            <a:off x="7011900" y="15868554"/>
-            <a:ext cx="4520700" cy="252000"/>
+            <a:off x="8554800" y="16271795"/>
+            <a:ext cx="6063600" cy="252000"/>
           </a:xfrm>
           <a:prstGeom prst="rect">
             <a:avLst/>
@@ -4737,7 +4737,7 @@
                 </a:solidFill>
                 <a:latin typeface="Arial"/>
               </a:rPr>
-              <a:t>$0.012 spent</a:t>
+              <a:t>$0.024 spent</a:t>
             </a:r>
           </a:p>
         </p:txBody>
@@ -4758,8 +4758,8 @@
         </p:blipFill>
         <p:spPr>
           <a:xfrm>
-            <a:off x="11640600" y="14020520"/>
-            <a:ext cx="4484700" cy="1560035"/>
+            <a:off x="14726400" y="14020520"/>
+            <a:ext cx="6027600" cy="1963275"/>
           </a:xfrm>
           <a:prstGeom prst="rect">
             <a:avLst/>
@@ -4774,8 +4774,8 @@
         </p:nvSpPr>
         <p:spPr>
           <a:xfrm>
-            <a:off x="11640600" y="14020520"/>
-            <a:ext cx="4484700" cy="1560034"/>
+            <a:off x="14726400" y="14020520"/>
+            <a:ext cx="6027600" cy="1963275"/>
           </a:xfrm>
           <a:prstGeom prst="rect">
             <a:avLst/>
@@ -4818,8 +4818,8 @@
         </p:nvSpPr>
         <p:spPr>
           <a:xfrm>
-            <a:off x="11640600" y="15634554"/>
-            <a:ext cx="4520700" cy="252000"/>
+            <a:off x="14726400" y="16037795"/>
+            <a:ext cx="6063600" cy="252000"/>
           </a:xfrm>
           <a:prstGeom prst="rect">
             <a:avLst/>
@@ -4847,7 +4847,7 @@
                 </a:solidFill>
                 <a:latin typeface="Arial"/>
               </a:rPr>
-              <a:t>step 5 · type</a:t>
+              <a:t>step 11 · finish</a:t>
             </a:r>
           </a:p>
         </p:txBody>
@@ -4860,8 +4860,8 @@
         </p:nvSpPr>
         <p:spPr>
           <a:xfrm>
-            <a:off x="11640600" y="15868554"/>
-            <a:ext cx="4520700" cy="252000"/>
+            <a:off x="14726400" y="16271795"/>
+            <a:ext cx="6063600" cy="252000"/>
           </a:xfrm>
           <a:prstGeom prst="rect">
             <a:avLst/>
@@ -4889,54 +4889,30 @@
                 </a:solidFill>
                 <a:latin typeface="Arial"/>
               </a:rPr>
-              <a:t>$0.024 spent</a:t>
-            </a:r>
-          </a:p>
-        </p:txBody>
-      </p:sp>
-      <p:pic>
-        <p:nvPicPr>
-          <p:cNvPr id="96" name="Picture 95" descr="lane_read_3.png"/>
-          <p:cNvPicPr>
-            <a:picLocks noChangeAspect="1"/>
-          </p:cNvPicPr>
-          <p:nvPr/>
-        </p:nvPicPr>
-        <p:blipFill>
-          <a:blip r:embed="rId9"/>
-          <a:stretch>
-            <a:fillRect/>
-          </a:stretch>
-        </p:blipFill>
-        <p:spPr>
-          <a:xfrm>
-            <a:off x="16269300" y="14020520"/>
-            <a:ext cx="4484700" cy="1560035"/>
-          </a:xfrm>
-          <a:prstGeom prst="rect">
-            <a:avLst/>
-          </a:prstGeom>
-        </p:spPr>
-      </p:pic>
-      <p:sp>
-        <p:nvSpPr>
-          <p:cNvPr id="97" name="Rectangle 96"/>
+              <a:t>$0.090 spent</a:t>
+            </a:r>
+          </a:p>
+        </p:txBody>
+      </p:sp>
+      <p:sp>
+        <p:nvSpPr>
+          <p:cNvPr id="96" name="Rectangle 95"/>
           <p:cNvSpPr/>
           <p:nvPr/>
         </p:nvSpPr>
         <p:spPr>
           <a:xfrm>
-            <a:off x="16269300" y="14020520"/>
-            <a:ext cx="4484700" cy="1560034"/>
-          </a:xfrm>
-          <a:prstGeom prst="rect">
-            <a:avLst/>
-          </a:prstGeom>
-          <a:noFill/>
-          <a:ln w="8890">
-            <a:solidFill>
-              <a:srgbClr val="C9CFE0"/>
-            </a:solidFill>
+            <a:off x="727200" y="16559795"/>
+            <a:ext cx="86400" cy="2503275"/>
+          </a:xfrm>
+          <a:prstGeom prst="rect">
+            <a:avLst/>
+          </a:prstGeom>
+          <a:solidFill>
+            <a:srgbClr val="1F5FD6"/>
+          </a:solidFill>
+          <a:ln>
+            <a:noFill/>
           </a:ln>
           <a:effectLst/>
         </p:spPr>
@@ -4964,14 +4940,14 @@
       </p:sp>
       <p:sp>
         <p:nvSpPr>
-          <p:cNvPr id="98" name="TextBox 97"/>
+          <p:cNvPr id="97" name="TextBox 96"/>
           <p:cNvSpPr txBox="1"/>
           <p:nvPr/>
         </p:nvSpPr>
         <p:spPr>
           <a:xfrm>
-            <a:off x="16269300" y="15634554"/>
-            <a:ext cx="4520700" cy="252000"/>
+            <a:off x="907200" y="16595795"/>
+            <a:ext cx="1440000" cy="360000"/>
           </a:xfrm>
           <a:prstGeom prst="rect">
             <a:avLst/>
@@ -4993,13 +4969,55 @@
               </a:spcAft>
             </a:pPr>
             <a:r>
-              <a:rPr sz="1550" b="1" i="0">
+              <a:rPr sz="2400" b="1" i="0">
                 <a:solidFill>
-                  <a:srgbClr val="141E41"/>
+                  <a:srgbClr val="1F5FD6"/>
+                </a:solidFill>
+                <a:latin typeface="Consolas"/>
+              </a:rPr>
+              <a:t>LOOK</a:t>
+            </a:r>
+          </a:p>
+        </p:txBody>
+      </p:sp>
+      <p:sp>
+        <p:nvSpPr>
+          <p:cNvPr id="98" name="TextBox 97"/>
+          <p:cNvSpPr txBox="1"/>
+          <p:nvPr/>
+        </p:nvSpPr>
+        <p:spPr>
+          <a:xfrm>
+            <a:off x="907200" y="16991795"/>
+            <a:ext cx="1440000" cy="504000"/>
+          </a:xfrm>
+          <a:prstGeom prst="rect">
+            <a:avLst/>
+          </a:prstGeom>
+          <a:noFill/>
+        </p:spPr>
+        <p:txBody>
+          <a:bodyPr wrap="square" lIns="0" rIns="0" tIns="0" bIns="0">
+            <a:spAutoFit/>
+          </a:bodyPr>
+          <a:lstStyle/>
+          <a:p>
+            <a:pPr algn="l">
+              <a:lnSpc>
+                <a:spcPct val="108000"/>
+              </a:lnSpc>
+              <a:spcAft>
+                <a:spcPts val="0"/>
+              </a:spcAft>
+            </a:pPr>
+            <a:r>
+              <a:rPr sz="1550" b="0" i="0">
+                <a:solidFill>
+                  <a:srgbClr val="5D6787"/>
                 </a:solidFill>
                 <a:latin typeface="Arial"/>
               </a:rPr>
-              <a:t>step 11 · finish</a:t>
+              <a:t>screenshot only</a:t>
             </a:r>
           </a:p>
         </p:txBody>
@@ -5012,8 +5030,88 @@
         </p:nvSpPr>
         <p:spPr>
           <a:xfrm>
-            <a:off x="16269300" y="15868554"/>
-            <a:ext cx="4520700" cy="252000"/>
+            <a:off x="907200" y="17567795"/>
+            <a:ext cx="1440000" cy="648000"/>
+          </a:xfrm>
+          <a:prstGeom prst="rect">
+            <a:avLst/>
+          </a:prstGeom>
+          <a:noFill/>
+        </p:spPr>
+        <p:txBody>
+          <a:bodyPr wrap="square" lIns="0" rIns="0" tIns="0" bIns="0">
+            <a:spAutoFit/>
+          </a:bodyPr>
+          <a:lstStyle/>
+          <a:p>
+            <a:pPr algn="l">
+              <a:lnSpc>
+                <a:spcPct val="110000"/>
+              </a:lnSpc>
+              <a:spcAft>
+                <a:spcPts val="0"/>
+              </a:spcAft>
+            </a:pPr>
+            <a:r>
+              <a:rPr sz="1550" b="1" i="0">
+                <a:solidFill>
+                  <a:srgbClr val="C2352B"/>
+                </a:solidFill>
+                <a:latin typeface="Arial"/>
+              </a:rPr>
+              <a:t>26 steps</a:t>
+            </a:r>
+          </a:p>
+          <a:p>
+            <a:pPr algn="l">
+              <a:lnSpc>
+                <a:spcPct val="110000"/>
+              </a:lnSpc>
+              <a:spcAft>
+                <a:spcPts val="0"/>
+              </a:spcAft>
+            </a:pPr>
+            <a:r>
+              <a:rPr sz="1550" b="1" i="0">
+                <a:solidFill>
+                  <a:srgbClr val="C2352B"/>
+                </a:solidFill>
+                <a:latin typeface="Arial"/>
+              </a:rPr>
+              <a:t>9 pages seen</a:t>
+            </a:r>
+          </a:p>
+          <a:p>
+            <a:pPr algn="l">
+              <a:lnSpc>
+                <a:spcPct val="110000"/>
+              </a:lnSpc>
+              <a:spcAft>
+                <a:spcPts val="0"/>
+              </a:spcAft>
+            </a:pPr>
+            <a:r>
+              <a:rPr sz="1550" b="1" i="0">
+                <a:solidFill>
+                  <a:srgbClr val="C2352B"/>
+                </a:solidFill>
+                <a:latin typeface="Arial"/>
+              </a:rPr>
+              <a:t>$0.10</a:t>
+            </a:r>
+          </a:p>
+        </p:txBody>
+      </p:sp>
+      <p:sp>
+        <p:nvSpPr>
+          <p:cNvPr id="100" name="TextBox 99"/>
+          <p:cNvSpPr txBox="1"/>
+          <p:nvPr/>
+        </p:nvSpPr>
+        <p:spPr>
+          <a:xfrm>
+            <a:off x="907200" y="18251795"/>
+            <a:ext cx="1440000" cy="360000"/>
           </a:xfrm>
           <a:prstGeom prst="rect">
             <a:avLst/>
@@ -5035,36 +5133,60 @@
               </a:spcAft>
             </a:pPr>
             <a:r>
-              <a:rPr sz="1400" b="0" i="0">
+              <a:rPr sz="2000" b="1" i="0">
                 <a:solidFill>
-                  <a:srgbClr val="5D6787"/>
+                  <a:srgbClr val="C2352B"/>
                 </a:solidFill>
                 <a:latin typeface="Arial"/>
               </a:rPr>
-              <a:t>$0.090 spent</a:t>
-            </a:r>
-          </a:p>
-        </p:txBody>
-      </p:sp>
-      <p:sp>
-        <p:nvSpPr>
-          <p:cNvPr id="100" name="Rectangle 99"/>
+              <a:t>gave up</a:t>
+            </a:r>
+          </a:p>
+        </p:txBody>
+      </p:sp>
+      <p:pic>
+        <p:nvPicPr>
+          <p:cNvPr id="101" name="Picture 100" descr="lane_look_0.png"/>
+          <p:cNvPicPr>
+            <a:picLocks noChangeAspect="1"/>
+          </p:cNvPicPr>
+          <p:nvPr/>
+        </p:nvPicPr>
+        <p:blipFill>
+          <a:blip r:embed="rId9"/>
+          <a:stretch>
+            <a:fillRect/>
+          </a:stretch>
+        </p:blipFill>
+        <p:spPr>
+          <a:xfrm>
+            <a:off x="2383200" y="16559795"/>
+            <a:ext cx="6027600" cy="1963275"/>
+          </a:xfrm>
+          <a:prstGeom prst="rect">
+            <a:avLst/>
+          </a:prstGeom>
+        </p:spPr>
+      </p:pic>
+      <p:sp>
+        <p:nvSpPr>
+          <p:cNvPr id="102" name="Rectangle 101"/>
           <p:cNvSpPr/>
           <p:nvPr/>
         </p:nvSpPr>
         <p:spPr>
           <a:xfrm>
-            <a:off x="727200" y="16228554"/>
-            <a:ext cx="86400" cy="2100034"/>
-          </a:xfrm>
-          <a:prstGeom prst="rect">
-            <a:avLst/>
-          </a:prstGeom>
-          <a:solidFill>
-            <a:srgbClr val="1F5FD6"/>
-          </a:solidFill>
-          <a:ln>
-            <a:noFill/>
+            <a:off x="2383200" y="16559795"/>
+            <a:ext cx="6027600" cy="1963275"/>
+          </a:xfrm>
+          <a:prstGeom prst="rect">
+            <a:avLst/>
+          </a:prstGeom>
+          <a:noFill/>
+          <a:ln w="8890">
+            <a:solidFill>
+              <a:srgbClr val="C9CFE0"/>
+            </a:solidFill>
           </a:ln>
           <a:effectLst/>
         </p:spPr>
@@ -5092,14 +5214,14 @@
       </p:sp>
       <p:sp>
         <p:nvSpPr>
-          <p:cNvPr id="101" name="TextBox 100"/>
+          <p:cNvPr id="103" name="TextBox 102"/>
           <p:cNvSpPr txBox="1"/>
           <p:nvPr/>
         </p:nvSpPr>
         <p:spPr>
           <a:xfrm>
-            <a:off x="907200" y="16264554"/>
-            <a:ext cx="1440000" cy="360000"/>
+            <a:off x="2383200" y="18577070"/>
+            <a:ext cx="6063600" cy="252000"/>
           </a:xfrm>
           <a:prstGeom prst="rect">
             <a:avLst/>
@@ -5121,27 +5243,382 @@
               </a:spcAft>
             </a:pPr>
             <a:r>
-              <a:rPr sz="2400" b="1" i="0">
+              <a:rPr sz="1550" b="1" i="0">
                 <a:solidFill>
-                  <a:srgbClr val="1F5FD6"/>
+                  <a:srgbClr val="141E41"/>
                 </a:solidFill>
-                <a:latin typeface="Consolas"/>
+                <a:latin typeface="Arial"/>
               </a:rPr>
-              <a:t>LOOK</a:t>
-            </a:r>
-          </a:p>
-        </p:txBody>
-      </p:sp>
-      <p:sp>
-        <p:nvSpPr>
-          <p:cNvPr id="102" name="TextBox 101"/>
+              <a:t>step 3 · click</a:t>
+            </a:r>
+          </a:p>
+        </p:txBody>
+      </p:sp>
+      <p:sp>
+        <p:nvSpPr>
+          <p:cNvPr id="104" name="TextBox 103"/>
           <p:cNvSpPr txBox="1"/>
           <p:nvPr/>
         </p:nvSpPr>
         <p:spPr>
           <a:xfrm>
-            <a:off x="907200" y="16660554"/>
-            <a:ext cx="1440000" cy="504000"/>
+            <a:off x="2383200" y="18811070"/>
+            <a:ext cx="6063600" cy="252000"/>
+          </a:xfrm>
+          <a:prstGeom prst="rect">
+            <a:avLst/>
+          </a:prstGeom>
+          <a:noFill/>
+        </p:spPr>
+        <p:txBody>
+          <a:bodyPr wrap="square" lIns="0" rIns="0" tIns="0" bIns="0">
+            <a:spAutoFit/>
+          </a:bodyPr>
+          <a:lstStyle/>
+          <a:p>
+            <a:pPr algn="l">
+              <a:lnSpc>
+                <a:spcPct val="102000"/>
+              </a:lnSpc>
+              <a:spcAft>
+                <a:spcPts val="0"/>
+              </a:spcAft>
+            </a:pPr>
+            <a:r>
+              <a:rPr sz="1400" b="0" i="0">
+                <a:solidFill>
+                  <a:srgbClr val="5D6787"/>
+                </a:solidFill>
+                <a:latin typeface="Arial"/>
+              </a:rPr>
+              <a:t>$0.015 spent</a:t>
+            </a:r>
+          </a:p>
+        </p:txBody>
+      </p:sp>
+      <p:pic>
+        <p:nvPicPr>
+          <p:cNvPr id="105" name="Picture 104" descr="lane_look_1.png"/>
+          <p:cNvPicPr>
+            <a:picLocks noChangeAspect="1"/>
+          </p:cNvPicPr>
+          <p:nvPr/>
+        </p:nvPicPr>
+        <p:blipFill>
+          <a:blip r:embed="rId10"/>
+          <a:stretch>
+            <a:fillRect/>
+          </a:stretch>
+        </p:blipFill>
+        <p:spPr>
+          <a:xfrm>
+            <a:off x="8554800" y="16559795"/>
+            <a:ext cx="6027600" cy="1963275"/>
+          </a:xfrm>
+          <a:prstGeom prst="rect">
+            <a:avLst/>
+          </a:prstGeom>
+        </p:spPr>
+      </p:pic>
+      <p:sp>
+        <p:nvSpPr>
+          <p:cNvPr id="106" name="Rectangle 105"/>
+          <p:cNvSpPr/>
+          <p:nvPr/>
+        </p:nvSpPr>
+        <p:spPr>
+          <a:xfrm>
+            <a:off x="8554800" y="16559795"/>
+            <a:ext cx="6027600" cy="1963275"/>
+          </a:xfrm>
+          <a:prstGeom prst="rect">
+            <a:avLst/>
+          </a:prstGeom>
+          <a:noFill/>
+          <a:ln w="8890">
+            <a:solidFill>
+              <a:srgbClr val="C9CFE0"/>
+            </a:solidFill>
+          </a:ln>
+          <a:effectLst/>
+        </p:spPr>
+        <p:style>
+          <a:lnRef idx="1">
+            <a:schemeClr val="accent1"/>
+          </a:lnRef>
+          <a:fillRef idx="3">
+            <a:schemeClr val="accent1"/>
+          </a:fillRef>
+          <a:effectRef idx="2">
+            <a:schemeClr val="accent1"/>
+          </a:effectRef>
+          <a:fontRef idx="minor">
+            <a:schemeClr val="lt1"/>
+          </a:fontRef>
+        </p:style>
+        <p:txBody>
+          <a:bodyPr rtlCol="0" anchor="ctr" wrap="square"/>
+          <a:lstStyle/>
+          <a:p>
+            <a:pPr algn="ctr"/>
+          </a:p>
+        </p:txBody>
+      </p:sp>
+      <p:sp>
+        <p:nvSpPr>
+          <p:cNvPr id="107" name="TextBox 106"/>
+          <p:cNvSpPr txBox="1"/>
+          <p:nvPr/>
+        </p:nvSpPr>
+        <p:spPr>
+          <a:xfrm>
+            <a:off x="8554800" y="18577070"/>
+            <a:ext cx="6063600" cy="252000"/>
+          </a:xfrm>
+          <a:prstGeom prst="rect">
+            <a:avLst/>
+          </a:prstGeom>
+          <a:noFill/>
+        </p:spPr>
+        <p:txBody>
+          <a:bodyPr wrap="square" lIns="0" rIns="0" tIns="0" bIns="0">
+            <a:spAutoFit/>
+          </a:bodyPr>
+          <a:lstStyle/>
+          <a:p>
+            <a:pPr algn="l">
+              <a:lnSpc>
+                <a:spcPct val="102000"/>
+              </a:lnSpc>
+              <a:spcAft>
+                <a:spcPts val="0"/>
+              </a:spcAft>
+            </a:pPr>
+            <a:r>
+              <a:rPr sz="1550" b="1" i="0">
+                <a:solidFill>
+                  <a:srgbClr val="141E41"/>
+                </a:solidFill>
+                <a:latin typeface="Arial"/>
+              </a:rPr>
+              <a:t>step 18 · scroll</a:t>
+            </a:r>
+          </a:p>
+        </p:txBody>
+      </p:sp>
+      <p:sp>
+        <p:nvSpPr>
+          <p:cNvPr id="108" name="TextBox 107"/>
+          <p:cNvSpPr txBox="1"/>
+          <p:nvPr/>
+        </p:nvSpPr>
+        <p:spPr>
+          <a:xfrm>
+            <a:off x="8554800" y="18811070"/>
+            <a:ext cx="6063600" cy="252000"/>
+          </a:xfrm>
+          <a:prstGeom prst="rect">
+            <a:avLst/>
+          </a:prstGeom>
+          <a:noFill/>
+        </p:spPr>
+        <p:txBody>
+          <a:bodyPr wrap="square" lIns="0" rIns="0" tIns="0" bIns="0">
+            <a:spAutoFit/>
+          </a:bodyPr>
+          <a:lstStyle/>
+          <a:p>
+            <a:pPr algn="l">
+              <a:lnSpc>
+                <a:spcPct val="102000"/>
+              </a:lnSpc>
+              <a:spcAft>
+                <a:spcPts val="0"/>
+              </a:spcAft>
+            </a:pPr>
+            <a:r>
+              <a:rPr sz="1400" b="0" i="0">
+                <a:solidFill>
+                  <a:srgbClr val="5D6787"/>
+                </a:solidFill>
+                <a:latin typeface="Arial"/>
+              </a:rPr>
+              <a:t>$0.075 spent</a:t>
+            </a:r>
+          </a:p>
+        </p:txBody>
+      </p:sp>
+      <p:pic>
+        <p:nvPicPr>
+          <p:cNvPr id="109" name="Picture 108" descr="lane_look_0.png"/>
+          <p:cNvPicPr>
+            <a:picLocks noChangeAspect="1"/>
+          </p:cNvPicPr>
+          <p:nvPr/>
+        </p:nvPicPr>
+        <p:blipFill>
+          <a:blip r:embed="rId9"/>
+          <a:stretch>
+            <a:fillRect/>
+          </a:stretch>
+        </p:blipFill>
+        <p:spPr>
+          <a:xfrm>
+            <a:off x="14726400" y="16559795"/>
+            <a:ext cx="6027600" cy="1963275"/>
+          </a:xfrm>
+          <a:prstGeom prst="rect">
+            <a:avLst/>
+          </a:prstGeom>
+        </p:spPr>
+      </p:pic>
+      <p:sp>
+        <p:nvSpPr>
+          <p:cNvPr id="110" name="Rectangle 109"/>
+          <p:cNvSpPr/>
+          <p:nvPr/>
+        </p:nvSpPr>
+        <p:spPr>
+          <a:xfrm>
+            <a:off x="14726400" y="16559795"/>
+            <a:ext cx="6027600" cy="1963275"/>
+          </a:xfrm>
+          <a:prstGeom prst="rect">
+            <a:avLst/>
+          </a:prstGeom>
+          <a:noFill/>
+          <a:ln w="8890">
+            <a:solidFill>
+              <a:srgbClr val="C9CFE0"/>
+            </a:solidFill>
+          </a:ln>
+          <a:effectLst/>
+        </p:spPr>
+        <p:style>
+          <a:lnRef idx="1">
+            <a:schemeClr val="accent1"/>
+          </a:lnRef>
+          <a:fillRef idx="3">
+            <a:schemeClr val="accent1"/>
+          </a:fillRef>
+          <a:effectRef idx="2">
+            <a:schemeClr val="accent1"/>
+          </a:effectRef>
+          <a:fontRef idx="minor">
+            <a:schemeClr val="lt1"/>
+          </a:fontRef>
+        </p:style>
+        <p:txBody>
+          <a:bodyPr rtlCol="0" anchor="ctr" wrap="square"/>
+          <a:lstStyle/>
+          <a:p>
+            <a:pPr algn="ctr"/>
+          </a:p>
+        </p:txBody>
+      </p:sp>
+      <p:sp>
+        <p:nvSpPr>
+          <p:cNvPr id="111" name="TextBox 110"/>
+          <p:cNvSpPr txBox="1"/>
+          <p:nvPr/>
+        </p:nvSpPr>
+        <p:spPr>
+          <a:xfrm>
+            <a:off x="14726400" y="18577070"/>
+            <a:ext cx="6063600" cy="252000"/>
+          </a:xfrm>
+          <a:prstGeom prst="rect">
+            <a:avLst/>
+          </a:prstGeom>
+          <a:noFill/>
+        </p:spPr>
+        <p:txBody>
+          <a:bodyPr wrap="square" lIns="0" rIns="0" tIns="0" bIns="0">
+            <a:spAutoFit/>
+          </a:bodyPr>
+          <a:lstStyle/>
+          <a:p>
+            <a:pPr algn="l">
+              <a:lnSpc>
+                <a:spcPct val="102000"/>
+              </a:lnSpc>
+              <a:spcAft>
+                <a:spcPts val="0"/>
+              </a:spcAft>
+            </a:pPr>
+            <a:r>
+              <a:rPr sz="1550" b="1" i="0">
+                <a:solidFill>
+                  <a:srgbClr val="141E41"/>
+                </a:solidFill>
+                <a:latin typeface="Arial"/>
+              </a:rPr>
+              <a:t>step 20 · scroll</a:t>
+            </a:r>
+          </a:p>
+        </p:txBody>
+      </p:sp>
+      <p:sp>
+        <p:nvSpPr>
+          <p:cNvPr id="112" name="TextBox 111"/>
+          <p:cNvSpPr txBox="1"/>
+          <p:nvPr/>
+        </p:nvSpPr>
+        <p:spPr>
+          <a:xfrm>
+            <a:off x="14726400" y="18811070"/>
+            <a:ext cx="6063600" cy="252000"/>
+          </a:xfrm>
+          <a:prstGeom prst="rect">
+            <a:avLst/>
+          </a:prstGeom>
+          <a:noFill/>
+        </p:spPr>
+        <p:txBody>
+          <a:bodyPr wrap="square" lIns="0" rIns="0" tIns="0" bIns="0">
+            <a:spAutoFit/>
+          </a:bodyPr>
+          <a:lstStyle/>
+          <a:p>
+            <a:pPr algn="l">
+              <a:lnSpc>
+                <a:spcPct val="102000"/>
+              </a:lnSpc>
+              <a:spcAft>
+                <a:spcPts val="0"/>
+              </a:spcAft>
+            </a:pPr>
+            <a:r>
+              <a:rPr sz="1400" b="0" i="0">
+                <a:solidFill>
+                  <a:srgbClr val="C2352B"/>
+                </a:solidFill>
+                <a:latin typeface="Arial"/>
+              </a:rPr>
+              <a:t>$0.083 · </a:t>
+            </a:r>
+            <a:r>
+              <a:rPr sz="1400" b="1" i="0">
+                <a:solidFill>
+                  <a:srgbClr val="C2352B"/>
+                </a:solidFill>
+                <a:latin typeface="Arial"/>
+              </a:rPr>
+              <a:t>the first frame again</a:t>
+            </a:r>
+          </a:p>
+        </p:txBody>
+      </p:sp>
+      <p:sp>
+        <p:nvSpPr>
+          <p:cNvPr id="113" name="TextBox 112"/>
+          <p:cNvSpPr txBox="1"/>
+          <p:nvPr/>
+        </p:nvSpPr>
+        <p:spPr>
+          <a:xfrm>
+            <a:off x="727200" y="19027070"/>
+            <a:ext cx="20062800" cy="255117"/>
           </a:xfrm>
           <a:prstGeom prst="rect">
             <a:avLst/>
@@ -5163,796 +5640,6 @@
               </a:spcAft>
             </a:pPr>
             <a:r>
-              <a:rPr sz="1550" b="0" i="0">
-                <a:solidFill>
-                  <a:srgbClr val="5D6787"/>
-                </a:solidFill>
-                <a:latin typeface="Arial"/>
-              </a:rPr>
-              <a:t>screenshot only</a:t>
-            </a:r>
-          </a:p>
-        </p:txBody>
-      </p:sp>
-      <p:sp>
-        <p:nvSpPr>
-          <p:cNvPr id="103" name="TextBox 102"/>
-          <p:cNvSpPr txBox="1"/>
-          <p:nvPr/>
-        </p:nvSpPr>
-        <p:spPr>
-          <a:xfrm>
-            <a:off x="907200" y="17236554"/>
-            <a:ext cx="1440000" cy="648000"/>
-          </a:xfrm>
-          <a:prstGeom prst="rect">
-            <a:avLst/>
-          </a:prstGeom>
-          <a:noFill/>
-        </p:spPr>
-        <p:txBody>
-          <a:bodyPr wrap="square" lIns="0" rIns="0" tIns="0" bIns="0">
-            <a:spAutoFit/>
-          </a:bodyPr>
-          <a:lstStyle/>
-          <a:p>
-            <a:pPr algn="l">
-              <a:lnSpc>
-                <a:spcPct val="110000"/>
-              </a:lnSpc>
-              <a:spcAft>
-                <a:spcPts val="0"/>
-              </a:spcAft>
-            </a:pPr>
-            <a:r>
-              <a:rPr sz="1550" b="1" i="0">
-                <a:solidFill>
-                  <a:srgbClr val="C2352B"/>
-                </a:solidFill>
-                <a:latin typeface="Arial"/>
-              </a:rPr>
-              <a:t>26 steps</a:t>
-            </a:r>
-          </a:p>
-          <a:p>
-            <a:pPr algn="l">
-              <a:lnSpc>
-                <a:spcPct val="110000"/>
-              </a:lnSpc>
-              <a:spcAft>
-                <a:spcPts val="0"/>
-              </a:spcAft>
-            </a:pPr>
-            <a:r>
-              <a:rPr sz="1550" b="1" i="0">
-                <a:solidFill>
-                  <a:srgbClr val="C2352B"/>
-                </a:solidFill>
-                <a:latin typeface="Arial"/>
-              </a:rPr>
-              <a:t>9 pages seen</a:t>
-            </a:r>
-          </a:p>
-          <a:p>
-            <a:pPr algn="l">
-              <a:lnSpc>
-                <a:spcPct val="110000"/>
-              </a:lnSpc>
-              <a:spcAft>
-                <a:spcPts val="0"/>
-              </a:spcAft>
-            </a:pPr>
-            <a:r>
-              <a:rPr sz="1550" b="1" i="0">
-                <a:solidFill>
-                  <a:srgbClr val="C2352B"/>
-                </a:solidFill>
-                <a:latin typeface="Arial"/>
-              </a:rPr>
-              <a:t>$0.10</a:t>
-            </a:r>
-          </a:p>
-        </p:txBody>
-      </p:sp>
-      <p:sp>
-        <p:nvSpPr>
-          <p:cNvPr id="104" name="TextBox 103"/>
-          <p:cNvSpPr txBox="1"/>
-          <p:nvPr/>
-        </p:nvSpPr>
-        <p:spPr>
-          <a:xfrm>
-            <a:off x="907200" y="17920554"/>
-            <a:ext cx="1440000" cy="360000"/>
-          </a:xfrm>
-          <a:prstGeom prst="rect">
-            <a:avLst/>
-          </a:prstGeom>
-          <a:noFill/>
-        </p:spPr>
-        <p:txBody>
-          <a:bodyPr wrap="square" lIns="0" rIns="0" tIns="0" bIns="0">
-            <a:spAutoFit/>
-          </a:bodyPr>
-          <a:lstStyle/>
-          <a:p>
-            <a:pPr algn="l">
-              <a:lnSpc>
-                <a:spcPct val="102000"/>
-              </a:lnSpc>
-              <a:spcAft>
-                <a:spcPts val="0"/>
-              </a:spcAft>
-            </a:pPr>
-            <a:r>
-              <a:rPr sz="2000" b="1" i="0">
-                <a:solidFill>
-                  <a:srgbClr val="C2352B"/>
-                </a:solidFill>
-                <a:latin typeface="Arial"/>
-              </a:rPr>
-              <a:t>gave up</a:t>
-            </a:r>
-          </a:p>
-        </p:txBody>
-      </p:sp>
-      <p:pic>
-        <p:nvPicPr>
-          <p:cNvPr id="105" name="Picture 104" descr="lane_look_0.png"/>
-          <p:cNvPicPr>
-            <a:picLocks noChangeAspect="1"/>
-          </p:cNvPicPr>
-          <p:nvPr/>
-        </p:nvPicPr>
-        <p:blipFill>
-          <a:blip r:embed="rId10"/>
-          <a:stretch>
-            <a:fillRect/>
-          </a:stretch>
-        </p:blipFill>
-        <p:spPr>
-          <a:xfrm>
-            <a:off x="2383200" y="16228554"/>
-            <a:ext cx="4484700" cy="1560035"/>
-          </a:xfrm>
-          <a:prstGeom prst="rect">
-            <a:avLst/>
-          </a:prstGeom>
-        </p:spPr>
-      </p:pic>
-      <p:sp>
-        <p:nvSpPr>
-          <p:cNvPr id="106" name="Rectangle 105"/>
-          <p:cNvSpPr/>
-          <p:nvPr/>
-        </p:nvSpPr>
-        <p:spPr>
-          <a:xfrm>
-            <a:off x="2383200" y="16228554"/>
-            <a:ext cx="4484700" cy="1560034"/>
-          </a:xfrm>
-          <a:prstGeom prst="rect">
-            <a:avLst/>
-          </a:prstGeom>
-          <a:noFill/>
-          <a:ln w="8890">
-            <a:solidFill>
-              <a:srgbClr val="C9CFE0"/>
-            </a:solidFill>
-          </a:ln>
-          <a:effectLst/>
-        </p:spPr>
-        <p:style>
-          <a:lnRef idx="1">
-            <a:schemeClr val="accent1"/>
-          </a:lnRef>
-          <a:fillRef idx="3">
-            <a:schemeClr val="accent1"/>
-          </a:fillRef>
-          <a:effectRef idx="2">
-            <a:schemeClr val="accent1"/>
-          </a:effectRef>
-          <a:fontRef idx="minor">
-            <a:schemeClr val="lt1"/>
-          </a:fontRef>
-        </p:style>
-        <p:txBody>
-          <a:bodyPr rtlCol="0" anchor="ctr" wrap="square"/>
-          <a:lstStyle/>
-          <a:p>
-            <a:pPr algn="ctr"/>
-          </a:p>
-        </p:txBody>
-      </p:sp>
-      <p:sp>
-        <p:nvSpPr>
-          <p:cNvPr id="107" name="TextBox 106"/>
-          <p:cNvSpPr txBox="1"/>
-          <p:nvPr/>
-        </p:nvSpPr>
-        <p:spPr>
-          <a:xfrm>
-            <a:off x="2383200" y="17842588"/>
-            <a:ext cx="4520700" cy="252000"/>
-          </a:xfrm>
-          <a:prstGeom prst="rect">
-            <a:avLst/>
-          </a:prstGeom>
-          <a:noFill/>
-        </p:spPr>
-        <p:txBody>
-          <a:bodyPr wrap="square" lIns="0" rIns="0" tIns="0" bIns="0">
-            <a:spAutoFit/>
-          </a:bodyPr>
-          <a:lstStyle/>
-          <a:p>
-            <a:pPr algn="l">
-              <a:lnSpc>
-                <a:spcPct val="102000"/>
-              </a:lnSpc>
-              <a:spcAft>
-                <a:spcPts val="0"/>
-              </a:spcAft>
-            </a:pPr>
-            <a:r>
-              <a:rPr sz="1550" b="1" i="0">
-                <a:solidFill>
-                  <a:srgbClr val="141E41"/>
-                </a:solidFill>
-                <a:latin typeface="Arial"/>
-              </a:rPr>
-              <a:t>step 1 · scroll</a:t>
-            </a:r>
-          </a:p>
-        </p:txBody>
-      </p:sp>
-      <p:sp>
-        <p:nvSpPr>
-          <p:cNvPr id="108" name="TextBox 107"/>
-          <p:cNvSpPr txBox="1"/>
-          <p:nvPr/>
-        </p:nvSpPr>
-        <p:spPr>
-          <a:xfrm>
-            <a:off x="2383200" y="18076588"/>
-            <a:ext cx="4520700" cy="252000"/>
-          </a:xfrm>
-          <a:prstGeom prst="rect">
-            <a:avLst/>
-          </a:prstGeom>
-          <a:noFill/>
-        </p:spPr>
-        <p:txBody>
-          <a:bodyPr wrap="square" lIns="0" rIns="0" tIns="0" bIns="0">
-            <a:spAutoFit/>
-          </a:bodyPr>
-          <a:lstStyle/>
-          <a:p>
-            <a:pPr algn="l">
-              <a:lnSpc>
-                <a:spcPct val="102000"/>
-              </a:lnSpc>
-              <a:spcAft>
-                <a:spcPts val="0"/>
-              </a:spcAft>
-            </a:pPr>
-            <a:r>
-              <a:rPr sz="1400" b="0" i="0">
-                <a:solidFill>
-                  <a:srgbClr val="5D6787"/>
-                </a:solidFill>
-                <a:latin typeface="Arial"/>
-              </a:rPr>
-              <a:t>$0.007 spent</a:t>
-            </a:r>
-          </a:p>
-        </p:txBody>
-      </p:sp>
-      <p:pic>
-        <p:nvPicPr>
-          <p:cNvPr id="109" name="Picture 108" descr="lane_look_1.png"/>
-          <p:cNvPicPr>
-            <a:picLocks noChangeAspect="1"/>
-          </p:cNvPicPr>
-          <p:nvPr/>
-        </p:nvPicPr>
-        <p:blipFill>
-          <a:blip r:embed="rId11"/>
-          <a:stretch>
-            <a:fillRect/>
-          </a:stretch>
-        </p:blipFill>
-        <p:spPr>
-          <a:xfrm>
-            <a:off x="7011900" y="16228554"/>
-            <a:ext cx="4484700" cy="1560035"/>
-          </a:xfrm>
-          <a:prstGeom prst="rect">
-            <a:avLst/>
-          </a:prstGeom>
-        </p:spPr>
-      </p:pic>
-      <p:sp>
-        <p:nvSpPr>
-          <p:cNvPr id="110" name="Rectangle 109"/>
-          <p:cNvSpPr/>
-          <p:nvPr/>
-        </p:nvSpPr>
-        <p:spPr>
-          <a:xfrm>
-            <a:off x="7011900" y="16228554"/>
-            <a:ext cx="4484700" cy="1560034"/>
-          </a:xfrm>
-          <a:prstGeom prst="rect">
-            <a:avLst/>
-          </a:prstGeom>
-          <a:noFill/>
-          <a:ln w="8890">
-            <a:solidFill>
-              <a:srgbClr val="C9CFE0"/>
-            </a:solidFill>
-          </a:ln>
-          <a:effectLst/>
-        </p:spPr>
-        <p:style>
-          <a:lnRef idx="1">
-            <a:schemeClr val="accent1"/>
-          </a:lnRef>
-          <a:fillRef idx="3">
-            <a:schemeClr val="accent1"/>
-          </a:fillRef>
-          <a:effectRef idx="2">
-            <a:schemeClr val="accent1"/>
-          </a:effectRef>
-          <a:fontRef idx="minor">
-            <a:schemeClr val="lt1"/>
-          </a:fontRef>
-        </p:style>
-        <p:txBody>
-          <a:bodyPr rtlCol="0" anchor="ctr" wrap="square"/>
-          <a:lstStyle/>
-          <a:p>
-            <a:pPr algn="ctr"/>
-          </a:p>
-        </p:txBody>
-      </p:sp>
-      <p:sp>
-        <p:nvSpPr>
-          <p:cNvPr id="111" name="TextBox 110"/>
-          <p:cNvSpPr txBox="1"/>
-          <p:nvPr/>
-        </p:nvSpPr>
-        <p:spPr>
-          <a:xfrm>
-            <a:off x="7011900" y="17842588"/>
-            <a:ext cx="4520700" cy="252000"/>
-          </a:xfrm>
-          <a:prstGeom prst="rect">
-            <a:avLst/>
-          </a:prstGeom>
-          <a:noFill/>
-        </p:spPr>
-        <p:txBody>
-          <a:bodyPr wrap="square" lIns="0" rIns="0" tIns="0" bIns="0">
-            <a:spAutoFit/>
-          </a:bodyPr>
-          <a:lstStyle/>
-          <a:p>
-            <a:pPr algn="l">
-              <a:lnSpc>
-                <a:spcPct val="102000"/>
-              </a:lnSpc>
-              <a:spcAft>
-                <a:spcPts val="0"/>
-              </a:spcAft>
-            </a:pPr>
-            <a:r>
-              <a:rPr sz="1550" b="1" i="0">
-                <a:solidFill>
-                  <a:srgbClr val="141E41"/>
-                </a:solidFill>
-                <a:latin typeface="Arial"/>
-              </a:rPr>
-              <a:t>step 3 · click</a:t>
-            </a:r>
-          </a:p>
-        </p:txBody>
-      </p:sp>
-      <p:sp>
-        <p:nvSpPr>
-          <p:cNvPr id="112" name="TextBox 111"/>
-          <p:cNvSpPr txBox="1"/>
-          <p:nvPr/>
-        </p:nvSpPr>
-        <p:spPr>
-          <a:xfrm>
-            <a:off x="7011900" y="18076588"/>
-            <a:ext cx="4520700" cy="252000"/>
-          </a:xfrm>
-          <a:prstGeom prst="rect">
-            <a:avLst/>
-          </a:prstGeom>
-          <a:noFill/>
-        </p:spPr>
-        <p:txBody>
-          <a:bodyPr wrap="square" lIns="0" rIns="0" tIns="0" bIns="0">
-            <a:spAutoFit/>
-          </a:bodyPr>
-          <a:lstStyle/>
-          <a:p>
-            <a:pPr algn="l">
-              <a:lnSpc>
-                <a:spcPct val="102000"/>
-              </a:lnSpc>
-              <a:spcAft>
-                <a:spcPts val="0"/>
-              </a:spcAft>
-            </a:pPr>
-            <a:r>
-              <a:rPr sz="1400" b="0" i="0">
-                <a:solidFill>
-                  <a:srgbClr val="5D6787"/>
-                </a:solidFill>
-                <a:latin typeface="Arial"/>
-              </a:rPr>
-              <a:t>$0.015 spent</a:t>
-            </a:r>
-          </a:p>
-        </p:txBody>
-      </p:sp>
-      <p:pic>
-        <p:nvPicPr>
-          <p:cNvPr id="113" name="Picture 112" descr="lane_look_0.png"/>
-          <p:cNvPicPr>
-            <a:picLocks noChangeAspect="1"/>
-          </p:cNvPicPr>
-          <p:nvPr/>
-        </p:nvPicPr>
-        <p:blipFill>
-          <a:blip r:embed="rId10"/>
-          <a:stretch>
-            <a:fillRect/>
-          </a:stretch>
-        </p:blipFill>
-        <p:spPr>
-          <a:xfrm>
-            <a:off x="11640600" y="16228554"/>
-            <a:ext cx="4484700" cy="1560035"/>
-          </a:xfrm>
-          <a:prstGeom prst="rect">
-            <a:avLst/>
-          </a:prstGeom>
-        </p:spPr>
-      </p:pic>
-      <p:sp>
-        <p:nvSpPr>
-          <p:cNvPr id="114" name="Rectangle 113"/>
-          <p:cNvSpPr/>
-          <p:nvPr/>
-        </p:nvSpPr>
-        <p:spPr>
-          <a:xfrm>
-            <a:off x="11640600" y="16228554"/>
-            <a:ext cx="4484700" cy="1560034"/>
-          </a:xfrm>
-          <a:prstGeom prst="rect">
-            <a:avLst/>
-          </a:prstGeom>
-          <a:noFill/>
-          <a:ln w="8890">
-            <a:solidFill>
-              <a:srgbClr val="C9CFE0"/>
-            </a:solidFill>
-          </a:ln>
-          <a:effectLst/>
-        </p:spPr>
-        <p:style>
-          <a:lnRef idx="1">
-            <a:schemeClr val="accent1"/>
-          </a:lnRef>
-          <a:fillRef idx="3">
-            <a:schemeClr val="accent1"/>
-          </a:fillRef>
-          <a:effectRef idx="2">
-            <a:schemeClr val="accent1"/>
-          </a:effectRef>
-          <a:fontRef idx="minor">
-            <a:schemeClr val="lt1"/>
-          </a:fontRef>
-        </p:style>
-        <p:txBody>
-          <a:bodyPr rtlCol="0" anchor="ctr" wrap="square"/>
-          <a:lstStyle/>
-          <a:p>
-            <a:pPr algn="ctr"/>
-          </a:p>
-        </p:txBody>
-      </p:sp>
-      <p:sp>
-        <p:nvSpPr>
-          <p:cNvPr id="115" name="TextBox 114"/>
-          <p:cNvSpPr txBox="1"/>
-          <p:nvPr/>
-        </p:nvSpPr>
-        <p:spPr>
-          <a:xfrm>
-            <a:off x="11640600" y="17842588"/>
-            <a:ext cx="4520700" cy="252000"/>
-          </a:xfrm>
-          <a:prstGeom prst="rect">
-            <a:avLst/>
-          </a:prstGeom>
-          <a:noFill/>
-        </p:spPr>
-        <p:txBody>
-          <a:bodyPr wrap="square" lIns="0" rIns="0" tIns="0" bIns="0">
-            <a:spAutoFit/>
-          </a:bodyPr>
-          <a:lstStyle/>
-          <a:p>
-            <a:pPr algn="l">
-              <a:lnSpc>
-                <a:spcPct val="102000"/>
-              </a:lnSpc>
-              <a:spcAft>
-                <a:spcPts val="0"/>
-              </a:spcAft>
-            </a:pPr>
-            <a:r>
-              <a:rPr sz="1550" b="1" i="0">
-                <a:solidFill>
-                  <a:srgbClr val="141E41"/>
-                </a:solidFill>
-                <a:latin typeface="Arial"/>
-              </a:rPr>
-              <a:t>step 18 · scroll</a:t>
-            </a:r>
-          </a:p>
-        </p:txBody>
-      </p:sp>
-      <p:sp>
-        <p:nvSpPr>
-          <p:cNvPr id="116" name="TextBox 115"/>
-          <p:cNvSpPr txBox="1"/>
-          <p:nvPr/>
-        </p:nvSpPr>
-        <p:spPr>
-          <a:xfrm>
-            <a:off x="11640600" y="18076588"/>
-            <a:ext cx="4520700" cy="252000"/>
-          </a:xfrm>
-          <a:prstGeom prst="rect">
-            <a:avLst/>
-          </a:prstGeom>
-          <a:noFill/>
-        </p:spPr>
-        <p:txBody>
-          <a:bodyPr wrap="square" lIns="0" rIns="0" tIns="0" bIns="0">
-            <a:spAutoFit/>
-          </a:bodyPr>
-          <a:lstStyle/>
-          <a:p>
-            <a:pPr algn="l">
-              <a:lnSpc>
-                <a:spcPct val="102000"/>
-              </a:lnSpc>
-              <a:spcAft>
-                <a:spcPts val="0"/>
-              </a:spcAft>
-            </a:pPr>
-            <a:r>
-              <a:rPr sz="1400" b="0" i="0">
-                <a:solidFill>
-                  <a:srgbClr val="C2352B"/>
-                </a:solidFill>
-                <a:latin typeface="Arial"/>
-              </a:rPr>
-              <a:t>$0.075 · </a:t>
-            </a:r>
-            <a:r>
-              <a:rPr sz="1400" b="1" i="0">
-                <a:solidFill>
-                  <a:srgbClr val="C2352B"/>
-                </a:solidFill>
-                <a:latin typeface="Arial"/>
-              </a:rPr>
-              <a:t>step 1's page again</a:t>
-            </a:r>
-          </a:p>
-        </p:txBody>
-      </p:sp>
-      <p:pic>
-        <p:nvPicPr>
-          <p:cNvPr id="117" name="Picture 116" descr="lane_look_1.png"/>
-          <p:cNvPicPr>
-            <a:picLocks noChangeAspect="1"/>
-          </p:cNvPicPr>
-          <p:nvPr/>
-        </p:nvPicPr>
-        <p:blipFill>
-          <a:blip r:embed="rId11"/>
-          <a:stretch>
-            <a:fillRect/>
-          </a:stretch>
-        </p:blipFill>
-        <p:spPr>
-          <a:xfrm>
-            <a:off x="16269300" y="16228554"/>
-            <a:ext cx="4484700" cy="1560035"/>
-          </a:xfrm>
-          <a:prstGeom prst="rect">
-            <a:avLst/>
-          </a:prstGeom>
-        </p:spPr>
-      </p:pic>
-      <p:sp>
-        <p:nvSpPr>
-          <p:cNvPr id="118" name="Rectangle 117"/>
-          <p:cNvSpPr/>
-          <p:nvPr/>
-        </p:nvSpPr>
-        <p:spPr>
-          <a:xfrm>
-            <a:off x="16269300" y="16228554"/>
-            <a:ext cx="4484700" cy="1560034"/>
-          </a:xfrm>
-          <a:prstGeom prst="rect">
-            <a:avLst/>
-          </a:prstGeom>
-          <a:noFill/>
-          <a:ln w="8890">
-            <a:solidFill>
-              <a:srgbClr val="C9CFE0"/>
-            </a:solidFill>
-          </a:ln>
-          <a:effectLst/>
-        </p:spPr>
-        <p:style>
-          <a:lnRef idx="1">
-            <a:schemeClr val="accent1"/>
-          </a:lnRef>
-          <a:fillRef idx="3">
-            <a:schemeClr val="accent1"/>
-          </a:fillRef>
-          <a:effectRef idx="2">
-            <a:schemeClr val="accent1"/>
-          </a:effectRef>
-          <a:fontRef idx="minor">
-            <a:schemeClr val="lt1"/>
-          </a:fontRef>
-        </p:style>
-        <p:txBody>
-          <a:bodyPr rtlCol="0" anchor="ctr" wrap="square"/>
-          <a:lstStyle/>
-          <a:p>
-            <a:pPr algn="ctr"/>
-          </a:p>
-        </p:txBody>
-      </p:sp>
-      <p:sp>
-        <p:nvSpPr>
-          <p:cNvPr id="119" name="TextBox 118"/>
-          <p:cNvSpPr txBox="1"/>
-          <p:nvPr/>
-        </p:nvSpPr>
-        <p:spPr>
-          <a:xfrm>
-            <a:off x="16269300" y="17842588"/>
-            <a:ext cx="4520700" cy="252000"/>
-          </a:xfrm>
-          <a:prstGeom prst="rect">
-            <a:avLst/>
-          </a:prstGeom>
-          <a:noFill/>
-        </p:spPr>
-        <p:txBody>
-          <a:bodyPr wrap="square" lIns="0" rIns="0" tIns="0" bIns="0">
-            <a:spAutoFit/>
-          </a:bodyPr>
-          <a:lstStyle/>
-          <a:p>
-            <a:pPr algn="l">
-              <a:lnSpc>
-                <a:spcPct val="102000"/>
-              </a:lnSpc>
-              <a:spcAft>
-                <a:spcPts val="0"/>
-              </a:spcAft>
-            </a:pPr>
-            <a:r>
-              <a:rPr sz="1550" b="1" i="0">
-                <a:solidFill>
-                  <a:srgbClr val="141E41"/>
-                </a:solidFill>
-                <a:latin typeface="Arial"/>
-              </a:rPr>
-              <a:t>step 20 · scroll</a:t>
-            </a:r>
-          </a:p>
-        </p:txBody>
-      </p:sp>
-      <p:sp>
-        <p:nvSpPr>
-          <p:cNvPr id="120" name="TextBox 119"/>
-          <p:cNvSpPr txBox="1"/>
-          <p:nvPr/>
-        </p:nvSpPr>
-        <p:spPr>
-          <a:xfrm>
-            <a:off x="16269300" y="18076588"/>
-            <a:ext cx="4520700" cy="252000"/>
-          </a:xfrm>
-          <a:prstGeom prst="rect">
-            <a:avLst/>
-          </a:prstGeom>
-          <a:noFill/>
-        </p:spPr>
-        <p:txBody>
-          <a:bodyPr wrap="square" lIns="0" rIns="0" tIns="0" bIns="0">
-            <a:spAutoFit/>
-          </a:bodyPr>
-          <a:lstStyle/>
-          <a:p>
-            <a:pPr algn="l">
-              <a:lnSpc>
-                <a:spcPct val="102000"/>
-              </a:lnSpc>
-              <a:spcAft>
-                <a:spcPts val="0"/>
-              </a:spcAft>
-            </a:pPr>
-            <a:r>
-              <a:rPr sz="1400" b="0" i="0">
-                <a:solidFill>
-                  <a:srgbClr val="C2352B"/>
-                </a:solidFill>
-                <a:latin typeface="Arial"/>
-              </a:rPr>
-              <a:t>$0.083 · </a:t>
-            </a:r>
-            <a:r>
-              <a:rPr sz="1400" b="1" i="0">
-                <a:solidFill>
-                  <a:srgbClr val="C2352B"/>
-                </a:solidFill>
-                <a:latin typeface="Arial"/>
-              </a:rPr>
-              <a:t>step 3's page again</a:t>
-            </a:r>
-          </a:p>
-        </p:txBody>
-      </p:sp>
-      <p:sp>
-        <p:nvSpPr>
-          <p:cNvPr id="121" name="TextBox 120"/>
-          <p:cNvSpPr txBox="1"/>
-          <p:nvPr/>
-        </p:nvSpPr>
-        <p:spPr>
-          <a:xfrm>
-            <a:off x="727200" y="18364588"/>
-            <a:ext cx="20062800" cy="255117"/>
-          </a:xfrm>
-          <a:prstGeom prst="rect">
-            <a:avLst/>
-          </a:prstGeom>
-          <a:noFill/>
-        </p:spPr>
-        <p:txBody>
-          <a:bodyPr wrap="square" lIns="0" rIns="0" tIns="0" bIns="0">
-            <a:spAutoFit/>
-          </a:bodyPr>
-          <a:lstStyle/>
-          <a:p>
-            <a:pPr algn="l">
-              <a:lnSpc>
-                <a:spcPct val="108000"/>
-              </a:lnSpc>
-              <a:spcAft>
-                <a:spcPts val="0"/>
-              </a:spcAft>
-            </a:pPr>
-            <a:r>
               <a:rPr sz="1550" b="1" i="0">
                 <a:solidFill>
                   <a:srgbClr val="12162E"/>
@@ -5968,7 +5655,7 @@
                 </a:solidFill>
                 <a:latin typeface="Arial"/>
               </a:rPr>
-              <a:t> — its final frames return to pages it has already seen. One recorded run per view; both outcomes repeat on an independent rerun.</a:t>
+              <a:t> — it ends on the page it started on, seventeen steps later. One recorded run per view; both outcomes repeat on an independent rerun.</a:t>
             </a:r>
           </a:p>
         </p:txBody>
@@ -5981,7 +5668,7 @@
         </p:nvSpPr>
         <p:spPr>
           <a:xfrm>
-            <a:off x="727200" y="18835705"/>
+            <a:off x="727200" y="19498187"/>
             <a:ext cx="177988" cy="177988"/>
           </a:xfrm>
           <a:prstGeom prst="rect">
@@ -6026,7 +5713,7 @@
         </p:nvSpPr>
         <p:spPr>
           <a:xfrm>
-            <a:off x="1032323" y="18792505"/>
+            <a:off x="1032323" y="19454987"/>
             <a:ext cx="6144827" cy="238912"/>
           </a:xfrm>
           <a:prstGeom prst="rect">
@@ -6071,7 +5758,7 @@
         </p:nvSpPr>
         <p:spPr>
           <a:xfrm>
-            <a:off x="727200" y="19153541"/>
+            <a:off x="727200" y="19816023"/>
             <a:ext cx="1169636" cy="35597"/>
           </a:xfrm>
           <a:prstGeom prst="rect">
@@ -6116,7 +5803,7 @@
         </p:nvSpPr>
         <p:spPr>
           <a:xfrm>
-            <a:off x="1896836" y="19163712"/>
+            <a:off x="1896836" y="19826194"/>
             <a:ext cx="5281564" cy="15256"/>
           </a:xfrm>
           <a:prstGeom prst="rect">
@@ -6155,14 +5842,14 @@
       </p:sp>
       <p:sp>
         <p:nvSpPr>
-          <p:cNvPr id="122" name="Rectangle 121"/>
+          <p:cNvPr id="114" name="Rectangle 113"/>
           <p:cNvSpPr/>
           <p:nvPr/>
         </p:nvSpPr>
         <p:spPr>
           <a:xfrm>
-            <a:off x="2017440" y="19375705"/>
-            <a:ext cx="3870720" cy="3155111"/>
+            <a:off x="2146464" y="20038187"/>
+            <a:ext cx="3612672" cy="2950104"/>
           </a:xfrm>
           <a:prstGeom prst="rect">
             <a:avLst/>
@@ -6201,14 +5888,14 @@
       </p:sp>
       <p:sp>
         <p:nvSpPr>
-          <p:cNvPr id="123" name="Rectangle 122"/>
+          <p:cNvPr id="115" name="Rectangle 114"/>
           <p:cNvSpPr/>
           <p:nvPr/>
         </p:nvSpPr>
         <p:spPr>
           <a:xfrm>
-            <a:off x="2017440" y="19375705"/>
-            <a:ext cx="3870720" cy="50400"/>
+            <a:off x="2146464" y="20038187"/>
+            <a:ext cx="3612672" cy="50400"/>
           </a:xfrm>
           <a:prstGeom prst="rect">
             <a:avLst/>
@@ -6245,22 +5932,22 @@
       </p:sp>
       <p:pic>
         <p:nvPicPr>
-          <p:cNvPr id="124" name="Picture 123" descr="fig_f5_design_matrix.png"/>
+          <p:cNvPr id="116" name="Picture 115" descr="fig_f5_design_matrix.png"/>
           <p:cNvPicPr>
             <a:picLocks noChangeAspect="1"/>
           </p:cNvPicPr>
           <p:nvPr/>
         </p:nvPicPr>
         <p:blipFill>
-          <a:blip r:embed="rId12"/>
+          <a:blip r:embed="rId11"/>
           <a:stretch>
             <a:fillRect/>
           </a:stretch>
         </p:blipFill>
         <p:spPr>
           <a:xfrm>
-            <a:off x="2089440" y="19498105"/>
-            <a:ext cx="3726720" cy="2960712"/>
+            <a:off x="2218464" y="20160587"/>
+            <a:ext cx="3468672" cy="2755704"/>
           </a:xfrm>
           <a:prstGeom prst="rect">
             <a:avLst/>
@@ -6275,7 +5962,7 @@
         </p:nvSpPr>
         <p:spPr>
           <a:xfrm>
-            <a:off x="7534800" y="18835705"/>
+            <a:off x="7534800" y="19498187"/>
             <a:ext cx="177988" cy="177988"/>
           </a:xfrm>
           <a:prstGeom prst="rect">
@@ -6320,7 +6007,7 @@
         </p:nvSpPr>
         <p:spPr>
           <a:xfrm>
-            <a:off x="7839923" y="18792505"/>
+            <a:off x="7839923" y="19454987"/>
             <a:ext cx="6144827" cy="238912"/>
           </a:xfrm>
           <a:prstGeom prst="rect">
@@ -6365,7 +6052,7 @@
         </p:nvSpPr>
         <p:spPr>
           <a:xfrm>
-            <a:off x="7534800" y="19153541"/>
+            <a:off x="7534800" y="19816023"/>
             <a:ext cx="1169636" cy="35597"/>
           </a:xfrm>
           <a:prstGeom prst="rect">
@@ -6410,7 +6097,7 @@
         </p:nvSpPr>
         <p:spPr>
           <a:xfrm>
-            <a:off x="8704436" y="19163712"/>
+            <a:off x="8704436" y="19826194"/>
             <a:ext cx="5281564" cy="15256"/>
           </a:xfrm>
           <a:prstGeom prst="rect">
@@ -6449,14 +6136,14 @@
       </p:sp>
       <p:sp>
         <p:nvSpPr>
-          <p:cNvPr id="125" name="Rectangle 124"/>
+          <p:cNvPr id="117" name="Rectangle 116"/>
           <p:cNvSpPr/>
           <p:nvPr/>
         </p:nvSpPr>
         <p:spPr>
           <a:xfrm>
-            <a:off x="7534800" y="19375705"/>
-            <a:ext cx="6451200" cy="2751873"/>
+            <a:off x="7986384" y="20038187"/>
+            <a:ext cx="5548032" cy="2385652"/>
           </a:xfrm>
           <a:prstGeom prst="rect">
             <a:avLst/>
@@ -6495,14 +6182,14 @@
       </p:sp>
       <p:sp>
         <p:nvSpPr>
-          <p:cNvPr id="126" name="Rectangle 125"/>
+          <p:cNvPr id="118" name="Rectangle 117"/>
           <p:cNvSpPr/>
           <p:nvPr/>
         </p:nvSpPr>
         <p:spPr>
           <a:xfrm>
-            <a:off x="7534800" y="19375705"/>
-            <a:ext cx="6451200" cy="50400"/>
+            <a:off x="7986384" y="20038187"/>
+            <a:ext cx="5548032" cy="50400"/>
           </a:xfrm>
           <a:prstGeom prst="rect">
             <a:avLst/>
@@ -6539,22 +6226,22 @@
       </p:sp>
       <p:pic>
         <p:nvPicPr>
-          <p:cNvPr id="127" name="Picture 126" descr="venn_b0.png"/>
+          <p:cNvPr id="119" name="Picture 118" descr="venn_b0.png"/>
           <p:cNvPicPr>
             <a:picLocks noChangeAspect="1"/>
           </p:cNvPicPr>
           <p:nvPr/>
         </p:nvPicPr>
         <p:blipFill>
-          <a:blip r:embed="rId13"/>
+          <a:blip r:embed="rId12"/>
           <a:stretch>
             <a:fillRect/>
           </a:stretch>
         </p:blipFill>
         <p:spPr>
           <a:xfrm>
-            <a:off x="7606800" y="19498105"/>
-            <a:ext cx="6307200" cy="2557474"/>
+            <a:off x="8058384" y="20160587"/>
+            <a:ext cx="5404032" cy="2191253"/>
           </a:xfrm>
           <a:prstGeom prst="rect">
             <a:avLst/>
@@ -6563,13 +6250,13 @@
       </p:pic>
       <p:sp>
         <p:nvSpPr>
-          <p:cNvPr id="128" name="TextBox 127"/>
+          <p:cNvPr id="120" name="TextBox 119"/>
           <p:cNvSpPr txBox="1"/>
           <p:nvPr/>
         </p:nvSpPr>
         <p:spPr>
           <a:xfrm>
-            <a:off x="7534800" y="22199578"/>
+            <a:off x="7534800" y="22495839"/>
             <a:ext cx="6451200" cy="279806"/>
           </a:xfrm>
           <a:prstGeom prst="rect">
@@ -6611,7 +6298,7 @@
         </p:nvSpPr>
         <p:spPr>
           <a:xfrm>
-            <a:off x="14338800" y="18835705"/>
+            <a:off x="14338800" y="19498187"/>
             <a:ext cx="177988" cy="177988"/>
           </a:xfrm>
           <a:prstGeom prst="rect">
@@ -6656,7 +6343,7 @@
         </p:nvSpPr>
         <p:spPr>
           <a:xfrm>
-            <a:off x="14643923" y="18792505"/>
+            <a:off x="14643923" y="19454987"/>
             <a:ext cx="6144827" cy="238912"/>
           </a:xfrm>
           <a:prstGeom prst="rect">
@@ -6701,7 +6388,7 @@
         </p:nvSpPr>
         <p:spPr>
           <a:xfrm>
-            <a:off x="14338800" y="19153541"/>
+            <a:off x="14338800" y="19816023"/>
             <a:ext cx="1169636" cy="35597"/>
           </a:xfrm>
           <a:prstGeom prst="rect">
@@ -6746,7 +6433,7 @@
         </p:nvSpPr>
         <p:spPr>
           <a:xfrm>
-            <a:off x="15508436" y="19163712"/>
+            <a:off x="15508436" y="19826194"/>
             <a:ext cx="5281564" cy="15256"/>
           </a:xfrm>
           <a:prstGeom prst="rect">
@@ -6785,13 +6472,13 @@
       </p:sp>
       <p:sp>
         <p:nvSpPr>
-          <p:cNvPr id="129" name="Rectangle 128"/>
+          <p:cNvPr id="121" name="Rectangle 120"/>
           <p:cNvSpPr/>
           <p:nvPr/>
         </p:nvSpPr>
         <p:spPr>
           <a:xfrm>
-            <a:off x="14338800" y="19375705"/>
+            <a:off x="14338800" y="20038187"/>
             <a:ext cx="6451200" cy="2581780"/>
           </a:xfrm>
           <a:prstGeom prst="rect">
@@ -6831,13 +6518,13 @@
       </p:sp>
       <p:sp>
         <p:nvSpPr>
-          <p:cNvPr id="130" name="Rectangle 129"/>
+          <p:cNvPr id="122" name="Rectangle 121"/>
           <p:cNvSpPr/>
           <p:nvPr/>
         </p:nvSpPr>
         <p:spPr>
           <a:xfrm>
-            <a:off x="14338800" y="19375705"/>
+            <a:off x="14338800" y="20038187"/>
             <a:ext cx="6451200" cy="50400"/>
           </a:xfrm>
           <a:prstGeom prst="rect">
@@ -6875,21 +6562,21 @@
       </p:sp>
       <p:pic>
         <p:nvPicPr>
-          <p:cNvPr id="131" name="Picture 130" descr="behaviour.png"/>
+          <p:cNvPr id="123" name="Picture 122" descr="behaviour.png"/>
           <p:cNvPicPr>
             <a:picLocks noChangeAspect="1"/>
           </p:cNvPicPr>
           <p:nvPr/>
         </p:nvPicPr>
         <p:blipFill>
-          <a:blip r:embed="rId14"/>
+          <a:blip r:embed="rId13"/>
           <a:stretch>
             <a:fillRect/>
           </a:stretch>
         </p:blipFill>
         <p:spPr>
           <a:xfrm>
-            <a:off x="14410800" y="19498105"/>
+            <a:off x="14410800" y="20160587"/>
             <a:ext cx="6307200" cy="2387379"/>
           </a:xfrm>
           <a:prstGeom prst="rect">
@@ -6899,13 +6586,13 @@
       </p:pic>
       <p:sp>
         <p:nvSpPr>
-          <p:cNvPr id="132" name="TextBox 131"/>
+          <p:cNvPr id="124" name="TextBox 123"/>
           <p:cNvSpPr txBox="1"/>
           <p:nvPr/>
         </p:nvSpPr>
         <p:spPr>
           <a:xfrm>
-            <a:off x="14338800" y="22029485"/>
+            <a:off x="14338800" y="22691967"/>
             <a:ext cx="6451200" cy="279806"/>
           </a:xfrm>
           <a:prstGeom prst="rect">
@@ -6947,7 +6634,7 @@
         </p:nvSpPr>
         <p:spPr>
           <a:xfrm>
-            <a:off x="727200" y="22875384"/>
+            <a:off x="727200" y="23367773"/>
             <a:ext cx="177988" cy="177988"/>
           </a:xfrm>
           <a:prstGeom prst="rect">
@@ -6992,7 +6679,7 @@
         </p:nvSpPr>
         <p:spPr>
           <a:xfrm>
-            <a:off x="1032323" y="22832184"/>
+            <a:off x="1032323" y="23324573"/>
             <a:ext cx="6144827" cy="238912"/>
           </a:xfrm>
           <a:prstGeom prst="rect">
@@ -7037,7 +6724,7 @@
         </p:nvSpPr>
         <p:spPr>
           <a:xfrm>
-            <a:off x="727200" y="23193220"/>
+            <a:off x="727200" y="23685609"/>
             <a:ext cx="1169636" cy="35597"/>
           </a:xfrm>
           <a:prstGeom prst="rect">
@@ -7082,7 +6769,7 @@
         </p:nvSpPr>
         <p:spPr>
           <a:xfrm>
-            <a:off x="1896836" y="23203391"/>
+            <a:off x="1896836" y="23695780"/>
             <a:ext cx="5281564" cy="15256"/>
           </a:xfrm>
           <a:prstGeom prst="rect">
@@ -7121,13 +6808,13 @@
       </p:sp>
       <p:sp>
         <p:nvSpPr>
-          <p:cNvPr id="133" name="Rectangle 132"/>
+          <p:cNvPr id="125" name="Rectangle 124"/>
           <p:cNvSpPr/>
           <p:nvPr/>
         </p:nvSpPr>
         <p:spPr>
           <a:xfrm>
-            <a:off x="727200" y="23415384"/>
+            <a:off x="727200" y="23907773"/>
             <a:ext cx="6451200" cy="3146936"/>
           </a:xfrm>
           <a:prstGeom prst="rect">
@@ -7167,13 +6854,13 @@
       </p:sp>
       <p:sp>
         <p:nvSpPr>
-          <p:cNvPr id="134" name="Rectangle 133"/>
+          <p:cNvPr id="126" name="Rectangle 125"/>
           <p:cNvSpPr/>
           <p:nvPr/>
         </p:nvSpPr>
         <p:spPr>
           <a:xfrm>
-            <a:off x="727200" y="23415384"/>
+            <a:off x="727200" y="23907773"/>
             <a:ext cx="6451200" cy="50400"/>
           </a:xfrm>
           <a:prstGeom prst="rect">
@@ -7211,21 +6898,21 @@
       </p:sp>
       <p:pic>
         <p:nvPicPr>
-          <p:cNvPr id="135" name="Picture 134" descr="failure.png"/>
+          <p:cNvPr id="127" name="Picture 126" descr="failure.png"/>
           <p:cNvPicPr>
             <a:picLocks noChangeAspect="1"/>
           </p:cNvPicPr>
           <p:nvPr/>
         </p:nvPicPr>
         <p:blipFill>
-          <a:blip r:embed="rId15"/>
+          <a:blip r:embed="rId14"/>
           <a:stretch>
             <a:fillRect/>
           </a:stretch>
         </p:blipFill>
         <p:spPr>
           <a:xfrm>
-            <a:off x="799200" y="23537784"/>
+            <a:off x="799200" y="24030173"/>
             <a:ext cx="6307200" cy="2952536"/>
           </a:xfrm>
           <a:prstGeom prst="rect">
@@ -7235,13 +6922,13 @@
       </p:pic>
       <p:sp>
         <p:nvSpPr>
-          <p:cNvPr id="136" name="TextBox 135"/>
+          <p:cNvPr id="128" name="TextBox 127"/>
           <p:cNvSpPr txBox="1"/>
           <p:nvPr/>
         </p:nvSpPr>
         <p:spPr>
           <a:xfrm>
-            <a:off x="727200" y="26634320"/>
+            <a:off x="727200" y="27126709"/>
             <a:ext cx="6451200" cy="559612"/>
           </a:xfrm>
           <a:prstGeom prst="rect">
@@ -7283,7 +6970,7 @@
         </p:nvSpPr>
         <p:spPr>
           <a:xfrm>
-            <a:off x="7534800" y="22875384"/>
+            <a:off x="7534800" y="23367773"/>
             <a:ext cx="177988" cy="177988"/>
           </a:xfrm>
           <a:prstGeom prst="rect">
@@ -7328,7 +7015,7 @@
         </p:nvSpPr>
         <p:spPr>
           <a:xfrm>
-            <a:off x="7839923" y="22832184"/>
+            <a:off x="7839923" y="23324573"/>
             <a:ext cx="6144827" cy="238912"/>
           </a:xfrm>
           <a:prstGeom prst="rect">
@@ -7373,7 +7060,7 @@
         </p:nvSpPr>
         <p:spPr>
           <a:xfrm>
-            <a:off x="7534800" y="23193220"/>
+            <a:off x="7534800" y="23685609"/>
             <a:ext cx="1169636" cy="35597"/>
           </a:xfrm>
           <a:prstGeom prst="rect">
@@ -7418,7 +7105,7 @@
         </p:nvSpPr>
         <p:spPr>
           <a:xfrm>
-            <a:off x="8704436" y="23203391"/>
+            <a:off x="8704436" y="23695780"/>
             <a:ext cx="5281564" cy="15256"/>
           </a:xfrm>
           <a:prstGeom prst="rect">
@@ -7457,14 +7144,14 @@
       </p:sp>
       <p:sp>
         <p:nvSpPr>
-          <p:cNvPr id="137" name="Rectangle 136"/>
+          <p:cNvPr id="129" name="Rectangle 128"/>
           <p:cNvSpPr/>
           <p:nvPr/>
         </p:nvSpPr>
         <p:spPr>
           <a:xfrm>
-            <a:off x="7986384" y="23415384"/>
-            <a:ext cx="5548032" cy="4100650"/>
+            <a:off x="8244432" y="23907773"/>
+            <a:ext cx="5031936" cy="3727595"/>
           </a:xfrm>
           <a:prstGeom prst="rect">
             <a:avLst/>
@@ -7503,14 +7190,14 @@
       </p:sp>
       <p:sp>
         <p:nvSpPr>
-          <p:cNvPr id="138" name="Rectangle 137"/>
+          <p:cNvPr id="130" name="Rectangle 129"/>
           <p:cNvSpPr/>
           <p:nvPr/>
         </p:nvSpPr>
         <p:spPr>
           <a:xfrm>
-            <a:off x="7986384" y="23415384"/>
-            <a:ext cx="5548032" cy="50400"/>
+            <a:off x="8244432" y="23907773"/>
+            <a:ext cx="5031936" cy="50400"/>
           </a:xfrm>
           <a:prstGeom prst="rect">
             <a:avLst/>
@@ -7547,22 +7234,22 @@
       </p:sp>
       <p:pic>
         <p:nvPicPr>
-          <p:cNvPr id="139" name="Picture 138" descr="fig_f13_dominance_plane.png"/>
+          <p:cNvPr id="131" name="Picture 130" descr="fig_f13_dominance_plane.png"/>
           <p:cNvPicPr>
             <a:picLocks noChangeAspect="1"/>
           </p:cNvPicPr>
           <p:nvPr/>
         </p:nvPicPr>
         <p:blipFill>
-          <a:blip r:embed="rId16"/>
+          <a:blip r:embed="rId15"/>
           <a:stretch>
             <a:fillRect/>
           </a:stretch>
         </p:blipFill>
         <p:spPr>
           <a:xfrm>
-            <a:off x="8058384" y="23537784"/>
-            <a:ext cx="5404032" cy="3906250"/>
+            <a:off x="8316432" y="24030173"/>
+            <a:ext cx="4887936" cy="3533196"/>
           </a:xfrm>
           <a:prstGeom prst="rect">
             <a:avLst/>
@@ -7571,13 +7258,13 @@
       </p:pic>
       <p:sp>
         <p:nvSpPr>
-          <p:cNvPr id="140" name="TextBox 139"/>
+          <p:cNvPr id="132" name="TextBox 131"/>
           <p:cNvSpPr txBox="1"/>
           <p:nvPr/>
         </p:nvSpPr>
         <p:spPr>
           <a:xfrm>
-            <a:off x="7534800" y="27588034"/>
+            <a:off x="7534800" y="27707368"/>
             <a:ext cx="6451200" cy="279806"/>
           </a:xfrm>
           <a:prstGeom prst="rect">
@@ -7619,7 +7306,7 @@
         </p:nvSpPr>
         <p:spPr>
           <a:xfrm>
-            <a:off x="14338800" y="22875384"/>
+            <a:off x="14338800" y="23367773"/>
             <a:ext cx="177988" cy="177988"/>
           </a:xfrm>
           <a:prstGeom prst="rect">
@@ -7664,7 +7351,7 @@
         </p:nvSpPr>
         <p:spPr>
           <a:xfrm>
-            <a:off x="14643923" y="22832184"/>
+            <a:off x="14643923" y="23324573"/>
             <a:ext cx="6144827" cy="238912"/>
           </a:xfrm>
           <a:prstGeom prst="rect">
@@ -7709,7 +7396,7 @@
         </p:nvSpPr>
         <p:spPr>
           <a:xfrm>
-            <a:off x="14338800" y="23193220"/>
+            <a:off x="14338800" y="23685609"/>
             <a:ext cx="1169636" cy="35597"/>
           </a:xfrm>
           <a:prstGeom prst="rect">
@@ -7754,7 +7441,7 @@
         </p:nvSpPr>
         <p:spPr>
           <a:xfrm>
-            <a:off x="15508436" y="23203391"/>
+            <a:off x="15508436" y="23695780"/>
             <a:ext cx="5281564" cy="15256"/>
           </a:xfrm>
           <a:prstGeom prst="rect">
@@ -7793,13 +7480,13 @@
       </p:sp>
       <p:sp>
         <p:nvSpPr>
-          <p:cNvPr id="141" name="Rectangle 140"/>
+          <p:cNvPr id="133" name="Rectangle 132"/>
           <p:cNvSpPr/>
           <p:nvPr/>
         </p:nvSpPr>
         <p:spPr>
           <a:xfrm>
-            <a:off x="14338800" y="23415384"/>
+            <a:off x="14338800" y="23907773"/>
             <a:ext cx="6451200" cy="3684894"/>
           </a:xfrm>
           <a:prstGeom prst="rect">
@@ -7839,13 +7526,13 @@
       </p:sp>
       <p:sp>
         <p:nvSpPr>
-          <p:cNvPr id="142" name="Rectangle 141"/>
+          <p:cNvPr id="134" name="Rectangle 133"/>
           <p:cNvSpPr/>
           <p:nvPr/>
         </p:nvSpPr>
         <p:spPr>
           <a:xfrm>
-            <a:off x="14338800" y="23415384"/>
+            <a:off x="14338800" y="23907773"/>
             <a:ext cx="6451200" cy="50400"/>
           </a:xfrm>
           <a:prstGeom prst="rect">
@@ -7883,21 +7570,21 @@
       </p:sp>
       <p:pic>
         <p:nvPicPr>
-          <p:cNvPr id="143" name="Picture 142" descr="poster_label_supply.png"/>
+          <p:cNvPr id="135" name="Picture 134" descr="poster_label_supply.png"/>
           <p:cNvPicPr>
             <a:picLocks noChangeAspect="1"/>
           </p:cNvPicPr>
           <p:nvPr/>
         </p:nvPicPr>
         <p:blipFill>
-          <a:blip r:embed="rId17"/>
+          <a:blip r:embed="rId16"/>
           <a:stretch>
             <a:fillRect/>
           </a:stretch>
         </p:blipFill>
         <p:spPr>
           <a:xfrm>
-            <a:off x="14410800" y="23537784"/>
+            <a:off x="14410800" y="24030173"/>
             <a:ext cx="6307200" cy="3490494"/>
           </a:xfrm>
           <a:prstGeom prst="rect">
@@ -7907,13 +7594,13 @@
       </p:pic>
       <p:sp>
         <p:nvSpPr>
-          <p:cNvPr id="144" name="TextBox 143"/>
+          <p:cNvPr id="136" name="TextBox 135"/>
           <p:cNvSpPr txBox="1"/>
           <p:nvPr/>
         </p:nvSpPr>
         <p:spPr>
           <a:xfrm>
-            <a:off x="14338800" y="27172278"/>
+            <a:off x="14338800" y="27664667"/>
             <a:ext cx="6451200" cy="279806"/>
           </a:xfrm>
           <a:prstGeom prst="rect">
@@ -7949,14 +7636,14 @@
       </p:sp>
       <p:pic>
         <p:nvPicPr>
-          <p:cNvPr id="145" name="Picture 144" descr="qr_repo.png"/>
+          <p:cNvPr id="137" name="Picture 136" descr="qr_repo.png"/>
           <p:cNvPicPr>
             <a:picLocks noChangeAspect="1"/>
           </p:cNvPicPr>
           <p:nvPr/>
         </p:nvPicPr>
         <p:blipFill>
-          <a:blip r:embed="rId18"/>
+          <a:blip r:embed="rId17"/>
           <a:stretch>
             <a:fillRect/>
           </a:stretch>

--- a/deliverables/showcase/poster_v9_jiaming_wei.pptx
+++ b/deliverables/showcase/poster_v9_jiaming_wei.pptx
@@ -5146,14 +5146,14 @@
       </p:sp>
       <p:pic>
         <p:nvPicPr>
-          <p:cNvPr id="101" name="Picture 100" descr="lane_look_0.png"/>
+          <p:cNvPr id="101" name="Picture 100" descr="lane_read_0.png"/>
           <p:cNvPicPr>
             <a:picLocks noChangeAspect="1"/>
           </p:cNvPicPr>
           <p:nvPr/>
         </p:nvPicPr>
         <p:blipFill>
-          <a:blip r:embed="rId9"/>
+          <a:blip r:embed="rId6"/>
           <a:stretch>
             <a:fillRect/>
           </a:stretch>
@@ -5249,7 +5249,7 @@
                 </a:solidFill>
                 <a:latin typeface="Arial"/>
               </a:rPr>
-              <a:t>step 3 · click</a:t>
+              <a:t>step 2 · click</a:t>
             </a:r>
           </a:p>
         </p:txBody>
@@ -5291,7 +5291,7 @@
                 </a:solidFill>
                 <a:latin typeface="Arial"/>
               </a:rPr>
-              <a:t>$0.015 spent</a:t>
+              <a:t>$0.011 spent</a:t>
             </a:r>
           </a:p>
         </p:txBody>
@@ -5305,7 +5305,7 @@
           <p:nvPr/>
         </p:nvPicPr>
         <p:blipFill>
-          <a:blip r:embed="rId10"/>
+          <a:blip r:embed="rId9"/>
           <a:stretch>
             <a:fillRect/>
           </a:stretch>
@@ -5401,7 +5401,7 @@
                 </a:solidFill>
                 <a:latin typeface="Arial"/>
               </a:rPr>
-              <a:t>step 18 · scroll</a:t>
+              <a:t>step 13 · scroll</a:t>
             </a:r>
           </a:p>
         </p:txBody>
@@ -5443,21 +5443,21 @@
                 </a:solidFill>
                 <a:latin typeface="Arial"/>
               </a:rPr>
-              <a:t>$0.075 spent</a:t>
+              <a:t>$0.055 spent</a:t>
             </a:r>
           </a:p>
         </p:txBody>
       </p:sp>
       <p:pic>
         <p:nvPicPr>
-          <p:cNvPr id="109" name="Picture 108" descr="lane_look_0.png"/>
+          <p:cNvPr id="109" name="Picture 108" descr="lane_read_0.png"/>
           <p:cNvPicPr>
             <a:picLocks noChangeAspect="1"/>
           </p:cNvPicPr>
           <p:nvPr/>
         </p:nvPicPr>
         <p:blipFill>
-          <a:blip r:embed="rId9"/>
+          <a:blip r:embed="rId6"/>
           <a:stretch>
             <a:fillRect/>
           </a:stretch>
@@ -5553,7 +5553,7 @@
                 </a:solidFill>
                 <a:latin typeface="Arial"/>
               </a:rPr>
-              <a:t>step 20 · scroll</a:t>
+              <a:t>step 19 · click</a:t>
             </a:r>
           </a:p>
         </p:txBody>
@@ -5595,7 +5595,7 @@
                 </a:solidFill>
                 <a:latin typeface="Arial"/>
               </a:rPr>
-              <a:t>$0.083 · </a:t>
+              <a:t>$0.079 · </a:t>
             </a:r>
             <a:r>
               <a:rPr sz="1400" b="1" i="0">
@@ -5604,7 +5604,7 @@
                 </a:solidFill>
                 <a:latin typeface="Arial"/>
               </a:rPr>
-              <a:t>the first frame again</a:t>
+              <a:t>back on frame 1</a:t>
             </a:r>
           </a:p>
         </p:txBody>
@@ -5646,7 +5646,7 @@
                 </a:solidFill>
                 <a:latin typeface="Arial"/>
               </a:rPr>
-              <a:t>LOOK goes round in a circle</a:t>
+              <a:t>Frame 1 is the same page for both</a:t>
             </a:r>
             <a:r>
               <a:rPr sz="1550" b="0" i="0">
@@ -5655,7 +5655,25 @@
                 </a:solidFill>
                 <a:latin typeface="Arial"/>
               </a:rPr>
-              <a:t> — it ends on the page it started on, seventeen steps later. One recorded run per view; both outcomes repeat on an independent rerun.</a:t>
+              <a:t> — the runs are identical until step 3. Then READ finishes; </a:t>
+            </a:r>
+            <a:r>
+              <a:rPr sz="1550" b="1" i="0">
+                <a:solidFill>
+                  <a:srgbClr val="12162E"/>
+                </a:solidFill>
+                <a:latin typeface="Arial"/>
+              </a:rPr>
+              <a:t>LOOK ends up back on frame 1</a:t>
+            </a:r>
+            <a:r>
+              <a:rPr sz="1550" b="0" i="0">
+                <a:solidFill>
+                  <a:srgbClr val="12162E"/>
+                </a:solidFill>
+                <a:latin typeface="Arial"/>
+              </a:rPr>
+              <a:t>. One run per view; both outcomes repeat on a rerun.</a:t>
             </a:r>
           </a:p>
         </p:txBody>
@@ -5939,7 +5957,7 @@
           <p:nvPr/>
         </p:nvPicPr>
         <p:blipFill>
-          <a:blip r:embed="rId11"/>
+          <a:blip r:embed="rId10"/>
           <a:stretch>
             <a:fillRect/>
           </a:stretch>
@@ -6233,7 +6251,7 @@
           <p:nvPr/>
         </p:nvPicPr>
         <p:blipFill>
-          <a:blip r:embed="rId12"/>
+          <a:blip r:embed="rId11"/>
           <a:stretch>
             <a:fillRect/>
           </a:stretch>
@@ -6569,7 +6587,7 @@
           <p:nvPr/>
         </p:nvPicPr>
         <p:blipFill>
-          <a:blip r:embed="rId13"/>
+          <a:blip r:embed="rId12"/>
           <a:stretch>
             <a:fillRect/>
           </a:stretch>
@@ -6905,7 +6923,7 @@
           <p:nvPr/>
         </p:nvPicPr>
         <p:blipFill>
-          <a:blip r:embed="rId14"/>
+          <a:blip r:embed="rId13"/>
           <a:stretch>
             <a:fillRect/>
           </a:stretch>
@@ -7241,7 +7259,7 @@
           <p:nvPr/>
         </p:nvPicPr>
         <p:blipFill>
-          <a:blip r:embed="rId15"/>
+          <a:blip r:embed="rId14"/>
           <a:stretch>
             <a:fillRect/>
           </a:stretch>
@@ -7577,7 +7595,7 @@
           <p:nvPr/>
         </p:nvPicPr>
         <p:blipFill>
-          <a:blip r:embed="rId16"/>
+          <a:blip r:embed="rId15"/>
           <a:stretch>
             <a:fillRect/>
           </a:stretch>
@@ -7643,7 +7661,7 @@
           <p:nvPr/>
         </p:nvPicPr>
         <p:blipFill>
-          <a:blip r:embed="rId17"/>
+          <a:blip r:embed="rId16"/>
           <a:stretch>
             <a:fillRect/>
           </a:stretch>

--- a/deliverables/showcase/poster_v9_jiaming_wei.pptx
+++ b/deliverables/showcase/poster_v9_jiaming_wei.pptx
@@ -4543,7 +4543,7 @@
                 </a:solidFill>
                 <a:latin typeface="Arial"/>
               </a:rPr>
-              <a:t>step 2 · click</a:t>
+              <a:t>step 5 · type</a:t>
             </a:r>
           </a:p>
         </p:txBody>
@@ -4585,7 +4585,7 @@
                 </a:solidFill>
                 <a:latin typeface="Arial"/>
               </a:rPr>
-              <a:t>$0.012 spent</a:t>
+              <a:t>$0.024 spent</a:t>
             </a:r>
           </a:p>
         </p:txBody>
@@ -4695,7 +4695,7 @@
                 </a:solidFill>
                 <a:latin typeface="Arial"/>
               </a:rPr>
-              <a:t>step 5 · type</a:t>
+              <a:t>step 9 · scroll</a:t>
             </a:r>
           </a:p>
         </p:txBody>
@@ -4737,7 +4737,7 @@
                 </a:solidFill>
                 <a:latin typeface="Arial"/>
               </a:rPr>
-              <a:t>$0.024 spent</a:t>
+              <a:t>$0.069 spent</a:t>
             </a:r>
           </a:p>
         </p:txBody>
@@ -5146,14 +5146,14 @@
       </p:sp>
       <p:pic>
         <p:nvPicPr>
-          <p:cNvPr id="101" name="Picture 100" descr="lane_read_0.png"/>
+          <p:cNvPr id="101" name="Picture 100" descr="lane_look_0.png"/>
           <p:cNvPicPr>
             <a:picLocks noChangeAspect="1"/>
           </p:cNvPicPr>
           <p:nvPr/>
         </p:nvPicPr>
         <p:blipFill>
-          <a:blip r:embed="rId6"/>
+          <a:blip r:embed="rId9"/>
           <a:stretch>
             <a:fillRect/>
           </a:stretch>
@@ -5249,7 +5249,7 @@
                 </a:solidFill>
                 <a:latin typeface="Arial"/>
               </a:rPr>
-              <a:t>step 2 · click</a:t>
+              <a:t>step 3 · click</a:t>
             </a:r>
           </a:p>
         </p:txBody>
@@ -5291,7 +5291,7 @@
                 </a:solidFill>
                 <a:latin typeface="Arial"/>
               </a:rPr>
-              <a:t>$0.011 spent</a:t>
+              <a:t>$0.015 spent</a:t>
             </a:r>
           </a:p>
         </p:txBody>
@@ -5305,7 +5305,7 @@
           <p:nvPr/>
         </p:nvPicPr>
         <p:blipFill>
-          <a:blip r:embed="rId9"/>
+          <a:blip r:embed="rId10"/>
           <a:stretch>
             <a:fillRect/>
           </a:stretch>
@@ -5401,7 +5401,7 @@
                 </a:solidFill>
                 <a:latin typeface="Arial"/>
               </a:rPr>
-              <a:t>step 13 · scroll</a:t>
+              <a:t>step 18 · scroll</a:t>
             </a:r>
           </a:p>
         </p:txBody>
@@ -5443,21 +5443,21 @@
                 </a:solidFill>
                 <a:latin typeface="Arial"/>
               </a:rPr>
-              <a:t>$0.055 spent</a:t>
+              <a:t>$0.075 spent</a:t>
             </a:r>
           </a:p>
         </p:txBody>
       </p:sp>
       <p:pic>
         <p:nvPicPr>
-          <p:cNvPr id="109" name="Picture 108" descr="lane_read_0.png"/>
+          <p:cNvPr id="109" name="Picture 108" descr="lane_look_0.png"/>
           <p:cNvPicPr>
             <a:picLocks noChangeAspect="1"/>
           </p:cNvPicPr>
           <p:nvPr/>
         </p:nvPicPr>
         <p:blipFill>
-          <a:blip r:embed="rId6"/>
+          <a:blip r:embed="rId9"/>
           <a:stretch>
             <a:fillRect/>
           </a:stretch>
@@ -5553,7 +5553,7 @@
                 </a:solidFill>
                 <a:latin typeface="Arial"/>
               </a:rPr>
-              <a:t>step 19 · click</a:t>
+              <a:t>step 20 · scroll</a:t>
             </a:r>
           </a:p>
         </p:txBody>
@@ -5595,7 +5595,7 @@
                 </a:solidFill>
                 <a:latin typeface="Arial"/>
               </a:rPr>
-              <a:t>$0.079 · </a:t>
+              <a:t>$0.083 · </a:t>
             </a:r>
             <a:r>
               <a:rPr sz="1400" b="1" i="0">
@@ -5646,7 +5646,7 @@
                 </a:solidFill>
                 <a:latin typeface="Arial"/>
               </a:rPr>
-              <a:t>Frame 1 is the same page for both</a:t>
+              <a:t>Both start on the same form.</a:t>
             </a:r>
             <a:r>
               <a:rPr sz="1550" b="0" i="0">
@@ -5655,7 +5655,7 @@
                 </a:solidFill>
                 <a:latin typeface="Arial"/>
               </a:rPr>
-              <a:t> — the runs are identical until step 3. Then READ finishes; </a:t>
+              <a:t> Then READ finishes it, while </a:t>
             </a:r>
             <a:r>
               <a:rPr sz="1550" b="1" i="0">
@@ -5664,7 +5664,7 @@
                 </a:solidFill>
                 <a:latin typeface="Arial"/>
               </a:rPr>
-              <a:t>LOOK ends up back on frame 1</a:t>
+              <a:t>LOOK ends up back on the page it started from</a:t>
             </a:r>
             <a:r>
               <a:rPr sz="1550" b="0" i="0">
@@ -5673,7 +5673,7 @@
                 </a:solidFill>
                 <a:latin typeface="Arial"/>
               </a:rPr>
-              <a:t>. One run per view; both outcomes repeat on a rerun.</a:t>
+              <a:t>. One recorded run per view; both outcomes repeat on an independent rerun.</a:t>
             </a:r>
           </a:p>
         </p:txBody>
@@ -5957,7 +5957,7 @@
           <p:nvPr/>
         </p:nvPicPr>
         <p:blipFill>
-          <a:blip r:embed="rId10"/>
+          <a:blip r:embed="rId11"/>
           <a:stretch>
             <a:fillRect/>
           </a:stretch>
@@ -6251,7 +6251,7 @@
           <p:nvPr/>
         </p:nvPicPr>
         <p:blipFill>
-          <a:blip r:embed="rId11"/>
+          <a:blip r:embed="rId12"/>
           <a:stretch>
             <a:fillRect/>
           </a:stretch>
@@ -6587,7 +6587,7 @@
           <p:nvPr/>
         </p:nvPicPr>
         <p:blipFill>
-          <a:blip r:embed="rId12"/>
+          <a:blip r:embed="rId13"/>
           <a:stretch>
             <a:fillRect/>
           </a:stretch>
@@ -6923,7 +6923,7 @@
           <p:nvPr/>
         </p:nvPicPr>
         <p:blipFill>
-          <a:blip r:embed="rId13"/>
+          <a:blip r:embed="rId14"/>
           <a:stretch>
             <a:fillRect/>
           </a:stretch>
@@ -7259,7 +7259,7 @@
           <p:nvPr/>
         </p:nvPicPr>
         <p:blipFill>
-          <a:blip r:embed="rId14"/>
+          <a:blip r:embed="rId15"/>
           <a:stretch>
             <a:fillRect/>
           </a:stretch>
@@ -7595,7 +7595,7 @@
           <p:nvPr/>
         </p:nvPicPr>
         <p:blipFill>
-          <a:blip r:embed="rId15"/>
+          <a:blip r:embed="rId16"/>
           <a:stretch>
             <a:fillRect/>
           </a:stretch>
@@ -7661,7 +7661,7 @@
           <p:nvPr/>
         </p:nvPicPr>
         <p:blipFill>
-          <a:blip r:embed="rId16"/>
+          <a:blip r:embed="rId17"/>
           <a:stretch>
             <a:fillRect/>
           </a:stretch>

--- a/deliverables/showcase/poster_v9_jiaming_wei.pptx
+++ b/deliverables/showcase/poster_v9_jiaming_wei.pptx
@@ -4543,7 +4543,7 @@
                 </a:solidFill>
                 <a:latin typeface="Arial"/>
               </a:rPr>
-              <a:t>step 5 · type</a:t>
+              <a:t>step 4 · type →</a:t>
             </a:r>
           </a:p>
         </p:txBody>
@@ -4585,7 +4585,7 @@
                 </a:solidFill>
                 <a:latin typeface="Arial"/>
               </a:rPr>
-              <a:t>$0.024 spent</a:t>
+              <a:t>$0.020 spent</a:t>
             </a:r>
           </a:p>
         </p:txBody>
@@ -4695,7 +4695,7 @@
                 </a:solidFill>
                 <a:latin typeface="Arial"/>
               </a:rPr>
-              <a:t>step 9 · scroll</a:t>
+              <a:t>step 8 · type →</a:t>
             </a:r>
           </a:p>
         </p:txBody>
@@ -4737,7 +4737,7 @@
                 </a:solidFill>
                 <a:latin typeface="Arial"/>
               </a:rPr>
-              <a:t>$0.069 spent</a:t>
+              <a:t>$0.050 spent</a:t>
             </a:r>
           </a:p>
         </p:txBody>
@@ -4847,7 +4847,7 @@
                 </a:solidFill>
                 <a:latin typeface="Arial"/>
               </a:rPr>
-              <a:t>step 11 · finish</a:t>
+              <a:t>step 10 · click →</a:t>
             </a:r>
           </a:p>
         </p:txBody>
@@ -4889,7 +4889,7 @@
                 </a:solidFill>
                 <a:latin typeface="Arial"/>
               </a:rPr>
-              <a:t>$0.090 spent</a:t>
+              <a:t>$0.086 spent</a:t>
             </a:r>
           </a:p>
         </p:txBody>
@@ -5249,7 +5249,7 @@
                 </a:solidFill>
                 <a:latin typeface="Arial"/>
               </a:rPr>
-              <a:t>step 3 · click</a:t>
+              <a:t>step 2 · click →</a:t>
             </a:r>
           </a:p>
         </p:txBody>
@@ -5291,7 +5291,7 @@
                 </a:solidFill>
                 <a:latin typeface="Arial"/>
               </a:rPr>
-              <a:t>$0.015 spent</a:t>
+              <a:t>$0.011 spent</a:t>
             </a:r>
           </a:p>
         </p:txBody>
@@ -5401,7 +5401,7 @@
                 </a:solidFill>
                 <a:latin typeface="Arial"/>
               </a:rPr>
-              <a:t>step 18 · scroll</a:t>
+              <a:t>step 17 · click →</a:t>
             </a:r>
           </a:p>
         </p:txBody>
@@ -5443,7 +5443,7 @@
                 </a:solidFill>
                 <a:latin typeface="Arial"/>
               </a:rPr>
-              <a:t>$0.075 spent</a:t>
+              <a:t>$0.071 spent</a:t>
             </a:r>
           </a:p>
         </p:txBody>
@@ -5553,7 +5553,7 @@
                 </a:solidFill>
                 <a:latin typeface="Arial"/>
               </a:rPr>
-              <a:t>step 20 · scroll</a:t>
+              <a:t>step 19 · click →</a:t>
             </a:r>
           </a:p>
         </p:txBody>
@@ -5595,7 +5595,7 @@
                 </a:solidFill>
                 <a:latin typeface="Arial"/>
               </a:rPr>
-              <a:t>$0.083 · </a:t>
+              <a:t>$0.079 · </a:t>
             </a:r>
             <a:r>
               <a:rPr sz="1400" b="1" i="0">

--- a/deliverables/showcase/poster_v9_jiaming_wei.pptx
+++ b/deliverables/showcase/poster_v9_jiaming_wei.pptx
@@ -5439,11 +5439,20 @@
             <a:r>
               <a:rPr sz="1400" b="0" i="0">
                 <a:solidFill>
-                  <a:srgbClr val="5D6787"/>
+                  <a:srgbClr val="C2352B"/>
                 </a:solidFill>
                 <a:latin typeface="Arial"/>
               </a:rPr>
-              <a:t>$0.071 spent</a:t>
+              <a:t>$0.071 · </a:t>
+            </a:r>
+            <a:r>
+              <a:rPr sz="1400" b="1" i="0">
+                <a:solidFill>
+                  <a:srgbClr val="C2352B"/>
+                </a:solidFill>
+                <a:latin typeface="Arial"/>
+              </a:rPr>
+              <a:t>left the form</a:t>
             </a:r>
           </a:p>
         </p:txBody>

--- a/deliverables/showcase/poster_v9_jiaming_wei.pptx
+++ b/deliverables/showcase/poster_v9_jiaming_wei.pptx
@@ -3958,8 +3958,8 @@
         </p:blipFill>
         <p:spPr>
           <a:xfrm>
-            <a:off x="727200" y="5328000"/>
-            <a:ext cx="20062800" cy="7460256"/>
+            <a:off x="1429398" y="5328000"/>
+            <a:ext cx="18658404" cy="6938038"/>
           </a:xfrm>
           <a:prstGeom prst="rect">
             <a:avLst/>
@@ -3974,7 +3974,7 @@
         </p:nvSpPr>
         <p:spPr>
           <a:xfrm>
-            <a:off x="727200" y="13076255"/>
+            <a:off x="727200" y="12554038"/>
             <a:ext cx="177988" cy="177988"/>
           </a:xfrm>
           <a:prstGeom prst="rect">
@@ -4019,7 +4019,7 @@
         </p:nvSpPr>
         <p:spPr>
           <a:xfrm>
-            <a:off x="1032323" y="13033055"/>
+            <a:off x="1032323" y="12510838"/>
             <a:ext cx="6144827" cy="238912"/>
           </a:xfrm>
           <a:prstGeom prst="rect">
@@ -4064,7 +4064,7 @@
         </p:nvSpPr>
         <p:spPr>
           <a:xfrm>
-            <a:off x="727200" y="13394091"/>
+            <a:off x="727200" y="12871874"/>
             <a:ext cx="1169636" cy="35597"/>
           </a:xfrm>
           <a:prstGeom prst="rect">
@@ -4109,7 +4109,7 @@
         </p:nvSpPr>
         <p:spPr>
           <a:xfrm>
-            <a:off x="1896836" y="13404262"/>
+            <a:off x="1896836" y="12882045"/>
             <a:ext cx="18893164" cy="15256"/>
           </a:xfrm>
           <a:prstGeom prst="rect">
@@ -4154,7 +4154,7 @@
         </p:nvSpPr>
         <p:spPr>
           <a:xfrm>
-            <a:off x="727200" y="13616255"/>
+            <a:off x="727200" y="13094038"/>
             <a:ext cx="20062800" cy="296265"/>
           </a:xfrm>
           <a:prstGeom prst="rect">
@@ -4196,7 +4196,7 @@
         </p:nvSpPr>
         <p:spPr>
           <a:xfrm>
-            <a:off x="727200" y="14020520"/>
+            <a:off x="727200" y="13498303"/>
             <a:ext cx="86400" cy="2503275"/>
           </a:xfrm>
           <a:prstGeom prst="rect">
@@ -4240,7 +4240,7 @@
         </p:nvSpPr>
         <p:spPr>
           <a:xfrm>
-            <a:off x="907200" y="14056520"/>
+            <a:off x="907200" y="13534303"/>
             <a:ext cx="1440000" cy="360000"/>
           </a:xfrm>
           <a:prstGeom prst="rect">
@@ -4282,7 +4282,7 @@
         </p:nvSpPr>
         <p:spPr>
           <a:xfrm>
-            <a:off x="907200" y="14452520"/>
+            <a:off x="907200" y="13930303"/>
             <a:ext cx="1440000" cy="504000"/>
           </a:xfrm>
           <a:prstGeom prst="rect">
@@ -4324,7 +4324,7 @@
         </p:nvSpPr>
         <p:spPr>
           <a:xfrm>
-            <a:off x="907200" y="15028520"/>
+            <a:off x="907200" y="14506303"/>
             <a:ext cx="1440000" cy="648000"/>
           </a:xfrm>
           <a:prstGeom prst="rect">
@@ -4404,7 +4404,7 @@
         </p:nvSpPr>
         <p:spPr>
           <a:xfrm>
-            <a:off x="907200" y="15712520"/>
+            <a:off x="907200" y="15190303"/>
             <a:ext cx="1440000" cy="360000"/>
           </a:xfrm>
           <a:prstGeom prst="rect">
@@ -4454,7 +4454,7 @@
         </p:blipFill>
         <p:spPr>
           <a:xfrm>
-            <a:off x="2383200" y="14020520"/>
+            <a:off x="2383200" y="13498303"/>
             <a:ext cx="6027600" cy="1963275"/>
           </a:xfrm>
           <a:prstGeom prst="rect">
@@ -4470,7 +4470,7 @@
         </p:nvSpPr>
         <p:spPr>
           <a:xfrm>
-            <a:off x="2383200" y="14020520"/>
+            <a:off x="2383200" y="13498303"/>
             <a:ext cx="6027600" cy="1963275"/>
           </a:xfrm>
           <a:prstGeom prst="rect">
@@ -4514,7 +4514,7 @@
         </p:nvSpPr>
         <p:spPr>
           <a:xfrm>
-            <a:off x="2383200" y="16037795"/>
+            <a:off x="2383200" y="15515578"/>
             <a:ext cx="6063600" cy="252000"/>
           </a:xfrm>
           <a:prstGeom prst="rect">
@@ -4556,7 +4556,7 @@
         </p:nvSpPr>
         <p:spPr>
           <a:xfrm>
-            <a:off x="2383200" y="16271795"/>
+            <a:off x="2383200" y="15749578"/>
             <a:ext cx="6063600" cy="252000"/>
           </a:xfrm>
           <a:prstGeom prst="rect">
@@ -4606,7 +4606,7 @@
         </p:blipFill>
         <p:spPr>
           <a:xfrm>
-            <a:off x="8554800" y="14020520"/>
+            <a:off x="8554800" y="13498303"/>
             <a:ext cx="6027600" cy="1963275"/>
           </a:xfrm>
           <a:prstGeom prst="rect">
@@ -4622,7 +4622,7 @@
         </p:nvSpPr>
         <p:spPr>
           <a:xfrm>
-            <a:off x="8554800" y="14020520"/>
+            <a:off x="8554800" y="13498303"/>
             <a:ext cx="6027600" cy="1963275"/>
           </a:xfrm>
           <a:prstGeom prst="rect">
@@ -4666,7 +4666,7 @@
         </p:nvSpPr>
         <p:spPr>
           <a:xfrm>
-            <a:off x="8554800" y="16037795"/>
+            <a:off x="8554800" y="15515578"/>
             <a:ext cx="6063600" cy="252000"/>
           </a:xfrm>
           <a:prstGeom prst="rect">
@@ -4708,7 +4708,7 @@
         </p:nvSpPr>
         <p:spPr>
           <a:xfrm>
-            <a:off x="8554800" y="16271795"/>
+            <a:off x="8554800" y="15749578"/>
             <a:ext cx="6063600" cy="252000"/>
           </a:xfrm>
           <a:prstGeom prst="rect">
@@ -4758,7 +4758,7 @@
         </p:blipFill>
         <p:spPr>
           <a:xfrm>
-            <a:off x="14726400" y="14020520"/>
+            <a:off x="14726400" y="13498303"/>
             <a:ext cx="6027600" cy="1963275"/>
           </a:xfrm>
           <a:prstGeom prst="rect">
@@ -4774,16 +4774,16 @@
         </p:nvSpPr>
         <p:spPr>
           <a:xfrm>
-            <a:off x="14726400" y="14020520"/>
+            <a:off x="14726400" y="13498303"/>
             <a:ext cx="6027600" cy="1963275"/>
           </a:xfrm>
           <a:prstGeom prst="rect">
             <a:avLst/>
           </a:prstGeom>
           <a:noFill/>
-          <a:ln w="8890">
+          <a:ln w="27940">
             <a:solidFill>
-              <a:srgbClr val="C9CFE0"/>
+              <a:srgbClr val="14855F"/>
             </a:solidFill>
           </a:ln>
           <a:effectLst/>
@@ -4818,7 +4818,7 @@
         </p:nvSpPr>
         <p:spPr>
           <a:xfrm>
-            <a:off x="14726400" y="16037795"/>
+            <a:off x="14726400" y="15515578"/>
             <a:ext cx="6063600" cy="252000"/>
           </a:xfrm>
           <a:prstGeom prst="rect">
@@ -4860,7 +4860,7 @@
         </p:nvSpPr>
         <p:spPr>
           <a:xfrm>
-            <a:off x="14726400" y="16271795"/>
+            <a:off x="14726400" y="15749578"/>
             <a:ext cx="6063600" cy="252000"/>
           </a:xfrm>
           <a:prstGeom prst="rect">
@@ -4902,7 +4902,7 @@
         </p:nvSpPr>
         <p:spPr>
           <a:xfrm>
-            <a:off x="727200" y="16559795"/>
+            <a:off x="727200" y="16037578"/>
             <a:ext cx="86400" cy="2503275"/>
           </a:xfrm>
           <a:prstGeom prst="rect">
@@ -4946,7 +4946,7 @@
         </p:nvSpPr>
         <p:spPr>
           <a:xfrm>
-            <a:off x="907200" y="16595795"/>
+            <a:off x="907200" y="16073578"/>
             <a:ext cx="1440000" cy="360000"/>
           </a:xfrm>
           <a:prstGeom prst="rect">
@@ -4988,7 +4988,7 @@
         </p:nvSpPr>
         <p:spPr>
           <a:xfrm>
-            <a:off x="907200" y="16991795"/>
+            <a:off x="907200" y="16469578"/>
             <a:ext cx="1440000" cy="504000"/>
           </a:xfrm>
           <a:prstGeom prst="rect">
@@ -5030,7 +5030,7 @@
         </p:nvSpPr>
         <p:spPr>
           <a:xfrm>
-            <a:off x="907200" y="17567795"/>
+            <a:off x="907200" y="17045578"/>
             <a:ext cx="1440000" cy="648000"/>
           </a:xfrm>
           <a:prstGeom prst="rect">
@@ -5110,7 +5110,7 @@
         </p:nvSpPr>
         <p:spPr>
           <a:xfrm>
-            <a:off x="907200" y="18251795"/>
+            <a:off x="907200" y="17729578"/>
             <a:ext cx="1440000" cy="360000"/>
           </a:xfrm>
           <a:prstGeom prst="rect">
@@ -5160,7 +5160,7 @@
         </p:blipFill>
         <p:spPr>
           <a:xfrm>
-            <a:off x="2383200" y="16559795"/>
+            <a:off x="2383200" y="16037578"/>
             <a:ext cx="6027600" cy="1963275"/>
           </a:xfrm>
           <a:prstGeom prst="rect">
@@ -5176,7 +5176,7 @@
         </p:nvSpPr>
         <p:spPr>
           <a:xfrm>
-            <a:off x="2383200" y="16559795"/>
+            <a:off x="2383200" y="16037578"/>
             <a:ext cx="6027600" cy="1963275"/>
           </a:xfrm>
           <a:prstGeom prst="rect">
@@ -5220,7 +5220,7 @@
         </p:nvSpPr>
         <p:spPr>
           <a:xfrm>
-            <a:off x="2383200" y="18577070"/>
+            <a:off x="2383200" y="18054853"/>
             <a:ext cx="6063600" cy="252000"/>
           </a:xfrm>
           <a:prstGeom prst="rect">
@@ -5262,7 +5262,7 @@
         </p:nvSpPr>
         <p:spPr>
           <a:xfrm>
-            <a:off x="2383200" y="18811070"/>
+            <a:off x="2383200" y="18288853"/>
             <a:ext cx="6063600" cy="252000"/>
           </a:xfrm>
           <a:prstGeom prst="rect">
@@ -5312,7 +5312,7 @@
         </p:blipFill>
         <p:spPr>
           <a:xfrm>
-            <a:off x="8554800" y="16559795"/>
+            <a:off x="8554800" y="16037578"/>
             <a:ext cx="6027600" cy="1963275"/>
           </a:xfrm>
           <a:prstGeom prst="rect">
@@ -5328,7 +5328,7 @@
         </p:nvSpPr>
         <p:spPr>
           <a:xfrm>
-            <a:off x="8554800" y="16559795"/>
+            <a:off x="8554800" y="16037578"/>
             <a:ext cx="6027600" cy="1963275"/>
           </a:xfrm>
           <a:prstGeom prst="rect">
@@ -5372,7 +5372,7 @@
         </p:nvSpPr>
         <p:spPr>
           <a:xfrm>
-            <a:off x="8554800" y="18577070"/>
+            <a:off x="8554800" y="18054853"/>
             <a:ext cx="6063600" cy="252000"/>
           </a:xfrm>
           <a:prstGeom prst="rect">
@@ -5414,7 +5414,7 @@
         </p:nvSpPr>
         <p:spPr>
           <a:xfrm>
-            <a:off x="8554800" y="18811070"/>
+            <a:off x="8554800" y="18288853"/>
             <a:ext cx="6063600" cy="252000"/>
           </a:xfrm>
           <a:prstGeom prst="rect">
@@ -5473,7 +5473,7 @@
         </p:blipFill>
         <p:spPr>
           <a:xfrm>
-            <a:off x="14726400" y="16559795"/>
+            <a:off x="14726400" y="16037578"/>
             <a:ext cx="6027600" cy="1963275"/>
           </a:xfrm>
           <a:prstGeom prst="rect">
@@ -5489,16 +5489,16 @@
         </p:nvSpPr>
         <p:spPr>
           <a:xfrm>
-            <a:off x="14726400" y="16559795"/>
+            <a:off x="14726400" y="16037578"/>
             <a:ext cx="6027600" cy="1963275"/>
           </a:xfrm>
           <a:prstGeom prst="rect">
             <a:avLst/>
           </a:prstGeom>
           <a:noFill/>
-          <a:ln w="8890">
+          <a:ln w="27940">
             <a:solidFill>
-              <a:srgbClr val="C9CFE0"/>
+              <a:srgbClr val="C2352B"/>
             </a:solidFill>
           </a:ln>
           <a:effectLst/>
@@ -5533,7 +5533,7 @@
         </p:nvSpPr>
         <p:spPr>
           <a:xfrm>
-            <a:off x="14726400" y="18577070"/>
+            <a:off x="14726400" y="18054853"/>
             <a:ext cx="6063600" cy="252000"/>
           </a:xfrm>
           <a:prstGeom prst="rect">
@@ -5575,7 +5575,7 @@
         </p:nvSpPr>
         <p:spPr>
           <a:xfrm>
-            <a:off x="14726400" y="18811070"/>
+            <a:off x="14726400" y="18288853"/>
             <a:ext cx="6063600" cy="252000"/>
           </a:xfrm>
           <a:prstGeom prst="rect">
@@ -5626,7 +5626,7 @@
         </p:nvSpPr>
         <p:spPr>
           <a:xfrm>
-            <a:off x="727200" y="19027070"/>
+            <a:off x="727200" y="18504853"/>
             <a:ext cx="20062800" cy="255117"/>
           </a:xfrm>
           <a:prstGeom prst="rect">
@@ -5695,7 +5695,7 @@
         </p:nvSpPr>
         <p:spPr>
           <a:xfrm>
-            <a:off x="727200" y="19498187"/>
+            <a:off x="727200" y="18975970"/>
             <a:ext cx="177988" cy="177988"/>
           </a:xfrm>
           <a:prstGeom prst="rect">
@@ -5740,7 +5740,7 @@
         </p:nvSpPr>
         <p:spPr>
           <a:xfrm>
-            <a:off x="1032323" y="19454987"/>
+            <a:off x="1032323" y="18932770"/>
             <a:ext cx="6144827" cy="238912"/>
           </a:xfrm>
           <a:prstGeom prst="rect">
@@ -5785,7 +5785,7 @@
         </p:nvSpPr>
         <p:spPr>
           <a:xfrm>
-            <a:off x="727200" y="19816023"/>
+            <a:off x="727200" y="19293806"/>
             <a:ext cx="1169636" cy="35597"/>
           </a:xfrm>
           <a:prstGeom prst="rect">
@@ -5830,7 +5830,7 @@
         </p:nvSpPr>
         <p:spPr>
           <a:xfrm>
-            <a:off x="1896836" y="19826194"/>
+            <a:off x="1896836" y="19303977"/>
             <a:ext cx="5281564" cy="15256"/>
           </a:xfrm>
           <a:prstGeom prst="rect">
@@ -5875,8 +5875,8 @@
         </p:nvSpPr>
         <p:spPr>
           <a:xfrm>
-            <a:off x="2146464" y="20038187"/>
-            <a:ext cx="3612672" cy="2950104"/>
+            <a:off x="1501344" y="19515970"/>
+            <a:ext cx="4902912" cy="3975141"/>
           </a:xfrm>
           <a:prstGeom prst="rect">
             <a:avLst/>
@@ -5921,8 +5921,8 @@
         </p:nvSpPr>
         <p:spPr>
           <a:xfrm>
-            <a:off x="2146464" y="20038187"/>
-            <a:ext cx="3612672" cy="50400"/>
+            <a:off x="1501344" y="19515970"/>
+            <a:ext cx="4902912" cy="50400"/>
           </a:xfrm>
           <a:prstGeom prst="rect">
             <a:avLst/>
@@ -5973,8 +5973,8 @@
         </p:blipFill>
         <p:spPr>
           <a:xfrm>
-            <a:off x="2218464" y="20160587"/>
-            <a:ext cx="3468672" cy="2755704"/>
+            <a:off x="1573344" y="19638370"/>
+            <a:ext cx="4758912" cy="3780742"/>
           </a:xfrm>
           <a:prstGeom prst="rect">
             <a:avLst/>
@@ -5989,7 +5989,7 @@
         </p:nvSpPr>
         <p:spPr>
           <a:xfrm>
-            <a:off x="7534800" y="19498187"/>
+            <a:off x="7534800" y="18975970"/>
             <a:ext cx="177988" cy="177988"/>
           </a:xfrm>
           <a:prstGeom prst="rect">
@@ -6034,7 +6034,7 @@
         </p:nvSpPr>
         <p:spPr>
           <a:xfrm>
-            <a:off x="7839923" y="19454987"/>
+            <a:off x="7839923" y="18932770"/>
             <a:ext cx="6144827" cy="238912"/>
           </a:xfrm>
           <a:prstGeom prst="rect">
@@ -6079,7 +6079,7 @@
         </p:nvSpPr>
         <p:spPr>
           <a:xfrm>
-            <a:off x="7534800" y="19816023"/>
+            <a:off x="7534800" y="19293806"/>
             <a:ext cx="1169636" cy="35597"/>
           </a:xfrm>
           <a:prstGeom prst="rect">
@@ -6124,7 +6124,7 @@
         </p:nvSpPr>
         <p:spPr>
           <a:xfrm>
-            <a:off x="8704436" y="19826194"/>
+            <a:off x="8704436" y="19303977"/>
             <a:ext cx="5281564" cy="15256"/>
           </a:xfrm>
           <a:prstGeom prst="rect">
@@ -6169,8 +6169,8 @@
         </p:nvSpPr>
         <p:spPr>
           <a:xfrm>
-            <a:off x="7986384" y="20038187"/>
-            <a:ext cx="5548032" cy="2385652"/>
+            <a:off x="7534800" y="19515970"/>
+            <a:ext cx="6451200" cy="2362693"/>
           </a:xfrm>
           <a:prstGeom prst="rect">
             <a:avLst/>
@@ -6215,8 +6215,8 @@
         </p:nvSpPr>
         <p:spPr>
           <a:xfrm>
-            <a:off x="7986384" y="20038187"/>
-            <a:ext cx="5548032" cy="50400"/>
+            <a:off x="7534800" y="19515970"/>
+            <a:ext cx="6451200" cy="50400"/>
           </a:xfrm>
           <a:prstGeom prst="rect">
             <a:avLst/>
@@ -6267,8 +6267,8 @@
         </p:blipFill>
         <p:spPr>
           <a:xfrm>
-            <a:off x="8058384" y="20160587"/>
-            <a:ext cx="5404032" cy="2191253"/>
+            <a:off x="7606800" y="19638370"/>
+            <a:ext cx="6307200" cy="2168293"/>
           </a:xfrm>
           <a:prstGeom prst="rect">
             <a:avLst/>
@@ -6283,7 +6283,7 @@
         </p:nvSpPr>
         <p:spPr>
           <a:xfrm>
-            <a:off x="7534800" y="22495839"/>
+            <a:off x="7534800" y="21950663"/>
             <a:ext cx="6451200" cy="279806"/>
           </a:xfrm>
           <a:prstGeom prst="rect">
@@ -6325,7 +6325,7 @@
         </p:nvSpPr>
         <p:spPr>
           <a:xfrm>
-            <a:off x="14338800" y="19498187"/>
+            <a:off x="14338800" y="18975970"/>
             <a:ext cx="177988" cy="177988"/>
           </a:xfrm>
           <a:prstGeom prst="rect">
@@ -6370,7 +6370,7 @@
         </p:nvSpPr>
         <p:spPr>
           <a:xfrm>
-            <a:off x="14643923" y="19454987"/>
+            <a:off x="14643923" y="18932770"/>
             <a:ext cx="6144827" cy="238912"/>
           </a:xfrm>
           <a:prstGeom prst="rect">
@@ -6415,7 +6415,7 @@
         </p:nvSpPr>
         <p:spPr>
           <a:xfrm>
-            <a:off x="14338800" y="19816023"/>
+            <a:off x="14338800" y="19293806"/>
             <a:ext cx="1169636" cy="35597"/>
           </a:xfrm>
           <a:prstGeom prst="rect">
@@ -6460,7 +6460,7 @@
         </p:nvSpPr>
         <p:spPr>
           <a:xfrm>
-            <a:off x="15508436" y="19826194"/>
+            <a:off x="15508436" y="19303977"/>
             <a:ext cx="5281564" cy="15256"/>
           </a:xfrm>
           <a:prstGeom prst="rect">
@@ -6505,7 +6505,7 @@
         </p:nvSpPr>
         <p:spPr>
           <a:xfrm>
-            <a:off x="14338800" y="20038187"/>
+            <a:off x="14338800" y="19515970"/>
             <a:ext cx="6451200" cy="2581780"/>
           </a:xfrm>
           <a:prstGeom prst="rect">
@@ -6551,7 +6551,7 @@
         </p:nvSpPr>
         <p:spPr>
           <a:xfrm>
-            <a:off x="14338800" y="20038187"/>
+            <a:off x="14338800" y="19515970"/>
             <a:ext cx="6451200" cy="50400"/>
           </a:xfrm>
           <a:prstGeom prst="rect">
@@ -6603,7 +6603,7 @@
         </p:blipFill>
         <p:spPr>
           <a:xfrm>
-            <a:off x="14410800" y="20160587"/>
+            <a:off x="14410800" y="19638370"/>
             <a:ext cx="6307200" cy="2387379"/>
           </a:xfrm>
           <a:prstGeom prst="rect">
@@ -6619,7 +6619,7 @@
         </p:nvSpPr>
         <p:spPr>
           <a:xfrm>
-            <a:off x="14338800" y="22691967"/>
+            <a:off x="14338800" y="22169750"/>
             <a:ext cx="6451200" cy="279806"/>
           </a:xfrm>
           <a:prstGeom prst="rect">
@@ -6661,7 +6661,7 @@
         </p:nvSpPr>
         <p:spPr>
           <a:xfrm>
-            <a:off x="727200" y="23367773"/>
+            <a:off x="727200" y="23815111"/>
             <a:ext cx="177988" cy="177988"/>
           </a:xfrm>
           <a:prstGeom prst="rect">
@@ -6706,7 +6706,7 @@
         </p:nvSpPr>
         <p:spPr>
           <a:xfrm>
-            <a:off x="1032323" y="23324573"/>
+            <a:off x="1032323" y="23771911"/>
             <a:ext cx="6144827" cy="238912"/>
           </a:xfrm>
           <a:prstGeom prst="rect">
@@ -6751,7 +6751,7 @@
         </p:nvSpPr>
         <p:spPr>
           <a:xfrm>
-            <a:off x="727200" y="23685609"/>
+            <a:off x="727200" y="24132947"/>
             <a:ext cx="1169636" cy="35597"/>
           </a:xfrm>
           <a:prstGeom prst="rect">
@@ -6796,7 +6796,7 @@
         </p:nvSpPr>
         <p:spPr>
           <a:xfrm>
-            <a:off x="1896836" y="23695780"/>
+            <a:off x="1896836" y="24143118"/>
             <a:ext cx="5281564" cy="15256"/>
           </a:xfrm>
           <a:prstGeom prst="rect">
@@ -6841,8 +6841,8 @@
         </p:nvSpPr>
         <p:spPr>
           <a:xfrm>
-            <a:off x="727200" y="23907773"/>
-            <a:ext cx="6451200" cy="3146936"/>
+            <a:off x="727200" y="24355111"/>
+            <a:ext cx="6451200" cy="2659868"/>
           </a:xfrm>
           <a:prstGeom prst="rect">
             <a:avLst/>
@@ -6887,7 +6887,7 @@
         </p:nvSpPr>
         <p:spPr>
           <a:xfrm>
-            <a:off x="727200" y="23907773"/>
+            <a:off x="727200" y="24355111"/>
             <a:ext cx="6451200" cy="50400"/>
           </a:xfrm>
           <a:prstGeom prst="rect">
@@ -6939,8 +6939,8 @@
         </p:blipFill>
         <p:spPr>
           <a:xfrm>
-            <a:off x="799200" y="24030173"/>
-            <a:ext cx="6307200" cy="2952536"/>
+            <a:off x="799200" y="24477511"/>
+            <a:ext cx="6307200" cy="2465468"/>
           </a:xfrm>
           <a:prstGeom prst="rect">
             <a:avLst/>
@@ -6955,7 +6955,7 @@
         </p:nvSpPr>
         <p:spPr>
           <a:xfrm>
-            <a:off x="727200" y="27126709"/>
+            <a:off x="727200" y="27086979"/>
             <a:ext cx="6451200" cy="559612"/>
           </a:xfrm>
           <a:prstGeom prst="rect">
@@ -6984,7 +6984,7 @@
                 </a:solidFill>
                 <a:latin typeface="Arial"/>
               </a:rPr>
-              <a:t>One side dies of something you can name; the other never arrives.</a:t>
+              <a:t>Text-only skews toward early give-up; image-only toward stalled progress.</a:t>
             </a:r>
           </a:p>
         </p:txBody>
@@ -6997,7 +6997,7 @@
         </p:nvSpPr>
         <p:spPr>
           <a:xfrm>
-            <a:off x="7534800" y="23367773"/>
+            <a:off x="7534800" y="23815111"/>
             <a:ext cx="177988" cy="177988"/>
           </a:xfrm>
           <a:prstGeom prst="rect">
@@ -7042,7 +7042,7 @@
         </p:nvSpPr>
         <p:spPr>
           <a:xfrm>
-            <a:off x="7839923" y="23324573"/>
+            <a:off x="7839923" y="23771911"/>
             <a:ext cx="6144827" cy="238912"/>
           </a:xfrm>
           <a:prstGeom prst="rect">
@@ -7087,7 +7087,7 @@
         </p:nvSpPr>
         <p:spPr>
           <a:xfrm>
-            <a:off x="7534800" y="23685609"/>
+            <a:off x="7534800" y="24132947"/>
             <a:ext cx="1169636" cy="35597"/>
           </a:xfrm>
           <a:prstGeom prst="rect">
@@ -7132,7 +7132,7 @@
         </p:nvSpPr>
         <p:spPr>
           <a:xfrm>
-            <a:off x="8704436" y="23695780"/>
+            <a:off x="8704436" y="24143118"/>
             <a:ext cx="5281564" cy="15256"/>
           </a:xfrm>
           <a:prstGeom prst="rect">
@@ -7177,8 +7177,8 @@
         </p:nvSpPr>
         <p:spPr>
           <a:xfrm>
-            <a:off x="8244432" y="23907773"/>
-            <a:ext cx="5031936" cy="3727595"/>
+            <a:off x="7696080" y="24355111"/>
+            <a:ext cx="6128640" cy="2932703"/>
           </a:xfrm>
           <a:prstGeom prst="rect">
             <a:avLst/>
@@ -7223,8 +7223,8 @@
         </p:nvSpPr>
         <p:spPr>
           <a:xfrm>
-            <a:off x="8244432" y="23907773"/>
-            <a:ext cx="5031936" cy="50400"/>
+            <a:off x="7696080" y="24355111"/>
+            <a:ext cx="6128640" cy="50400"/>
           </a:xfrm>
           <a:prstGeom prst="rect">
             <a:avLst/>
@@ -7261,7 +7261,7 @@
       </p:sp>
       <p:pic>
         <p:nvPicPr>
-          <p:cNvPr id="131" name="Picture 130" descr="fig_f13_dominance_plane.png"/>
+          <p:cNvPr id="131" name="Picture 130" descr="routing.png"/>
           <p:cNvPicPr>
             <a:picLocks noChangeAspect="1"/>
           </p:cNvPicPr>
@@ -7275,8 +7275,8 @@
         </p:blipFill>
         <p:spPr>
           <a:xfrm>
-            <a:off x="8316432" y="24030173"/>
-            <a:ext cx="4887936" cy="3533196"/>
+            <a:off x="7768080" y="24477511"/>
+            <a:ext cx="5984640" cy="2738302"/>
           </a:xfrm>
           <a:prstGeom prst="rect">
             <a:avLst/>
@@ -7291,8 +7291,8 @@
         </p:nvSpPr>
         <p:spPr>
           <a:xfrm>
-            <a:off x="7534800" y="27707368"/>
-            <a:ext cx="6451200" cy="279806"/>
+            <a:off x="7534800" y="27359814"/>
+            <a:ext cx="6451200" cy="559612"/>
           </a:xfrm>
           <a:prstGeom prst="rect">
             <a:avLst/>
@@ -7320,7 +7320,16 @@
                 </a:solidFill>
                 <a:latin typeface="Arial"/>
               </a:rPr>
-              <a:t>A win lands in the shaded region. None does.</a:t>
+              <a:t>Nothing learned lands in the shaded region</a:t>
+            </a:r>
+            <a:r>
+              <a:rPr sz="1700" b="0" i="0">
+                <a:solidFill>
+                  <a:srgbClr val="12162E"/>
+                </a:solidFill>
+                <a:latin typeface="Arial"/>
+              </a:rPr>
+              <a:t> — the one square inside is hindsight, not a runnable policy.</a:t>
             </a:r>
           </a:p>
         </p:txBody>
@@ -7333,7 +7342,7 @@
         </p:nvSpPr>
         <p:spPr>
           <a:xfrm>
-            <a:off x="14338800" y="23367773"/>
+            <a:off x="14338800" y="23815111"/>
             <a:ext cx="177988" cy="177988"/>
           </a:xfrm>
           <a:prstGeom prst="rect">
@@ -7378,7 +7387,7 @@
         </p:nvSpPr>
         <p:spPr>
           <a:xfrm>
-            <a:off x="14643923" y="23324573"/>
+            <a:off x="14643923" y="23771911"/>
             <a:ext cx="6144827" cy="238912"/>
           </a:xfrm>
           <a:prstGeom prst="rect">
@@ -7423,7 +7432,7 @@
         </p:nvSpPr>
         <p:spPr>
           <a:xfrm>
-            <a:off x="14338800" y="23685609"/>
+            <a:off x="14338800" y="24132947"/>
             <a:ext cx="1169636" cy="35597"/>
           </a:xfrm>
           <a:prstGeom prst="rect">
@@ -7468,7 +7477,7 @@
         </p:nvSpPr>
         <p:spPr>
           <a:xfrm>
-            <a:off x="15508436" y="23695780"/>
+            <a:off x="15508436" y="24143118"/>
             <a:ext cx="5281564" cy="15256"/>
           </a:xfrm>
           <a:prstGeom prst="rect">
@@ -7513,8 +7522,8 @@
         </p:nvSpPr>
         <p:spPr>
           <a:xfrm>
-            <a:off x="14338800" y="23907773"/>
-            <a:ext cx="6451200" cy="3684894"/>
+            <a:off x="14338800" y="24355111"/>
+            <a:ext cx="6451200" cy="2824852"/>
           </a:xfrm>
           <a:prstGeom prst="rect">
             <a:avLst/>
@@ -7559,7 +7568,7 @@
         </p:nvSpPr>
         <p:spPr>
           <a:xfrm>
-            <a:off x="14338800" y="23907773"/>
+            <a:off x="14338800" y="24355111"/>
             <a:ext cx="6451200" cy="50400"/>
           </a:xfrm>
           <a:prstGeom prst="rect">
@@ -7597,7 +7606,7 @@
       </p:sp>
       <p:pic>
         <p:nvPicPr>
-          <p:cNvPr id="135" name="Picture 134" descr="poster_label_supply.png"/>
+          <p:cNvPr id="135" name="Picture 134" descr="label_supply.png"/>
           <p:cNvPicPr>
             <a:picLocks noChangeAspect="1"/>
           </p:cNvPicPr>
@@ -7611,8 +7620,8 @@
         </p:blipFill>
         <p:spPr>
           <a:xfrm>
-            <a:off x="14410800" y="24030173"/>
-            <a:ext cx="6307200" cy="3490494"/>
+            <a:off x="14410800" y="24477511"/>
+            <a:ext cx="6307200" cy="2630452"/>
           </a:xfrm>
           <a:prstGeom prst="rect">
             <a:avLst/>
@@ -7627,7 +7636,7 @@
         </p:nvSpPr>
         <p:spPr>
           <a:xfrm>
-            <a:off x="14338800" y="27664667"/>
+            <a:off x="14338800" y="27251963"/>
             <a:ext cx="6451200" cy="279806"/>
           </a:xfrm>
           <a:prstGeom prst="rect">

--- a/deliverables/showcase/poster_v9_jiaming_wei.pptx
+++ b/deliverables/showcase/poster_v9_jiaming_wei.pptx
@@ -5875,8 +5875,8 @@
         </p:nvSpPr>
         <p:spPr>
           <a:xfrm>
-            <a:off x="1501344" y="19515970"/>
-            <a:ext cx="4902912" cy="3975141"/>
+            <a:off x="1962605" y="19515970"/>
+            <a:ext cx="3980390" cy="3242239"/>
           </a:xfrm>
           <a:prstGeom prst="rect">
             <a:avLst/>
@@ -5921,8 +5921,8 @@
         </p:nvSpPr>
         <p:spPr>
           <a:xfrm>
-            <a:off x="1501344" y="19515970"/>
-            <a:ext cx="4902912" cy="50400"/>
+            <a:off x="1962605" y="19515970"/>
+            <a:ext cx="3980390" cy="50400"/>
           </a:xfrm>
           <a:prstGeom prst="rect">
             <a:avLst/>
@@ -5973,8 +5973,8 @@
         </p:blipFill>
         <p:spPr>
           <a:xfrm>
-            <a:off x="1573344" y="19638370"/>
-            <a:ext cx="4758912" cy="3780742"/>
+            <a:off x="2034605" y="19638370"/>
+            <a:ext cx="3836390" cy="3047840"/>
           </a:xfrm>
           <a:prstGeom prst="rect">
             <a:avLst/>
@@ -6169,8 +6169,8 @@
         </p:nvSpPr>
         <p:spPr>
           <a:xfrm>
-            <a:off x="7534800" y="19515970"/>
-            <a:ext cx="6451200" cy="2362693"/>
+            <a:off x="8050896" y="19515970"/>
+            <a:ext cx="5419008" cy="3277303"/>
           </a:xfrm>
           <a:prstGeom prst="rect">
             <a:avLst/>
@@ -6215,8 +6215,8 @@
         </p:nvSpPr>
         <p:spPr>
           <a:xfrm>
-            <a:off x="7534800" y="19515970"/>
-            <a:ext cx="6451200" cy="50400"/>
+            <a:off x="8050896" y="19515970"/>
+            <a:ext cx="5419008" cy="50400"/>
           </a:xfrm>
           <a:prstGeom prst="rect">
             <a:avLst/>
@@ -6267,8 +6267,8 @@
         </p:blipFill>
         <p:spPr>
           <a:xfrm>
-            <a:off x="7606800" y="19638370"/>
-            <a:ext cx="6307200" cy="2168293"/>
+            <a:off x="8122896" y="19638370"/>
+            <a:ext cx="5275008" cy="3082904"/>
           </a:xfrm>
           <a:prstGeom prst="rect">
             <a:avLst/>
@@ -6283,7 +6283,7 @@
         </p:nvSpPr>
         <p:spPr>
           <a:xfrm>
-            <a:off x="7534800" y="21950663"/>
+            <a:off x="7534800" y="22865273"/>
             <a:ext cx="6451200" cy="279806"/>
           </a:xfrm>
           <a:prstGeom prst="rect">
@@ -6506,7 +6506,7 @@
         <p:spPr>
           <a:xfrm>
             <a:off x="14338800" y="19515970"/>
-            <a:ext cx="6451200" cy="2581780"/>
+            <a:ext cx="6451200" cy="3307638"/>
           </a:xfrm>
           <a:prstGeom prst="rect">
             <a:avLst/>
@@ -6604,7 +6604,7 @@
         <p:spPr>
           <a:xfrm>
             <a:off x="14410800" y="19638370"/>
-            <a:ext cx="6307200" cy="2387379"/>
+            <a:ext cx="6307200" cy="3113238"/>
           </a:xfrm>
           <a:prstGeom prst="rect">
             <a:avLst/>
@@ -6619,7 +6619,7 @@
         </p:nvSpPr>
         <p:spPr>
           <a:xfrm>
-            <a:off x="14338800" y="22169750"/>
+            <a:off x="14338800" y="22895608"/>
             <a:ext cx="6451200" cy="279806"/>
           </a:xfrm>
           <a:prstGeom prst="rect">
@@ -6661,7 +6661,7 @@
         </p:nvSpPr>
         <p:spPr>
           <a:xfrm>
-            <a:off x="727200" y="23815111"/>
+            <a:off x="727200" y="23571414"/>
             <a:ext cx="177988" cy="177988"/>
           </a:xfrm>
           <a:prstGeom prst="rect">
@@ -6706,7 +6706,7 @@
         </p:nvSpPr>
         <p:spPr>
           <a:xfrm>
-            <a:off x="1032323" y="23771911"/>
+            <a:off x="1032323" y="23528214"/>
             <a:ext cx="6144827" cy="238912"/>
           </a:xfrm>
           <a:prstGeom prst="rect">
@@ -6751,7 +6751,7 @@
         </p:nvSpPr>
         <p:spPr>
           <a:xfrm>
-            <a:off x="727200" y="24132947"/>
+            <a:off x="727200" y="23889250"/>
             <a:ext cx="1169636" cy="35597"/>
           </a:xfrm>
           <a:prstGeom prst="rect">
@@ -6796,7 +6796,7 @@
         </p:nvSpPr>
         <p:spPr>
           <a:xfrm>
-            <a:off x="1896836" y="24143118"/>
+            <a:off x="1896836" y="23899421"/>
             <a:ext cx="5281564" cy="15256"/>
           </a:xfrm>
           <a:prstGeom prst="rect">
@@ -6841,8 +6841,8 @@
         </p:nvSpPr>
         <p:spPr>
           <a:xfrm>
-            <a:off x="727200" y="24355111"/>
-            <a:ext cx="6451200" cy="2659868"/>
+            <a:off x="727200" y="24111414"/>
+            <a:ext cx="6451200" cy="2979118"/>
           </a:xfrm>
           <a:prstGeom prst="rect">
             <a:avLst/>
@@ -6887,7 +6887,7 @@
         </p:nvSpPr>
         <p:spPr>
           <a:xfrm>
-            <a:off x="727200" y="24355111"/>
+            <a:off x="727200" y="24111414"/>
             <a:ext cx="6451200" cy="50400"/>
           </a:xfrm>
           <a:prstGeom prst="rect">
@@ -6939,8 +6939,8 @@
         </p:blipFill>
         <p:spPr>
           <a:xfrm>
-            <a:off x="799200" y="24477511"/>
-            <a:ext cx="6307200" cy="2465468"/>
+            <a:off x="799200" y="24233814"/>
+            <a:ext cx="6307200" cy="2784718"/>
           </a:xfrm>
           <a:prstGeom prst="rect">
             <a:avLst/>
@@ -6955,7 +6955,7 @@
         </p:nvSpPr>
         <p:spPr>
           <a:xfrm>
-            <a:off x="727200" y="27086979"/>
+            <a:off x="727200" y="27162532"/>
             <a:ext cx="6451200" cy="559612"/>
           </a:xfrm>
           <a:prstGeom prst="rect">
@@ -6997,7 +6997,7 @@
         </p:nvSpPr>
         <p:spPr>
           <a:xfrm>
-            <a:off x="7534800" y="23815111"/>
+            <a:off x="7534800" y="23571414"/>
             <a:ext cx="177988" cy="177988"/>
           </a:xfrm>
           <a:prstGeom prst="rect">
@@ -7042,7 +7042,7 @@
         </p:nvSpPr>
         <p:spPr>
           <a:xfrm>
-            <a:off x="7839923" y="23771911"/>
+            <a:off x="7839923" y="23528214"/>
             <a:ext cx="6144827" cy="238912"/>
           </a:xfrm>
           <a:prstGeom prst="rect">
@@ -7087,7 +7087,7 @@
         </p:nvSpPr>
         <p:spPr>
           <a:xfrm>
-            <a:off x="7534800" y="24132947"/>
+            <a:off x="7534800" y="23889250"/>
             <a:ext cx="1169636" cy="35597"/>
           </a:xfrm>
           <a:prstGeom prst="rect">
@@ -7132,7 +7132,7 @@
         </p:nvSpPr>
         <p:spPr>
           <a:xfrm>
-            <a:off x="8704436" y="24143118"/>
+            <a:off x="8704436" y="23899421"/>
             <a:ext cx="5281564" cy="15256"/>
           </a:xfrm>
           <a:prstGeom prst="rect">
@@ -7177,8 +7177,8 @@
         </p:nvSpPr>
         <p:spPr>
           <a:xfrm>
-            <a:off x="7696080" y="24355111"/>
-            <a:ext cx="6128640" cy="2932703"/>
+            <a:off x="7618666" y="24111414"/>
+            <a:ext cx="6283468" cy="3003545"/>
           </a:xfrm>
           <a:prstGeom prst="rect">
             <a:avLst/>
@@ -7223,8 +7223,8 @@
         </p:nvSpPr>
         <p:spPr>
           <a:xfrm>
-            <a:off x="7696080" y="24355111"/>
-            <a:ext cx="6128640" cy="50400"/>
+            <a:off x="7618666" y="24111414"/>
+            <a:ext cx="6283468" cy="50400"/>
           </a:xfrm>
           <a:prstGeom prst="rect">
             <a:avLst/>
@@ -7275,8 +7275,8 @@
         </p:blipFill>
         <p:spPr>
           <a:xfrm>
-            <a:off x="7768080" y="24477511"/>
-            <a:ext cx="5984640" cy="2738302"/>
+            <a:off x="7690666" y="24233814"/>
+            <a:ext cx="6139468" cy="2809145"/>
           </a:xfrm>
           <a:prstGeom prst="rect">
             <a:avLst/>
@@ -7291,7 +7291,7 @@
         </p:nvSpPr>
         <p:spPr>
           <a:xfrm>
-            <a:off x="7534800" y="27359814"/>
+            <a:off x="7534800" y="27186959"/>
             <a:ext cx="6451200" cy="559612"/>
           </a:xfrm>
           <a:prstGeom prst="rect">
@@ -7320,16 +7320,7 @@
                 </a:solidFill>
                 <a:latin typeface="Arial"/>
               </a:rPr>
-              <a:t>Nothing learned lands in the shaded region</a:t>
-            </a:r>
-            <a:r>
-              <a:rPr sz="1700" b="0" i="0">
-                <a:solidFill>
-                  <a:srgbClr val="12162E"/>
-                </a:solidFill>
-                <a:latin typeface="Arial"/>
-              </a:rPr>
-              <a:t> — the one square inside is hindsight, not a runnable policy.</a:t>
+              <a:t>No learned policy enters the win region; the lone square is hindsight.</a:t>
             </a:r>
           </a:p>
         </p:txBody>
@@ -7342,7 +7333,7 @@
         </p:nvSpPr>
         <p:spPr>
           <a:xfrm>
-            <a:off x="14338800" y="23815111"/>
+            <a:off x="14338800" y="23571414"/>
             <a:ext cx="177988" cy="177988"/>
           </a:xfrm>
           <a:prstGeom prst="rect">
@@ -7387,7 +7378,7 @@
         </p:nvSpPr>
         <p:spPr>
           <a:xfrm>
-            <a:off x="14643923" y="23771911"/>
+            <a:off x="14643923" y="23528214"/>
             <a:ext cx="6144827" cy="238912"/>
           </a:xfrm>
           <a:prstGeom prst="rect">
@@ -7432,7 +7423,7 @@
         </p:nvSpPr>
         <p:spPr>
           <a:xfrm>
-            <a:off x="14338800" y="24132947"/>
+            <a:off x="14338800" y="23889250"/>
             <a:ext cx="1169636" cy="35597"/>
           </a:xfrm>
           <a:prstGeom prst="rect">
@@ -7477,7 +7468,7 @@
         </p:nvSpPr>
         <p:spPr>
           <a:xfrm>
-            <a:off x="15508436" y="24143118"/>
+            <a:off x="15508436" y="23899421"/>
             <a:ext cx="5281564" cy="15256"/>
           </a:xfrm>
           <a:prstGeom prst="rect">
@@ -7522,8 +7513,8 @@
         </p:nvSpPr>
         <p:spPr>
           <a:xfrm>
-            <a:off x="14338800" y="24355111"/>
-            <a:ext cx="6451200" cy="2824852"/>
+            <a:off x="14338800" y="24111414"/>
+            <a:ext cx="6451200" cy="3006817"/>
           </a:xfrm>
           <a:prstGeom prst="rect">
             <a:avLst/>
@@ -7568,7 +7559,7 @@
         </p:nvSpPr>
         <p:spPr>
           <a:xfrm>
-            <a:off x="14338800" y="24355111"/>
+            <a:off x="14338800" y="24111414"/>
             <a:ext cx="6451200" cy="50400"/>
           </a:xfrm>
           <a:prstGeom prst="rect">
@@ -7620,8 +7611,8 @@
         </p:blipFill>
         <p:spPr>
           <a:xfrm>
-            <a:off x="14410800" y="24477511"/>
-            <a:ext cx="6307200" cy="2630452"/>
+            <a:off x="14410800" y="24233814"/>
+            <a:ext cx="6307200" cy="2812417"/>
           </a:xfrm>
           <a:prstGeom prst="rect">
             <a:avLst/>
@@ -7636,7 +7627,7 @@
         </p:nvSpPr>
         <p:spPr>
           <a:xfrm>
-            <a:off x="14338800" y="27251963"/>
+            <a:off x="14338800" y="27190231"/>
             <a:ext cx="6451200" cy="279806"/>
           </a:xfrm>
           <a:prstGeom prst="rect">

--- a/deliverables/showcase/poster_v9_jiaming_wei.pptx
+++ b/deliverables/showcase/poster_v9_jiaming_wei.pptx
@@ -5655,7 +5655,7 @@
                 </a:solidFill>
                 <a:latin typeface="Arial"/>
               </a:rPr>
-              <a:t>Both start on the same form.</a:t>
+              <a:t>Same start. READ finishes; LOOK loops back.</a:t>
             </a:r>
             <a:r>
               <a:rPr sz="1550" b="0" i="0">
@@ -5664,25 +5664,7 @@
                 </a:solidFill>
                 <a:latin typeface="Arial"/>
               </a:rPr>
-              <a:t> Then READ finishes it, while </a:t>
-            </a:r>
-            <a:r>
-              <a:rPr sz="1550" b="1" i="0">
-                <a:solidFill>
-                  <a:srgbClr val="12162E"/>
-                </a:solidFill>
-                <a:latin typeface="Arial"/>
-              </a:rPr>
-              <a:t>LOOK ends up back on the page it started from</a:t>
-            </a:r>
-            <a:r>
-              <a:rPr sz="1550" b="0" i="0">
-                <a:solidFill>
-                  <a:srgbClr val="12162E"/>
-                </a:solidFill>
-                <a:latin typeface="Arial"/>
-              </a:rPr>
-              <a:t>. One recorded run per view; both outcomes repeat on an independent rerun.</a:t>
+              <a:t> Both outcomes repeat on an independent rerun.</a:t>
             </a:r>
           </a:p>
         </p:txBody>
@@ -6169,8 +6151,8 @@
         </p:nvSpPr>
         <p:spPr>
           <a:xfrm>
-            <a:off x="8050896" y="19515970"/>
-            <a:ext cx="5419008" cy="3277303"/>
+            <a:off x="7860586" y="19515970"/>
+            <a:ext cx="5799628" cy="3284089"/>
           </a:xfrm>
           <a:prstGeom prst="rect">
             <a:avLst/>
@@ -6215,8 +6197,8 @@
         </p:nvSpPr>
         <p:spPr>
           <a:xfrm>
-            <a:off x="8050896" y="19515970"/>
-            <a:ext cx="5419008" cy="50400"/>
+            <a:off x="7860586" y="19515970"/>
+            <a:ext cx="5799628" cy="50400"/>
           </a:xfrm>
           <a:prstGeom prst="rect">
             <a:avLst/>
@@ -6267,8 +6249,8 @@
         </p:blipFill>
         <p:spPr>
           <a:xfrm>
-            <a:off x="8122896" y="19638370"/>
-            <a:ext cx="5275008" cy="3082904"/>
+            <a:off x="7932586" y="19638370"/>
+            <a:ext cx="5655628" cy="3089689"/>
           </a:xfrm>
           <a:prstGeom prst="rect">
             <a:avLst/>
@@ -6283,7 +6265,7 @@
         </p:nvSpPr>
         <p:spPr>
           <a:xfrm>
-            <a:off x="7534800" y="22865273"/>
+            <a:off x="7534800" y="22872059"/>
             <a:ext cx="6451200" cy="279806"/>
           </a:xfrm>
           <a:prstGeom prst="rect">
@@ -6842,7 +6824,7 @@
         <p:spPr>
           <a:xfrm>
             <a:off x="727200" y="24111414"/>
-            <a:ext cx="6451200" cy="2979118"/>
+            <a:ext cx="6451200" cy="2974935"/>
           </a:xfrm>
           <a:prstGeom prst="rect">
             <a:avLst/>
@@ -6940,7 +6922,7 @@
         <p:spPr>
           <a:xfrm>
             <a:off x="799200" y="24233814"/>
-            <a:ext cx="6307200" cy="2784718"/>
+            <a:ext cx="6307200" cy="2780536"/>
           </a:xfrm>
           <a:prstGeom prst="rect">
             <a:avLst/>
@@ -6955,7 +6937,7 @@
         </p:nvSpPr>
         <p:spPr>
           <a:xfrm>
-            <a:off x="727200" y="27162532"/>
+            <a:off x="727200" y="27158349"/>
             <a:ext cx="6451200" cy="559612"/>
           </a:xfrm>
           <a:prstGeom prst="rect">
@@ -7068,7 +7050,7 @@
                 </a:solidFill>
                 <a:latin typeface="Consolas"/>
               </a:rPr>
-              <a:t>5 · SO CHOOSE PER TASK? NOT SO FAST.</a:t>
+              <a:t>5 · SO BUILD A ROUTER? NOT SO FAST.</a:t>
             </a:r>
             <a:endParaRPr sz="1412" b="1" spc="180" dirty="0">
               <a:solidFill>
@@ -7292,7 +7274,7 @@
         <p:spPr>
           <a:xfrm>
             <a:off x="7534800" y="27186959"/>
-            <a:ext cx="6451200" cy="559612"/>
+            <a:ext cx="6451200" cy="279806"/>
           </a:xfrm>
           <a:prstGeom prst="rect">
             <a:avLst/>
@@ -7320,7 +7302,7 @@
                 </a:solidFill>
                 <a:latin typeface="Arial"/>
               </a:rPr>
-              <a:t>No learned policy enters the win region; the lone square is hindsight.</a:t>
+              <a:t>Only the hindsight oracle enters the win region.</a:t>
             </a:r>
           </a:p>
         </p:txBody>

--- a/deliverables/showcase/poster_v9_jiaming_wei.pptx
+++ b/deliverables/showcase/poster_v9_jiaming_wei.pptx
@@ -5748,7 +5748,7 @@
                 </a:solidFill>
                 <a:latin typeface="Consolas"/>
               </a:rPr>
-              <a:t>1 · SIX VIEWS, EIGHT SETTINGS</a:t>
+              <a:t>1 · NO VIEW WINS EVERYWHERE</a:t>
             </a:r>
             <a:endParaRPr sz="1412" b="1" spc="180" dirty="0">
               <a:solidFill>
@@ -7160,7 +7160,7 @@
         <p:spPr>
           <a:xfrm>
             <a:off x="7618666" y="24111414"/>
-            <a:ext cx="6283468" cy="3003545"/>
+            <a:ext cx="6283468" cy="3068079"/>
           </a:xfrm>
           <a:prstGeom prst="rect">
             <a:avLst/>
@@ -7258,7 +7258,7 @@
         <p:spPr>
           <a:xfrm>
             <a:off x="7690666" y="24233814"/>
-            <a:ext cx="6139468" cy="2809145"/>
+            <a:ext cx="6139468" cy="2873679"/>
           </a:xfrm>
           <a:prstGeom prst="rect">
             <a:avLst/>
@@ -7273,8 +7273,8 @@
         </p:nvSpPr>
         <p:spPr>
           <a:xfrm>
-            <a:off x="7534800" y="27186959"/>
-            <a:ext cx="6451200" cy="279806"/>
+            <a:off x="7534800" y="27251493"/>
+            <a:ext cx="6451200" cy="559612"/>
           </a:xfrm>
           <a:prstGeom prst="rect">
             <a:avLst/>
@@ -7302,7 +7302,7 @@
                 </a:solidFill>
                 <a:latin typeface="Arial"/>
               </a:rPr>
-              <a:t>Only the hindsight oracle enters the win region.</a:t>
+              <a:t>Learned routers buy success only by spending more; only the hindsight oracle reaches the win region.</a:t>
             </a:r>
           </a:p>
         </p:txBody>
